--- a/dist/초3/사회·역사/지역과공간/초3_사회·역사_지역과공간_02_그림과기호로나타내기.pptx
+++ b/dist/초3/사회·역사/지역과공간/초3_사회·역사_지역과공간_02_그림과기호로나타내기.pptx
@@ -121,13 +121,13 @@
   <p:extLst>
     <p:ext uri="{521415D9-36F7-43E2-AB2F-B90AF26B5E84}">
       <p14:sectionLst xmlns:p14="http://schemas.microsoft.com/office/powerpoint/2010/main">
-        <p14:section name="도입" id="{bcae1d15-fe93-e3b6-9c19-871521774a3e}">
+        <p14:section name="도입" id="{52a219ec-b72c-2d6d-0565-70249ff4e9a5}">
           <p14:sldIdLst>
             <p14:sldId id="256"/>
             <p14:sldId id="257"/>
           </p14:sldIdLst>
         </p14:section>
-        <p14:section name="개념" id="{9b4cbb58-828a-bb10-63d7-17f01f19286c}">
+        <p14:section name="개념" id="{435f534d-f28b-0c96-d47b-0c77220eee95}">
           <p14:sldIdLst>
             <p14:sldId id="258"/>
             <p14:sldId id="259"/>
@@ -135,7 +135,7 @@
             <p14:sldId id="263"/>
           </p14:sldIdLst>
         </p14:section>
-        <p14:section name="연습" id="{089cb680-2539-049f-8785-30c1956485a4}">
+        <p14:section name="연습" id="{30b6fa40-d8f8-4bd6-cc2f-3796fb24ffa4}">
           <p14:sldIdLst>
             <p14:sldId id="260"/>
             <p14:sldId id="261"/>
@@ -143,25 +143,25 @@
             <p14:sldId id="265"/>
           </p14:sldIdLst>
         </p14:section>
-        <p14:section name="개념" id="{a769883e-41ab-a32f-5a87-e353af1db3fd}">
+        <p14:section name="개념" id="{80dfdabb-d75a-8564-6c28-aef32db27476}">
           <p14:sldIdLst/>
         </p14:section>
-        <p14:section name="연습" id="{f51411c4-f953-727e-3235-93f31c52beb6}">
+        <p14:section name="연습" id="{c55d34f3-4a00-cecc-1035-7d627d5d4ef4}">
           <p14:sldIdLst/>
         </p14:section>
-        <p14:section name="확인" id="{cb843400-61e3-38be-c9df-b95c4fec4410}">
+        <p14:section name="확인" id="{627d94ac-3f2e-a819-0dc9-e26e2ebb09f7}">
           <p14:sldIdLst>
             <p14:sldId id="266"/>
             <p14:sldId id="267"/>
             <p14:sldId id="268"/>
           </p14:sldIdLst>
         </p14:section>
-        <p14:section name="정리" id="{e0d23e58-f5d7-710c-e19b-6048cd660ce7}">
+        <p14:section name="정리" id="{368f8fed-7ff3-a352-e457-126456917cb5}">
           <p14:sldIdLst>
             <p14:sldId id="269"/>
           </p14:sldIdLst>
         </p14:section>
-        <p14:section name="보충" id="{81c1aea1-fa2f-3fae-23bd-d53160cf9811}">
+        <p14:section name="보충" id="{b5298ce5-404b-9ab5-fdff-f3a265b13e31}">
           <p14:sldIdLst>
             <p14:sldId id="270"/>
           </p14:sldIdLst>
@@ -3385,7 +3385,7 @@
                 <a:ea typeface="맑은 고딕" pitchFamily="34" charset="-122"/>
                 <a:cs typeface="맑은 고딕" pitchFamily="34" charset="-120"/>
               </a:rPr>
-              <a:t>동서남북은 내가 보는 쪽에 따라 바뀔까요?</a:t>
+              <a:t>두 친구가 동서남북을 두고 말했어요.</a:t>
             </a:r>
             <a:endParaRPr lang="ko-KR" sz="3000" dirty="0"/>
           </a:p>
@@ -3897,7 +3897,7 @@
         </p:nvSpPr>
         <p:spPr>
           <a:xfrm>
-            <a:off x="2372639" y="3622853"/>
+            <a:off x="2570418" y="3622853"/>
             <a:ext cx="551383" cy="551383"/>
           </a:xfrm>
           <a:custGeom>
@@ -3938,7 +3938,7 @@
         </p:nvSpPr>
         <p:spPr>
           <a:xfrm>
-            <a:off x="2372639" y="3071470"/>
+            <a:off x="2570418" y="3071470"/>
             <a:ext cx="551383" cy="551383"/>
           </a:xfrm>
           <a:custGeom>
@@ -3979,7 +3979,7 @@
         </p:nvSpPr>
         <p:spPr>
           <a:xfrm>
-            <a:off x="2372639" y="2520086"/>
+            <a:off x="2570418" y="2520086"/>
             <a:ext cx="551383" cy="551383"/>
           </a:xfrm>
           <a:custGeom>
@@ -4020,7 +4020,7 @@
         </p:nvSpPr>
         <p:spPr>
           <a:xfrm>
-            <a:off x="2372639" y="1968703"/>
+            <a:off x="2570418" y="1968703"/>
             <a:ext cx="551383" cy="551383"/>
           </a:xfrm>
           <a:custGeom>
@@ -4061,7 +4061,7 @@
         </p:nvSpPr>
         <p:spPr>
           <a:xfrm>
-            <a:off x="2372639" y="1417320"/>
+            <a:off x="2570418" y="1417320"/>
             <a:ext cx="551383" cy="551383"/>
           </a:xfrm>
           <a:custGeom>
@@ -4102,7 +4102,7 @@
         </p:nvSpPr>
         <p:spPr>
           <a:xfrm>
-            <a:off x="900446" y="2608308"/>
+            <a:off x="1097985" y="2608308"/>
             <a:ext cx="187470" cy="143360"/>
           </a:xfrm>
           <a:custGeom>
@@ -4117,19 +4117,19 @@
                   <a:pt x="187470" y="143360"/>
                 </a:moveTo>
                 <a:lnTo>
-                  <a:pt x="174788" y="71680"/>
-                </a:lnTo>
-                <a:lnTo>
-                  <a:pt x="140603" y="19298"/>
-                </a:lnTo>
-                <a:lnTo>
-                  <a:pt x="93735" y="0"/>
-                </a:lnTo>
-                <a:lnTo>
-                  <a:pt x="46868" y="19298"/>
-                </a:lnTo>
-                <a:lnTo>
-                  <a:pt x="12682" y="71680"/>
+                  <a:pt x="175004" y="71920"/>
+                </a:lnTo>
+                <a:lnTo>
+                  <a:pt x="140962" y="19179"/>
+                </a:lnTo>
+                <a:lnTo>
+                  <a:pt x="93975" y="0"/>
+                </a:lnTo>
+                <a:lnTo>
+                  <a:pt x="46987" y="19179"/>
+                </a:lnTo>
+                <a:lnTo>
+                  <a:pt x="12946" y="71920"/>
                 </a:lnTo>
                 <a:lnTo>
                   <a:pt x="0" y="143360"/>
@@ -4154,7 +4154,7 @@
         </p:nvSpPr>
         <p:spPr>
           <a:xfrm>
-            <a:off x="812225" y="2751667"/>
+            <a:off x="1009764" y="2751667"/>
             <a:ext cx="363913" cy="242609"/>
           </a:xfrm>
           <a:custGeom>
@@ -4200,7 +4200,7 @@
         </p:nvSpPr>
         <p:spPr>
           <a:xfrm>
-            <a:off x="1975643" y="2597280"/>
+            <a:off x="2173422" y="2597280"/>
             <a:ext cx="297747" cy="176443"/>
           </a:xfrm>
           <a:custGeom>
@@ -4243,8 +4243,8 @@
         </p:nvSpPr>
         <p:spPr>
           <a:xfrm>
-            <a:off x="2058351" y="2310561"/>
-            <a:ext cx="77194" cy="143360"/>
+            <a:off x="2256369" y="2310561"/>
+            <a:ext cx="76714" cy="143360"/>
           </a:xfrm>
           <a:custGeom>
             <a:avLst/>
@@ -4253,15 +4253,15 @@
             <a:cxnLst/>
             <a:rect l="l" t="t" r="r" b="b"/>
             <a:pathLst>
-              <a:path w="77194" h="143360">
+              <a:path w="76714" h="143360">
                 <a:moveTo>
                   <a:pt x="0" y="143360"/>
                 </a:moveTo>
                 <a:lnTo>
-                  <a:pt x="77194" y="143360"/>
-                </a:lnTo>
-                <a:lnTo>
-                  <a:pt x="77194" y="0"/>
+                  <a:pt x="76714" y="143360"/>
+                </a:lnTo>
+                <a:lnTo>
+                  <a:pt x="76714" y="0"/>
                 </a:lnTo>
                 <a:lnTo>
                   <a:pt x="0" y="0"/>
@@ -4289,7 +4289,7 @@
         </p:nvSpPr>
         <p:spPr>
           <a:xfrm>
-            <a:off x="1920505" y="2023842"/>
+            <a:off x="2118284" y="2023842"/>
             <a:ext cx="352885" cy="286719"/>
           </a:xfrm>
           <a:custGeom>
@@ -4332,7 +4332,7 @@
         </p:nvSpPr>
         <p:spPr>
           <a:xfrm>
-            <a:off x="3552599" y="2619335"/>
+            <a:off x="3750378" y="2619335"/>
             <a:ext cx="198498" cy="341858"/>
           </a:xfrm>
           <a:custGeom>
@@ -4378,7 +4378,7 @@
         </p:nvSpPr>
         <p:spPr>
           <a:xfrm>
-            <a:off x="3751097" y="2619335"/>
+            <a:off x="3948876" y="2619335"/>
             <a:ext cx="198498" cy="341858"/>
           </a:xfrm>
           <a:custGeom>
@@ -4424,7 +4424,7 @@
         </p:nvSpPr>
         <p:spPr>
           <a:xfrm>
-            <a:off x="3569141" y="3716588"/>
+            <a:off x="3767159" y="3716828"/>
             <a:ext cx="363913" cy="363913"/>
           </a:xfrm>
           <a:custGeom>
@@ -4436,40 +4436,40 @@
             <a:pathLst>
               <a:path w="363913" h="363913">
                 <a:moveTo>
-                  <a:pt x="126818" y="363913"/>
+                  <a:pt x="126578" y="363913"/>
                 </a:moveTo>
                 <a:lnTo>
-                  <a:pt x="237095" y="363913"/>
-                </a:lnTo>
-                <a:lnTo>
-                  <a:pt x="237095" y="237095"/>
-                </a:lnTo>
-                <a:lnTo>
-                  <a:pt x="363913" y="237095"/>
-                </a:lnTo>
-                <a:lnTo>
-                  <a:pt x="363913" y="126818"/>
-                </a:lnTo>
-                <a:lnTo>
-                  <a:pt x="237095" y="126818"/>
-                </a:lnTo>
-                <a:lnTo>
-                  <a:pt x="237095" y="0"/>
-                </a:lnTo>
-                <a:lnTo>
-                  <a:pt x="126818" y="0"/>
-                </a:lnTo>
-                <a:lnTo>
-                  <a:pt x="126818" y="126818"/>
-                </a:lnTo>
-                <a:lnTo>
-                  <a:pt x="0" y="126818"/>
-                </a:lnTo>
-                <a:lnTo>
-                  <a:pt x="0" y="237095"/>
-                </a:lnTo>
-                <a:lnTo>
-                  <a:pt x="126818" y="237095"/>
+                  <a:pt x="236855" y="363913"/>
+                </a:lnTo>
+                <a:lnTo>
+                  <a:pt x="236855" y="236855"/>
+                </a:lnTo>
+                <a:lnTo>
+                  <a:pt x="363913" y="236855"/>
+                </a:lnTo>
+                <a:lnTo>
+                  <a:pt x="363913" y="126578"/>
+                </a:lnTo>
+                <a:lnTo>
+                  <a:pt x="236855" y="126578"/>
+                </a:lnTo>
+                <a:lnTo>
+                  <a:pt x="236855" y="0"/>
+                </a:lnTo>
+                <a:lnTo>
+                  <a:pt x="126578" y="0"/>
+                </a:lnTo>
+                <a:lnTo>
+                  <a:pt x="126578" y="126578"/>
+                </a:lnTo>
+                <a:lnTo>
+                  <a:pt x="0" y="126578"/>
+                </a:lnTo>
+                <a:lnTo>
+                  <a:pt x="0" y="236855"/>
+                </a:lnTo>
+                <a:lnTo>
+                  <a:pt x="126578" y="236855"/>
                 </a:lnTo>
                 <a:close/>
               </a:path>
@@ -4494,7 +4494,7 @@
         </p:nvSpPr>
         <p:spPr>
           <a:xfrm>
-            <a:off x="718490" y="1417320"/>
+            <a:off x="916269" y="1417320"/>
             <a:ext cx="4411066" cy="2756916"/>
           </a:xfrm>
           <a:custGeom>
@@ -4538,8 +4538,8 @@
         </p:nvSpPr>
         <p:spPr>
           <a:xfrm>
-            <a:off x="7279950" y="1417320"/>
-            <a:ext cx="4190512" cy="1984980"/>
+            <a:off x="7197242" y="1932743"/>
+            <a:ext cx="4075441" cy="1726069"/>
           </a:xfrm>
           <a:custGeom>
             <a:avLst/>
@@ -4548,15 +4548,15 @@
             <a:cxnLst/>
             <a:rect l="l" t="t" r="r" b="b"/>
             <a:pathLst>
-              <a:path w="4190512" h="1984980">
+              <a:path w="4075441" h="1726069">
                 <a:moveTo>
-                  <a:pt x="0" y="1984980"/>
+                  <a:pt x="0" y="1726069"/>
                 </a:moveTo>
                 <a:lnTo>
-                  <a:pt x="4190512" y="1984980"/>
-                </a:lnTo>
-                <a:lnTo>
-                  <a:pt x="4190512" y="0"/>
+                  <a:pt x="4075441" y="1726069"/>
+                </a:lnTo>
+                <a:lnTo>
+                  <a:pt x="4075441" y="0"/>
                 </a:lnTo>
                 <a:lnTo>
                   <a:pt x="0" y="0"/>
@@ -4584,8 +4584,8 @@
         </p:nvSpPr>
         <p:spPr>
           <a:xfrm>
-            <a:off x="7279950" y="1417320"/>
-            <a:ext cx="4190512" cy="413537"/>
+            <a:off x="7197242" y="1932743"/>
+            <a:ext cx="4075441" cy="359598"/>
           </a:xfrm>
           <a:custGeom>
             <a:avLst/>
@@ -4594,15 +4594,15 @@
             <a:cxnLst/>
             <a:rect l="l" t="t" r="r" b="b"/>
             <a:pathLst>
-              <a:path w="4190512" h="413537">
+              <a:path w="4075441" h="359598">
                 <a:moveTo>
-                  <a:pt x="0" y="413537"/>
+                  <a:pt x="0" y="359598"/>
                 </a:moveTo>
                 <a:lnTo>
-                  <a:pt x="4190512" y="413537"/>
-                </a:lnTo>
-                <a:lnTo>
-                  <a:pt x="4190512" y="0"/>
+                  <a:pt x="4075441" y="359598"/>
+                </a:lnTo>
+                <a:lnTo>
+                  <a:pt x="4075441" y="0"/>
                 </a:lnTo>
                 <a:lnTo>
                   <a:pt x="0" y="0"/>
@@ -4630,8 +4630,8 @@
         </p:nvSpPr>
         <p:spPr>
           <a:xfrm>
-            <a:off x="7584313" y="1861735"/>
-            <a:ext cx="267972" cy="158798"/>
+            <a:off x="7437933" y="2319191"/>
+            <a:ext cx="233019" cy="138086"/>
           </a:xfrm>
           <a:custGeom>
             <a:avLst/>
@@ -4640,15 +4640,15 @@
             <a:cxnLst/>
             <a:rect l="l" t="t" r="r" b="b"/>
             <a:pathLst>
-              <a:path w="267972" h="158798">
+              <a:path w="233019" h="138086">
                 <a:moveTo>
                   <a:pt x="0" y="0"/>
                 </a:moveTo>
                 <a:lnTo>
-                  <a:pt x="267972" y="79399"/>
-                </a:lnTo>
-                <a:lnTo>
-                  <a:pt x="0" y="158798"/>
+                  <a:pt x="233019" y="69043"/>
+                </a:lnTo>
+                <a:lnTo>
+                  <a:pt x="0" y="138086"/>
                 </a:lnTo>
                 <a:close/>
               </a:path>
@@ -4673,8 +4673,8 @@
         </p:nvSpPr>
         <p:spPr>
           <a:xfrm>
-            <a:off x="9624983" y="1876622"/>
-            <a:ext cx="327522" cy="327522"/>
+            <a:off x="9404214" y="2332137"/>
+            <a:ext cx="284801" cy="284801"/>
           </a:xfrm>
           <a:custGeom>
             <a:avLst/>
@@ -4683,42 +4683,42 @@
             <a:cxnLst/>
             <a:rect l="l" t="t" r="r" b="b"/>
             <a:pathLst>
-              <a:path w="327522" h="327522">
+              <a:path w="284801" h="284801">
                 <a:moveTo>
-                  <a:pt x="114136" y="327522"/>
+                  <a:pt x="99249" y="284801"/>
                 </a:moveTo>
                 <a:lnTo>
-                  <a:pt x="213385" y="327522"/>
-                </a:lnTo>
-                <a:lnTo>
-                  <a:pt x="213385" y="213385"/>
-                </a:lnTo>
-                <a:lnTo>
-                  <a:pt x="327522" y="213385"/>
-                </a:lnTo>
-                <a:lnTo>
-                  <a:pt x="327522" y="114136"/>
-                </a:lnTo>
-                <a:lnTo>
-                  <a:pt x="213385" y="114136"/>
-                </a:lnTo>
-                <a:lnTo>
-                  <a:pt x="213385" y="0"/>
-                </a:lnTo>
-                <a:lnTo>
-                  <a:pt x="114136" y="0"/>
-                </a:lnTo>
-                <a:lnTo>
-                  <a:pt x="114136" y="114136"/>
-                </a:lnTo>
-                <a:lnTo>
-                  <a:pt x="0" y="114136"/>
-                </a:lnTo>
-                <a:lnTo>
-                  <a:pt x="0" y="213385"/>
-                </a:lnTo>
-                <a:lnTo>
-                  <a:pt x="114136" y="213385"/>
+                  <a:pt x="185552" y="284801"/>
+                </a:lnTo>
+                <a:lnTo>
+                  <a:pt x="185552" y="185552"/>
+                </a:lnTo>
+                <a:lnTo>
+                  <a:pt x="284801" y="185552"/>
+                </a:lnTo>
+                <a:lnTo>
+                  <a:pt x="284801" y="99249"/>
+                </a:lnTo>
+                <a:lnTo>
+                  <a:pt x="185552" y="99249"/>
+                </a:lnTo>
+                <a:lnTo>
+                  <a:pt x="185552" y="0"/>
+                </a:lnTo>
+                <a:lnTo>
+                  <a:pt x="99249" y="0"/>
+                </a:lnTo>
+                <a:lnTo>
+                  <a:pt x="99249" y="99249"/>
+                </a:lnTo>
+                <a:lnTo>
+                  <a:pt x="0" y="99249"/>
+                </a:lnTo>
+                <a:lnTo>
+                  <a:pt x="0" y="185552"/>
+                </a:lnTo>
+                <a:lnTo>
+                  <a:pt x="99249" y="185552"/>
                 </a:lnTo>
                 <a:close/>
               </a:path>
@@ -4743,8 +4743,8 @@
         </p:nvSpPr>
         <p:spPr>
           <a:xfrm>
-            <a:off x="7658750" y="2596177"/>
-            <a:ext cx="69474" cy="129024"/>
+            <a:off x="7502661" y="2957837"/>
+            <a:ext cx="60412" cy="112194"/>
           </a:xfrm>
           <a:custGeom>
             <a:avLst/>
@@ -4753,15 +4753,15 @@
             <a:cxnLst/>
             <a:rect l="l" t="t" r="r" b="b"/>
             <a:pathLst>
-              <a:path w="69474" h="129024">
+              <a:path w="60412" h="112194">
                 <a:moveTo>
-                  <a:pt x="0" y="129024"/>
+                  <a:pt x="0" y="112194"/>
                 </a:moveTo>
                 <a:lnTo>
-                  <a:pt x="69474" y="129024"/>
-                </a:lnTo>
-                <a:lnTo>
-                  <a:pt x="69474" y="0"/>
+                  <a:pt x="60412" y="112194"/>
+                </a:lnTo>
+                <a:lnTo>
+                  <a:pt x="60412" y="0"/>
                 </a:lnTo>
                 <a:lnTo>
                   <a:pt x="0" y="0"/>
@@ -4789,8 +4789,8 @@
         </p:nvSpPr>
         <p:spPr>
           <a:xfrm>
-            <a:off x="7534689" y="2338130"/>
-            <a:ext cx="317597" cy="258047"/>
+            <a:off x="7394781" y="2733448"/>
+            <a:ext cx="276171" cy="224389"/>
           </a:xfrm>
           <a:custGeom>
             <a:avLst/>
@@ -4799,15 +4799,15 @@
             <a:cxnLst/>
             <a:rect l="l" t="t" r="r" b="b"/>
             <a:pathLst>
-              <a:path w="317597" h="258047">
+              <a:path w="276171" h="224389">
                 <a:moveTo>
-                  <a:pt x="0" y="258047"/>
+                  <a:pt x="0" y="224389"/>
                 </a:moveTo>
                 <a:lnTo>
-                  <a:pt x="317597" y="258047"/>
-                </a:lnTo>
-                <a:lnTo>
-                  <a:pt x="158798" y="0"/>
+                  <a:pt x="276171" y="224389"/>
+                </a:lnTo>
+                <a:lnTo>
+                  <a:pt x="138086" y="0"/>
                 </a:lnTo>
                 <a:close/>
               </a:path>
@@ -4832,8 +4832,8 @@
         </p:nvSpPr>
         <p:spPr>
           <a:xfrm>
-            <a:off x="9610095" y="2377830"/>
-            <a:ext cx="178648" cy="307672"/>
+            <a:off x="9391268" y="2767969"/>
+            <a:ext cx="155346" cy="267541"/>
           </a:xfrm>
           <a:custGeom>
             <a:avLst/>
@@ -4842,15 +4842,15 @@
             <a:cxnLst/>
             <a:rect l="l" t="t" r="r" b="b"/>
             <a:pathLst>
-              <a:path w="178648" h="307672">
+              <a:path w="155346" h="267541">
                 <a:moveTo>
-                  <a:pt x="0" y="267972"/>
+                  <a:pt x="0" y="233019"/>
                 </a:moveTo>
                 <a:lnTo>
-                  <a:pt x="178648" y="307672"/>
-                </a:lnTo>
-                <a:lnTo>
-                  <a:pt x="178648" y="39700"/>
+                  <a:pt x="155346" y="267541"/>
+                </a:lnTo>
+                <a:lnTo>
+                  <a:pt x="155346" y="34521"/>
                 </a:lnTo>
                 <a:lnTo>
                   <a:pt x="0" y="0"/>
@@ -4878,8 +4878,8 @@
         </p:nvSpPr>
         <p:spPr>
           <a:xfrm>
-            <a:off x="9788743" y="2377830"/>
-            <a:ext cx="178648" cy="307672"/>
+            <a:off x="9546614" y="2767969"/>
+            <a:ext cx="155346" cy="267541"/>
           </a:xfrm>
           <a:custGeom>
             <a:avLst/>
@@ -4888,18 +4888,18 @@
             <a:cxnLst/>
             <a:rect l="l" t="t" r="r" b="b"/>
             <a:pathLst>
-              <a:path w="178648" h="307672">
+              <a:path w="155346" h="267541">
                 <a:moveTo>
-                  <a:pt x="178648" y="267972"/>
+                  <a:pt x="155346" y="233019"/>
                 </a:moveTo>
                 <a:lnTo>
-                  <a:pt x="0" y="307672"/>
-                </a:lnTo>
-                <a:lnTo>
-                  <a:pt x="0" y="39700"/>
-                </a:lnTo>
-                <a:lnTo>
-                  <a:pt x="178648" y="0"/>
+                  <a:pt x="0" y="267541"/>
+                </a:lnTo>
+                <a:lnTo>
+                  <a:pt x="0" y="34521"/>
+                </a:lnTo>
+                <a:lnTo>
+                  <a:pt x="155346" y="0"/>
                 </a:lnTo>
                 <a:close/>
               </a:path>
@@ -4924,8 +4924,8 @@
         </p:nvSpPr>
         <p:spPr>
           <a:xfrm>
-            <a:off x="9704382" y="2864150"/>
-            <a:ext cx="168723" cy="129024"/>
+            <a:off x="9473256" y="3190856"/>
+            <a:ext cx="146716" cy="112194"/>
           </a:xfrm>
           <a:custGeom>
             <a:avLst/>
@@ -4934,27 +4934,27 @@
             <a:cxnLst/>
             <a:rect l="l" t="t" r="r" b="b"/>
             <a:pathLst>
-              <a:path w="168723" h="129024">
+              <a:path w="146716" h="112194">
                 <a:moveTo>
-                  <a:pt x="168723" y="129024"/>
+                  <a:pt x="146716" y="112194"/>
                 </a:moveTo>
                 <a:lnTo>
-                  <a:pt x="157696" y="64512"/>
-                </a:lnTo>
-                <a:lnTo>
-                  <a:pt x="126267" y="17093"/>
-                </a:lnTo>
-                <a:lnTo>
-                  <a:pt x="84362" y="0"/>
-                </a:lnTo>
-                <a:lnTo>
-                  <a:pt x="41905" y="17093"/>
-                </a:lnTo>
-                <a:lnTo>
-                  <a:pt x="11028" y="64512"/>
-                </a:lnTo>
-                <a:lnTo>
-                  <a:pt x="0" y="129024"/>
+                  <a:pt x="137127" y="56097"/>
+                </a:lnTo>
+                <a:lnTo>
+                  <a:pt x="109797" y="14863"/>
+                </a:lnTo>
+                <a:lnTo>
+                  <a:pt x="73358" y="0"/>
+                </a:lnTo>
+                <a:lnTo>
+                  <a:pt x="36919" y="14863"/>
+                </a:lnTo>
+                <a:lnTo>
+                  <a:pt x="9589" y="56097"/>
+                </a:lnTo>
+                <a:lnTo>
+                  <a:pt x="0" y="112194"/>
                 </a:lnTo>
               </a:path>
             </a:pathLst>
@@ -4976,8 +4976,8 @@
         </p:nvSpPr>
         <p:spPr>
           <a:xfrm>
-            <a:off x="9624983" y="2993173"/>
-            <a:ext cx="327522" cy="218348"/>
+            <a:off x="9404214" y="3303051"/>
+            <a:ext cx="284801" cy="189868"/>
           </a:xfrm>
           <a:custGeom>
             <a:avLst/>
@@ -4986,18 +4986,18 @@
             <a:cxnLst/>
             <a:rect l="l" t="t" r="r" b="b"/>
             <a:pathLst>
-              <a:path w="327522" h="218348">
+              <a:path w="284801" h="189868">
                 <a:moveTo>
                   <a:pt x="0" y="0"/>
                 </a:moveTo>
                 <a:lnTo>
-                  <a:pt x="327522" y="0"/>
-                </a:lnTo>
-                <a:lnTo>
-                  <a:pt x="287822" y="218348"/>
-                </a:lnTo>
-                <a:lnTo>
-                  <a:pt x="39700" y="218348"/>
+                  <a:pt x="284801" y="0"/>
+                </a:lnTo>
+                <a:lnTo>
+                  <a:pt x="250280" y="189868"/>
+                </a:lnTo>
+                <a:lnTo>
+                  <a:pt x="34521" y="189868"/>
                 </a:lnTo>
                 <a:close/>
               </a:path>
@@ -5022,8 +5022,8 @@
         </p:nvSpPr>
         <p:spPr>
           <a:xfrm>
-            <a:off x="4120524" y="1511055"/>
-            <a:ext cx="363913" cy="363913"/>
+            <a:off x="4318063" y="1510815"/>
+            <a:ext cx="364392" cy="364392"/>
           </a:xfrm>
           <a:prstGeom prst="ellipse">
             <a:avLst/>
@@ -5047,7 +5047,7 @@
         </p:nvSpPr>
         <p:spPr>
           <a:xfrm>
-            <a:off x="4225287" y="1615818"/>
+            <a:off x="4423066" y="1615818"/>
             <a:ext cx="154387" cy="154387"/>
           </a:xfrm>
           <a:prstGeom prst="ellipse">
@@ -5072,8 +5072,8 @@
         </p:nvSpPr>
         <p:spPr>
           <a:xfrm>
-            <a:off x="7529726" y="2869112"/>
-            <a:ext cx="327522" cy="327522"/>
+            <a:off x="7390466" y="3195171"/>
+            <a:ext cx="284801" cy="284801"/>
           </a:xfrm>
           <a:prstGeom prst="ellipse">
             <a:avLst/>
@@ -5097,8 +5097,8 @@
         </p:nvSpPr>
         <p:spPr>
           <a:xfrm>
-            <a:off x="7624013" y="2963398"/>
-            <a:ext cx="138949" cy="138949"/>
+            <a:off x="7472455" y="3277160"/>
+            <a:ext cx="120825" cy="120825"/>
           </a:xfrm>
           <a:prstGeom prst="ellipse">
             <a:avLst/>
@@ -5122,7 +5122,7 @@
         </p:nvSpPr>
         <p:spPr>
           <a:xfrm flipV="1">
-            <a:off x="1975643" y="2597280"/>
+            <a:off x="2173422" y="2597280"/>
             <a:ext cx="0" cy="396996"/>
           </a:xfrm>
           <a:prstGeom prst="line">
@@ -5145,7 +5145,7 @@
         </p:nvSpPr>
         <p:spPr>
           <a:xfrm flipV="1">
-            <a:off x="718490" y="1417320"/>
+            <a:off x="916269" y="1417320"/>
             <a:ext cx="0" cy="2756916"/>
           </a:xfrm>
           <a:prstGeom prst="line">
@@ -5168,7 +5168,7 @@
         </p:nvSpPr>
         <p:spPr>
           <a:xfrm flipV="1">
-            <a:off x="1269873" y="1417320"/>
+            <a:off x="1467652" y="1417320"/>
             <a:ext cx="0" cy="2756916"/>
           </a:xfrm>
           <a:prstGeom prst="line">
@@ -5191,7 +5191,7 @@
         </p:nvSpPr>
         <p:spPr>
           <a:xfrm flipV="1">
-            <a:off x="1821256" y="1417320"/>
+            <a:off x="2019035" y="1417320"/>
             <a:ext cx="0" cy="2756916"/>
           </a:xfrm>
           <a:prstGeom prst="line">
@@ -5214,7 +5214,7 @@
         </p:nvSpPr>
         <p:spPr>
           <a:xfrm flipV="1">
-            <a:off x="2372639" y="1417320"/>
+            <a:off x="2570418" y="1417320"/>
             <a:ext cx="0" cy="2756916"/>
           </a:xfrm>
           <a:prstGeom prst="line">
@@ -5237,7 +5237,7 @@
         </p:nvSpPr>
         <p:spPr>
           <a:xfrm flipV="1">
-            <a:off x="2924023" y="1417320"/>
+            <a:off x="3121801" y="1417320"/>
             <a:ext cx="0" cy="2756916"/>
           </a:xfrm>
           <a:prstGeom prst="line">
@@ -5260,7 +5260,7 @@
         </p:nvSpPr>
         <p:spPr>
           <a:xfrm flipV="1">
-            <a:off x="3475406" y="1417320"/>
+            <a:off x="3673185" y="1417320"/>
             <a:ext cx="0" cy="2756916"/>
           </a:xfrm>
           <a:prstGeom prst="line">
@@ -5283,7 +5283,7 @@
         </p:nvSpPr>
         <p:spPr>
           <a:xfrm flipV="1">
-            <a:off x="4026789" y="1417320"/>
+            <a:off x="4224568" y="1417320"/>
             <a:ext cx="0" cy="2756916"/>
           </a:xfrm>
           <a:prstGeom prst="line">
@@ -5306,7 +5306,7 @@
         </p:nvSpPr>
         <p:spPr>
           <a:xfrm flipV="1">
-            <a:off x="4578172" y="1417320"/>
+            <a:off x="4775951" y="1417320"/>
             <a:ext cx="0" cy="2756916"/>
           </a:xfrm>
           <a:prstGeom prst="line">
@@ -5329,7 +5329,7 @@
         </p:nvSpPr>
         <p:spPr>
           <a:xfrm flipV="1">
-            <a:off x="5129555" y="1417320"/>
+            <a:off x="5327334" y="1417320"/>
             <a:ext cx="0" cy="2756916"/>
           </a:xfrm>
           <a:prstGeom prst="line">
@@ -5352,7 +5352,7 @@
         </p:nvSpPr>
         <p:spPr>
           <a:xfrm>
-            <a:off x="718490" y="4174236"/>
+            <a:off x="916269" y="4174236"/>
             <a:ext cx="4411066" cy="0"/>
           </a:xfrm>
           <a:prstGeom prst="line">
@@ -5375,7 +5375,7 @@
         </p:nvSpPr>
         <p:spPr>
           <a:xfrm>
-            <a:off x="718490" y="3622853"/>
+            <a:off x="916269" y="3622853"/>
             <a:ext cx="4411066" cy="0"/>
           </a:xfrm>
           <a:prstGeom prst="line">
@@ -5398,7 +5398,7 @@
         </p:nvSpPr>
         <p:spPr>
           <a:xfrm>
-            <a:off x="718490" y="3071470"/>
+            <a:off x="916269" y="3071470"/>
             <a:ext cx="4411066" cy="0"/>
           </a:xfrm>
           <a:prstGeom prst="line">
@@ -5421,7 +5421,7 @@
         </p:nvSpPr>
         <p:spPr>
           <a:xfrm>
-            <a:off x="718490" y="2520086"/>
+            <a:off x="916269" y="2520086"/>
             <a:ext cx="4411066" cy="0"/>
           </a:xfrm>
           <a:prstGeom prst="line">
@@ -5444,7 +5444,7 @@
         </p:nvSpPr>
         <p:spPr>
           <a:xfrm>
-            <a:off x="718490" y="1968703"/>
+            <a:off x="916269" y="1968703"/>
             <a:ext cx="4411066" cy="0"/>
           </a:xfrm>
           <a:prstGeom prst="line">
@@ -5467,7 +5467,7 @@
         </p:nvSpPr>
         <p:spPr>
           <a:xfrm>
-            <a:off x="718490" y="1417320"/>
+            <a:off x="916269" y="1417320"/>
             <a:ext cx="4411066" cy="0"/>
           </a:xfrm>
           <a:prstGeom prst="line">
@@ -5490,8 +5490,8 @@
         </p:nvSpPr>
         <p:spPr>
           <a:xfrm flipV="1">
-            <a:off x="6177183" y="2327102"/>
-            <a:ext cx="0" cy="937351"/>
+            <a:off x="6238315" y="2388234"/>
+            <a:ext cx="0" cy="815088"/>
           </a:xfrm>
           <a:prstGeom prst="line">
             <a:avLst/>
@@ -5514,8 +5514,8 @@
         </p:nvSpPr>
         <p:spPr>
           <a:xfrm>
-            <a:off x="5708508" y="2795778"/>
-            <a:ext cx="937351" cy="0"/>
+            <a:off x="5830771" y="2795778"/>
+            <a:ext cx="815088" cy="0"/>
           </a:xfrm>
           <a:prstGeom prst="line">
             <a:avLst/>
@@ -5537,8 +5537,8 @@
         </p:nvSpPr>
         <p:spPr>
           <a:xfrm flipV="1">
-            <a:off x="7584313" y="1861735"/>
-            <a:ext cx="0" cy="357296"/>
+            <a:off x="7437933" y="2319191"/>
+            <a:ext cx="0" cy="310692"/>
           </a:xfrm>
           <a:prstGeom prst="line">
             <a:avLst/>
@@ -5560,7 +5560,7 @@
         </p:nvSpPr>
         <p:spPr>
           <a:xfrm>
-            <a:off x="5972967" y="1888480"/>
+            <a:off x="6034099" y="1981975"/>
             <a:ext cx="408432" cy="381000"/>
           </a:xfrm>
           <a:prstGeom prst="rect">
@@ -5599,7 +5599,7 @@
         </p:nvSpPr>
         <p:spPr>
           <a:xfrm>
-            <a:off x="5972967" y="3322076"/>
+            <a:off x="6034099" y="3228581"/>
             <a:ext cx="408432" cy="381000"/>
           </a:xfrm>
           <a:prstGeom prst="rect">
@@ -5638,7 +5638,7 @@
         </p:nvSpPr>
         <p:spPr>
           <a:xfrm>
-            <a:off x="6689766" y="2605278"/>
+            <a:off x="6657402" y="2605278"/>
             <a:ext cx="408432" cy="381000"/>
           </a:xfrm>
           <a:prstGeom prst="rect">
@@ -5677,7 +5677,7 @@
         </p:nvSpPr>
         <p:spPr>
           <a:xfrm>
-            <a:off x="5256169" y="2605278"/>
+            <a:off x="5410796" y="2605278"/>
             <a:ext cx="408432" cy="381000"/>
           </a:xfrm>
           <a:prstGeom prst="rect">
@@ -5716,7 +5716,7 @@
         </p:nvSpPr>
         <p:spPr>
           <a:xfrm>
-            <a:off x="9021638" y="1433589"/>
+            <a:off x="8881395" y="1922042"/>
             <a:ext cx="707136" cy="381000"/>
           </a:xfrm>
           <a:prstGeom prst="rect">
@@ -5755,7 +5755,7 @@
         </p:nvSpPr>
         <p:spPr>
           <a:xfrm>
-            <a:off x="8249702" y="1849883"/>
+            <a:off x="8138226" y="2284037"/>
             <a:ext cx="707136" cy="381000"/>
           </a:xfrm>
           <a:prstGeom prst="rect">
@@ -5794,7 +5794,7 @@
         </p:nvSpPr>
         <p:spPr>
           <a:xfrm>
-            <a:off x="10344958" y="1849883"/>
+            <a:off x="10151974" y="2284037"/>
             <a:ext cx="707136" cy="381000"/>
           </a:xfrm>
           <a:prstGeom prst="rect">
@@ -5833,7 +5833,7 @@
         </p:nvSpPr>
         <p:spPr>
           <a:xfrm>
-            <a:off x="8249702" y="2346128"/>
+            <a:off x="8138226" y="2715555"/>
             <a:ext cx="707136" cy="381000"/>
           </a:xfrm>
           <a:prstGeom prst="rect">
@@ -5872,7 +5872,7 @@
         </p:nvSpPr>
         <p:spPr>
           <a:xfrm>
-            <a:off x="10195606" y="2346128"/>
+            <a:off x="10002622" y="2715555"/>
             <a:ext cx="1005840" cy="381000"/>
           </a:xfrm>
           <a:prstGeom prst="rect">
@@ -5911,7 +5911,7 @@
         </p:nvSpPr>
         <p:spPr>
           <a:xfrm>
-            <a:off x="7950998" y="2842373"/>
+            <a:off x="7839522" y="3147072"/>
             <a:ext cx="1304544" cy="381000"/>
           </a:xfrm>
           <a:prstGeom prst="rect">
@@ -5950,7 +5950,7 @@
         </p:nvSpPr>
         <p:spPr>
           <a:xfrm>
-            <a:off x="10344958" y="2842373"/>
+            <a:off x="10151974" y="3147072"/>
             <a:ext cx="707136" cy="381000"/>
           </a:xfrm>
           <a:prstGeom prst="rect">
@@ -6322,7 +6322,7 @@
                 <a:ea typeface="맑은 고딕" pitchFamily="34" charset="-122"/>
                 <a:cs typeface="맑은 고딕" pitchFamily="34" charset="-120"/>
               </a:rPr>
-              <a:t>② 학교의 북쪽</a:t>
+              <a:t>② 북쪽</a:t>
             </a:r>
             <a:endParaRPr lang="ko-KR" sz="3000" dirty="0"/>
           </a:p>
@@ -6361,7 +6361,7 @@
                 <a:ea typeface="맑은 고딕" pitchFamily="34" charset="-122"/>
                 <a:cs typeface="맑은 고딕" pitchFamily="34" charset="-120"/>
               </a:rPr>
-              <a:t>위쪽 = 북쪽</a:t>
+              <a:t>학교 기준</a:t>
             </a:r>
             <a:endParaRPr lang="ko-KR" sz="2400" dirty="0"/>
           </a:p>
@@ -6400,7 +6400,7 @@
                 <a:ea typeface="맑은 고딕" pitchFamily="34" charset="-122"/>
                 <a:cs typeface="맑은 고딕" pitchFamily="34" charset="-120"/>
               </a:rPr>
-              <a:t>③ 도서관의 남쪽</a:t>
+              <a:t>③ 남쪽</a:t>
             </a:r>
             <a:endParaRPr lang="ko-KR" sz="3000" dirty="0"/>
           </a:p>
@@ -6439,7 +6439,7 @@
                 <a:ea typeface="맑은 고딕" pitchFamily="34" charset="-122"/>
                 <a:cs typeface="맑은 고딕" pitchFamily="34" charset="-120"/>
               </a:rPr>
-              <a:t>아래쪽 = 남쪽</a:t>
+              <a:t>도서관 기준</a:t>
             </a:r>
             <a:endParaRPr lang="ko-KR" sz="2400" dirty="0"/>
           </a:p>
@@ -6525,7 +6525,7 @@
                 <a:ea typeface="맑은 고딕" pitchFamily="34" charset="-122"/>
                 <a:cs typeface="맑은 고딕" pitchFamily="34" charset="-120"/>
               </a:rPr>
-              <a:t>“위쪽에 있어요.”</a:t>
+              <a:t>“위쪽이요.”</a:t>
             </a:r>
             <a:endParaRPr lang="ko-KR" sz="3000" dirty="0"/>
           </a:p>
@@ -6603,7 +6603,7 @@
                 <a:ea typeface="맑은 고딕" pitchFamily="34" charset="-122"/>
                 <a:cs typeface="맑은 고딕" pitchFamily="34" charset="-120"/>
               </a:rPr>
-              <a:t>동쪽 ↔ 서쪽</a:t>
+              <a:t>동 ↔ 서</a:t>
             </a:r>
             <a:endParaRPr lang="ko-KR" sz="3000" dirty="0"/>
           </a:p>
@@ -6919,7 +6919,7 @@
         </p:nvSpPr>
         <p:spPr>
           <a:xfrm>
-            <a:off x="548640" y="2092452"/>
+            <a:off x="548640" y="2237232"/>
             <a:ext cx="548640" cy="548640"/>
           </a:xfrm>
           <a:prstGeom prst="ellipse">
@@ -6964,8 +6964,8 @@
         </p:nvSpPr>
         <p:spPr>
           <a:xfrm>
-            <a:off x="1325880" y="2046732"/>
-            <a:ext cx="5122012" cy="929640"/>
+            <a:off x="1325880" y="2237232"/>
+            <a:ext cx="5122012" cy="548640"/>
           </a:xfrm>
           <a:prstGeom prst="rect">
             <a:avLst/>
@@ -6989,7 +6989,7 @@
                 <a:ea typeface="맑은 고딕" pitchFamily="34" charset="-122"/>
                 <a:cs typeface="맑은 고딕" pitchFamily="34" charset="-120"/>
               </a:rPr>
-              <a:t>방위표를 그려요(위쪽이 북쪽).</a:t>
+              <a:t>방위표부터 그려요.</a:t>
             </a:r>
             <a:endParaRPr lang="ko-KR" sz="3000" dirty="0"/>
           </a:p>
@@ -7003,7 +7003,7 @@
         </p:nvSpPr>
         <p:spPr>
           <a:xfrm>
-            <a:off x="548640" y="3186684"/>
+            <a:off x="548640" y="2996184"/>
             <a:ext cx="548640" cy="548640"/>
           </a:xfrm>
           <a:prstGeom prst="ellipse">
@@ -7048,7 +7048,7 @@
         </p:nvSpPr>
         <p:spPr>
           <a:xfrm>
-            <a:off x="1325880" y="3140964"/>
+            <a:off x="1325880" y="2950464"/>
             <a:ext cx="5122012" cy="929640"/>
           </a:xfrm>
           <a:prstGeom prst="rect">
@@ -7087,7 +7087,7 @@
         </p:nvSpPr>
         <p:spPr>
           <a:xfrm>
-            <a:off x="548640" y="4235196"/>
+            <a:off x="548640" y="4044696"/>
             <a:ext cx="548640" cy="548640"/>
           </a:xfrm>
           <a:prstGeom prst="ellipse">
@@ -7132,7 +7132,7 @@
         </p:nvSpPr>
         <p:spPr>
           <a:xfrm>
-            <a:off x="1325880" y="4235196"/>
+            <a:off x="1325880" y="4044696"/>
             <a:ext cx="5122012" cy="548640"/>
           </a:xfrm>
           <a:prstGeom prst="rect">
@@ -7171,7 +7171,7 @@
         </p:nvSpPr>
         <p:spPr>
           <a:xfrm>
-            <a:off x="548640" y="4948428"/>
+            <a:off x="548640" y="4757928"/>
             <a:ext cx="548640" cy="548640"/>
           </a:xfrm>
           <a:prstGeom prst="ellipse">
@@ -7216,7 +7216,7 @@
         </p:nvSpPr>
         <p:spPr>
           <a:xfrm>
-            <a:off x="1325880" y="4948428"/>
+            <a:off x="1325880" y="4757928"/>
             <a:ext cx="5122012" cy="548640"/>
           </a:xfrm>
           <a:prstGeom prst="rect">
@@ -10921,8 +10921,8 @@
         </p:nvSpPr>
         <p:spPr>
           <a:xfrm>
-            <a:off x="640080" y="3197891"/>
-            <a:ext cx="507386" cy="507386"/>
+            <a:off x="640080" y="3223260"/>
+            <a:ext cx="578497" cy="578497"/>
           </a:xfrm>
           <a:custGeom>
             <a:avLst/>
@@ -10931,15 +10931,15 @@
             <a:cxnLst/>
             <a:rect l="l" t="t" r="r" b="b"/>
             <a:pathLst>
-              <a:path w="507386" h="507386">
+              <a:path w="578497" h="578497">
                 <a:moveTo>
-                  <a:pt x="0" y="507386"/>
+                  <a:pt x="0" y="578497"/>
                 </a:moveTo>
                 <a:lnTo>
-                  <a:pt x="507386" y="507386"/>
-                </a:lnTo>
-                <a:lnTo>
-                  <a:pt x="507386" y="0"/>
+                  <a:pt x="578497" y="578497"/>
+                </a:lnTo>
+                <a:lnTo>
+                  <a:pt x="578497" y="0"/>
                 </a:lnTo>
                 <a:lnTo>
                   <a:pt x="0" y="0"/>
@@ -10962,8 +10962,8 @@
         </p:nvSpPr>
         <p:spPr>
           <a:xfrm>
-            <a:off x="1147466" y="3197891"/>
-            <a:ext cx="507386" cy="507386"/>
+            <a:off x="1218577" y="3223260"/>
+            <a:ext cx="578497" cy="578497"/>
           </a:xfrm>
           <a:custGeom>
             <a:avLst/>
@@ -10972,15 +10972,15 @@
             <a:cxnLst/>
             <a:rect l="l" t="t" r="r" b="b"/>
             <a:pathLst>
-              <a:path w="507386" h="507386">
+              <a:path w="578497" h="578497">
                 <a:moveTo>
-                  <a:pt x="0" y="507386"/>
+                  <a:pt x="0" y="578497"/>
                 </a:moveTo>
                 <a:lnTo>
-                  <a:pt x="507386" y="507386"/>
-                </a:lnTo>
-                <a:lnTo>
-                  <a:pt x="507386" y="0"/>
+                  <a:pt x="578497" y="578497"/>
+                </a:lnTo>
+                <a:lnTo>
+                  <a:pt x="578497" y="0"/>
                 </a:lnTo>
                 <a:lnTo>
                   <a:pt x="0" y="0"/>
@@ -11003,8 +11003,8 @@
         </p:nvSpPr>
         <p:spPr>
           <a:xfrm>
-            <a:off x="1654851" y="3197891"/>
-            <a:ext cx="507386" cy="507386"/>
+            <a:off x="1797073" y="3223260"/>
+            <a:ext cx="578497" cy="578497"/>
           </a:xfrm>
           <a:custGeom>
             <a:avLst/>
@@ -11013,15 +11013,15 @@
             <a:cxnLst/>
             <a:rect l="l" t="t" r="r" b="b"/>
             <a:pathLst>
-              <a:path w="507386" h="507386">
+              <a:path w="578497" h="578497">
                 <a:moveTo>
-                  <a:pt x="0" y="507386"/>
+                  <a:pt x="0" y="578497"/>
                 </a:moveTo>
                 <a:lnTo>
-                  <a:pt x="507386" y="507386"/>
-                </a:lnTo>
-                <a:lnTo>
-                  <a:pt x="507386" y="0"/>
+                  <a:pt x="578497" y="578497"/>
+                </a:lnTo>
+                <a:lnTo>
+                  <a:pt x="578497" y="0"/>
                 </a:lnTo>
                 <a:lnTo>
                   <a:pt x="0" y="0"/>
@@ -11044,8 +11044,8 @@
         </p:nvSpPr>
         <p:spPr>
           <a:xfrm>
-            <a:off x="2162237" y="3197891"/>
-            <a:ext cx="507386" cy="507386"/>
+            <a:off x="2375570" y="3223260"/>
+            <a:ext cx="578497" cy="578497"/>
           </a:xfrm>
           <a:custGeom>
             <a:avLst/>
@@ -11054,15 +11054,15 @@
             <a:cxnLst/>
             <a:rect l="l" t="t" r="r" b="b"/>
             <a:pathLst>
-              <a:path w="507386" h="507386">
+              <a:path w="578497" h="578497">
                 <a:moveTo>
-                  <a:pt x="0" y="507386"/>
+                  <a:pt x="0" y="578497"/>
                 </a:moveTo>
                 <a:lnTo>
-                  <a:pt x="507386" y="507386"/>
-                </a:lnTo>
-                <a:lnTo>
-                  <a:pt x="507386" y="0"/>
+                  <a:pt x="578497" y="578497"/>
+                </a:lnTo>
+                <a:lnTo>
+                  <a:pt x="578497" y="0"/>
                 </a:lnTo>
                 <a:lnTo>
                   <a:pt x="0" y="0"/>
@@ -11085,8 +11085,8 @@
         </p:nvSpPr>
         <p:spPr>
           <a:xfrm>
-            <a:off x="2669623" y="3197891"/>
-            <a:ext cx="507386" cy="507386"/>
+            <a:off x="2954066" y="3223260"/>
+            <a:ext cx="578497" cy="578497"/>
           </a:xfrm>
           <a:custGeom>
             <a:avLst/>
@@ -11095,15 +11095,15 @@
             <a:cxnLst/>
             <a:rect l="l" t="t" r="r" b="b"/>
             <a:pathLst>
-              <a:path w="507386" h="507386">
+              <a:path w="578497" h="578497">
                 <a:moveTo>
-                  <a:pt x="0" y="507386"/>
+                  <a:pt x="0" y="578497"/>
                 </a:moveTo>
                 <a:lnTo>
-                  <a:pt x="507386" y="507386"/>
-                </a:lnTo>
-                <a:lnTo>
-                  <a:pt x="507386" y="0"/>
+                  <a:pt x="578497" y="578497"/>
+                </a:lnTo>
+                <a:lnTo>
+                  <a:pt x="578497" y="0"/>
                 </a:lnTo>
                 <a:lnTo>
                   <a:pt x="0" y="0"/>
@@ -11126,8 +11126,8 @@
         </p:nvSpPr>
         <p:spPr>
           <a:xfrm>
-            <a:off x="3177008" y="3197891"/>
-            <a:ext cx="507386" cy="507386"/>
+            <a:off x="3532563" y="3223260"/>
+            <a:ext cx="578497" cy="578497"/>
           </a:xfrm>
           <a:custGeom>
             <a:avLst/>
@@ -11136,15 +11136,15 @@
             <a:cxnLst/>
             <a:rect l="l" t="t" r="r" b="b"/>
             <a:pathLst>
-              <a:path w="507386" h="507386">
+              <a:path w="578497" h="578497">
                 <a:moveTo>
-                  <a:pt x="0" y="507386"/>
+                  <a:pt x="0" y="578497"/>
                 </a:moveTo>
                 <a:lnTo>
-                  <a:pt x="507386" y="507386"/>
-                </a:lnTo>
-                <a:lnTo>
-                  <a:pt x="507386" y="0"/>
+                  <a:pt x="578497" y="578497"/>
+                </a:lnTo>
+                <a:lnTo>
+                  <a:pt x="578497" y="0"/>
                 </a:lnTo>
                 <a:lnTo>
                   <a:pt x="0" y="0"/>
@@ -11167,8 +11167,8 @@
         </p:nvSpPr>
         <p:spPr>
           <a:xfrm>
-            <a:off x="3684394" y="3197891"/>
-            <a:ext cx="507386" cy="507386"/>
+            <a:off x="4111059" y="3223260"/>
+            <a:ext cx="578497" cy="578497"/>
           </a:xfrm>
           <a:custGeom>
             <a:avLst/>
@@ -11177,15 +11177,15 @@
             <a:cxnLst/>
             <a:rect l="l" t="t" r="r" b="b"/>
             <a:pathLst>
-              <a:path w="507386" h="507386">
+              <a:path w="578497" h="578497">
                 <a:moveTo>
-                  <a:pt x="0" y="507386"/>
+                  <a:pt x="0" y="578497"/>
                 </a:moveTo>
                 <a:lnTo>
-                  <a:pt x="507386" y="507386"/>
-                </a:lnTo>
-                <a:lnTo>
-                  <a:pt x="507386" y="0"/>
+                  <a:pt x="578497" y="578497"/>
+                </a:lnTo>
+                <a:lnTo>
+                  <a:pt x="578497" y="0"/>
                 </a:lnTo>
                 <a:lnTo>
                   <a:pt x="0" y="0"/>
@@ -11208,8 +11208,8 @@
         </p:nvSpPr>
         <p:spPr>
           <a:xfrm>
-            <a:off x="4191780" y="3197891"/>
-            <a:ext cx="507386" cy="507386"/>
+            <a:off x="4689556" y="3223260"/>
+            <a:ext cx="578497" cy="578497"/>
           </a:xfrm>
           <a:custGeom>
             <a:avLst/>
@@ -11218,15 +11218,15 @@
             <a:cxnLst/>
             <a:rect l="l" t="t" r="r" b="b"/>
             <a:pathLst>
-              <a:path w="507386" h="507386">
+              <a:path w="578497" h="578497">
                 <a:moveTo>
-                  <a:pt x="0" y="507386"/>
+                  <a:pt x="0" y="578497"/>
                 </a:moveTo>
                 <a:lnTo>
-                  <a:pt x="507386" y="507386"/>
-                </a:lnTo>
-                <a:lnTo>
-                  <a:pt x="507386" y="0"/>
+                  <a:pt x="578497" y="578497"/>
+                </a:lnTo>
+                <a:lnTo>
+                  <a:pt x="578497" y="0"/>
                 </a:lnTo>
                 <a:lnTo>
                   <a:pt x="0" y="0"/>
@@ -11249,8 +11249,8 @@
         </p:nvSpPr>
         <p:spPr>
           <a:xfrm>
-            <a:off x="4699165" y="3197891"/>
-            <a:ext cx="507386" cy="507386"/>
+            <a:off x="5268052" y="3223260"/>
+            <a:ext cx="578497" cy="578497"/>
           </a:xfrm>
           <a:custGeom>
             <a:avLst/>
@@ -11259,15 +11259,15 @@
             <a:cxnLst/>
             <a:rect l="l" t="t" r="r" b="b"/>
             <a:pathLst>
-              <a:path w="507386" h="507386">
+              <a:path w="578497" h="578497">
                 <a:moveTo>
-                  <a:pt x="0" y="507386"/>
+                  <a:pt x="0" y="578497"/>
                 </a:moveTo>
                 <a:lnTo>
-                  <a:pt x="507386" y="507386"/>
-                </a:lnTo>
-                <a:lnTo>
-                  <a:pt x="507386" y="0"/>
+                  <a:pt x="578497" y="578497"/>
+                </a:lnTo>
+                <a:lnTo>
+                  <a:pt x="578497" y="0"/>
                 </a:lnTo>
                 <a:lnTo>
                   <a:pt x="0" y="0"/>
@@ -11290,8 +11290,8 @@
         </p:nvSpPr>
         <p:spPr>
           <a:xfrm>
-            <a:off x="5206551" y="3197891"/>
-            <a:ext cx="507386" cy="507386"/>
+            <a:off x="5846549" y="3223260"/>
+            <a:ext cx="578497" cy="578497"/>
           </a:xfrm>
           <a:custGeom>
             <a:avLst/>
@@ -11300,15 +11300,15 @@
             <a:cxnLst/>
             <a:rect l="l" t="t" r="r" b="b"/>
             <a:pathLst>
-              <a:path w="507386" h="507386">
+              <a:path w="578497" h="578497">
                 <a:moveTo>
-                  <a:pt x="0" y="507386"/>
+                  <a:pt x="0" y="578497"/>
                 </a:moveTo>
                 <a:lnTo>
-                  <a:pt x="507386" y="507386"/>
-                </a:lnTo>
-                <a:lnTo>
-                  <a:pt x="507386" y="0"/>
+                  <a:pt x="578497" y="578497"/>
+                </a:lnTo>
+                <a:lnTo>
+                  <a:pt x="578497" y="0"/>
                 </a:lnTo>
                 <a:lnTo>
                   <a:pt x="0" y="0"/>
@@ -11331,8 +11331,8 @@
         </p:nvSpPr>
         <p:spPr>
           <a:xfrm>
-            <a:off x="1218500" y="2781834"/>
-            <a:ext cx="182659" cy="314579"/>
+            <a:off x="1299566" y="2748893"/>
+            <a:ext cx="208259" cy="358668"/>
           </a:xfrm>
           <a:custGeom>
             <a:avLst/>
@@ -11341,15 +11341,15 @@
             <a:cxnLst/>
             <a:rect l="l" t="t" r="r" b="b"/>
             <a:pathLst>
-              <a:path w="182659" h="314579">
+              <a:path w="208259" h="358668">
                 <a:moveTo>
-                  <a:pt x="0" y="273988"/>
+                  <a:pt x="0" y="312388"/>
                 </a:moveTo>
                 <a:lnTo>
-                  <a:pt x="182659" y="314579"/>
-                </a:lnTo>
-                <a:lnTo>
-                  <a:pt x="182659" y="40591"/>
+                  <a:pt x="208259" y="358668"/>
+                </a:lnTo>
+                <a:lnTo>
+                  <a:pt x="208259" y="46280"/>
                 </a:lnTo>
                 <a:lnTo>
                   <a:pt x="0" y="0"/>
@@ -11377,8 +11377,8 @@
         </p:nvSpPr>
         <p:spPr>
           <a:xfrm>
-            <a:off x="1401159" y="2781834"/>
-            <a:ext cx="182659" cy="314579"/>
+            <a:off x="1507825" y="2748893"/>
+            <a:ext cx="208259" cy="358668"/>
           </a:xfrm>
           <a:custGeom>
             <a:avLst/>
@@ -11387,18 +11387,18 @@
             <a:cxnLst/>
             <a:rect l="l" t="t" r="r" b="b"/>
             <a:pathLst>
-              <a:path w="182659" h="314579">
+              <a:path w="208259" h="358668">
                 <a:moveTo>
-                  <a:pt x="182659" y="273988"/>
+                  <a:pt x="208259" y="312388"/>
                 </a:moveTo>
                 <a:lnTo>
-                  <a:pt x="0" y="314579"/>
-                </a:lnTo>
-                <a:lnTo>
-                  <a:pt x="0" y="40591"/>
-                </a:lnTo>
-                <a:lnTo>
-                  <a:pt x="182659" y="0"/>
+                  <a:pt x="0" y="358668"/>
+                </a:lnTo>
+                <a:lnTo>
+                  <a:pt x="0" y="46280"/>
+                </a:lnTo>
+                <a:lnTo>
+                  <a:pt x="208259" y="0"/>
                 </a:lnTo>
                 <a:close/>
               </a:path>
@@ -11423,8 +11423,8 @@
         </p:nvSpPr>
         <p:spPr>
           <a:xfrm>
-            <a:off x="2811691" y="2761539"/>
-            <a:ext cx="273988" cy="162363"/>
+            <a:off x="3116045" y="2725753"/>
+            <a:ext cx="312388" cy="185119"/>
           </a:xfrm>
           <a:custGeom>
             <a:avLst/>
@@ -11433,15 +11433,15 @@
             <a:cxnLst/>
             <a:rect l="l" t="t" r="r" b="b"/>
             <a:pathLst>
-              <a:path w="273988" h="162363">
+              <a:path w="312388" h="185119">
                 <a:moveTo>
                   <a:pt x="0" y="0"/>
                 </a:moveTo>
                 <a:lnTo>
-                  <a:pt x="273988" y="81182"/>
-                </a:lnTo>
-                <a:lnTo>
-                  <a:pt x="0" y="162363"/>
+                  <a:pt x="312388" y="92559"/>
+                </a:lnTo>
+                <a:lnTo>
+                  <a:pt x="0" y="185119"/>
                 </a:lnTo>
                 <a:close/>
               </a:path>
@@ -11466,8 +11466,8 @@
         </p:nvSpPr>
         <p:spPr>
           <a:xfrm>
-            <a:off x="2887799" y="2497698"/>
-            <a:ext cx="71034" cy="131920"/>
+            <a:off x="3202820" y="2424935"/>
+            <a:ext cx="80990" cy="150409"/>
           </a:xfrm>
           <a:custGeom>
             <a:avLst/>
@@ -11476,15 +11476,15 @@
             <a:cxnLst/>
             <a:rect l="l" t="t" r="r" b="b"/>
             <a:pathLst>
-              <a:path w="71034" h="131920">
+              <a:path w="80990" h="150409">
                 <a:moveTo>
-                  <a:pt x="0" y="131920"/>
+                  <a:pt x="0" y="150409"/>
                 </a:moveTo>
                 <a:lnTo>
-                  <a:pt x="71034" y="131920"/>
-                </a:lnTo>
-                <a:lnTo>
-                  <a:pt x="71034" y="0"/>
+                  <a:pt x="80990" y="150409"/>
+                </a:lnTo>
+                <a:lnTo>
+                  <a:pt x="80990" y="0"/>
                 </a:lnTo>
                 <a:lnTo>
                   <a:pt x="0" y="0"/>
@@ -11512,8 +11512,8 @@
         </p:nvSpPr>
         <p:spPr>
           <a:xfrm>
-            <a:off x="2760952" y="2233858"/>
-            <a:ext cx="324727" cy="263841"/>
+            <a:off x="3058196" y="2124117"/>
+            <a:ext cx="370238" cy="300818"/>
           </a:xfrm>
           <a:custGeom>
             <a:avLst/>
@@ -11522,15 +11522,15 @@
             <a:cxnLst/>
             <a:rect l="l" t="t" r="r" b="b"/>
             <a:pathLst>
-              <a:path w="324727" h="263841">
+              <a:path w="370238" h="300818">
                 <a:moveTo>
-                  <a:pt x="0" y="263841"/>
+                  <a:pt x="0" y="300818"/>
                 </a:moveTo>
                 <a:lnTo>
-                  <a:pt x="324727" y="263841"/>
-                </a:lnTo>
-                <a:lnTo>
-                  <a:pt x="162363" y="0"/>
+                  <a:pt x="370238" y="300818"/>
+                </a:lnTo>
+                <a:lnTo>
+                  <a:pt x="185119" y="0"/>
                 </a:lnTo>
                 <a:close/>
               </a:path>
@@ -11555,8 +11555,8 @@
         </p:nvSpPr>
         <p:spPr>
           <a:xfrm>
-            <a:off x="2329674" y="3786458"/>
-            <a:ext cx="172511" cy="131920"/>
+            <a:off x="2566473" y="3894316"/>
+            <a:ext cx="196689" cy="150409"/>
           </a:xfrm>
           <a:custGeom>
             <a:avLst/>
@@ -11565,27 +11565,27 @@
             <a:cxnLst/>
             <a:rect l="l" t="t" r="r" b="b"/>
             <a:pathLst>
-              <a:path w="172511" h="131920">
+              <a:path w="196689" h="150409">
                 <a:moveTo>
-                  <a:pt x="172511" y="131920"/>
+                  <a:pt x="196689" y="150409"/>
                 </a:moveTo>
                 <a:lnTo>
-                  <a:pt x="160841" y="65960"/>
-                </a:lnTo>
-                <a:lnTo>
-                  <a:pt x="129383" y="17758"/>
-                </a:lnTo>
-                <a:lnTo>
-                  <a:pt x="86256" y="0"/>
-                </a:lnTo>
-                <a:lnTo>
-                  <a:pt x="43128" y="17758"/>
-                </a:lnTo>
-                <a:lnTo>
-                  <a:pt x="11670" y="65960"/>
-                </a:lnTo>
-                <a:lnTo>
-                  <a:pt x="0" y="131920"/>
+                  <a:pt x="183466" y="75205"/>
+                </a:lnTo>
+                <a:lnTo>
+                  <a:pt x="147517" y="20247"/>
+                </a:lnTo>
+                <a:lnTo>
+                  <a:pt x="98344" y="0"/>
+                </a:lnTo>
+                <a:lnTo>
+                  <a:pt x="49172" y="20247"/>
+                </a:lnTo>
+                <a:lnTo>
+                  <a:pt x="13223" y="75205"/>
+                </a:lnTo>
+                <a:lnTo>
+                  <a:pt x="0" y="150409"/>
                 </a:lnTo>
               </a:path>
             </a:pathLst>
@@ -11607,8 +11607,8 @@
         </p:nvSpPr>
         <p:spPr>
           <a:xfrm>
-            <a:off x="2248493" y="3918378"/>
-            <a:ext cx="334875" cy="223250"/>
+            <a:off x="2473914" y="4044725"/>
+            <a:ext cx="381808" cy="254538"/>
           </a:xfrm>
           <a:custGeom>
             <a:avLst/>
@@ -11617,18 +11617,18 @@
             <a:cxnLst/>
             <a:rect l="l" t="t" r="r" b="b"/>
             <a:pathLst>
-              <a:path w="334875" h="223250">
+              <a:path w="381808" h="254538">
                 <a:moveTo>
                   <a:pt x="0" y="0"/>
                 </a:moveTo>
                 <a:lnTo>
-                  <a:pt x="334875" y="0"/>
-                </a:lnTo>
-                <a:lnTo>
-                  <a:pt x="294284" y="223250"/>
-                </a:lnTo>
-                <a:lnTo>
-                  <a:pt x="40591" y="223250"/>
+                  <a:pt x="381808" y="0"/>
+                </a:lnTo>
+                <a:lnTo>
+                  <a:pt x="335528" y="254538"/>
+                </a:lnTo>
+                <a:lnTo>
+                  <a:pt x="46280" y="254538"/>
                 </a:lnTo>
                 <a:close/>
               </a:path>
@@ -11653,8 +11653,8 @@
         </p:nvSpPr>
         <p:spPr>
           <a:xfrm>
-            <a:off x="2771100" y="3766163"/>
-            <a:ext cx="304431" cy="375465"/>
+            <a:off x="3069765" y="3871176"/>
+            <a:ext cx="347098" cy="428087"/>
           </a:xfrm>
           <a:custGeom>
             <a:avLst/>
@@ -11663,21 +11663,21 @@
             <a:cxnLst/>
             <a:rect l="l" t="t" r="r" b="b"/>
             <a:pathLst>
-              <a:path w="304431" h="375465">
+              <a:path w="347098" h="428087">
                 <a:moveTo>
-                  <a:pt x="0" y="375465"/>
+                  <a:pt x="0" y="428087"/>
                 </a:moveTo>
                 <a:lnTo>
-                  <a:pt x="304431" y="375465"/>
-                </a:lnTo>
-                <a:lnTo>
-                  <a:pt x="304431" y="172511"/>
-                </a:lnTo>
-                <a:lnTo>
-                  <a:pt x="152216" y="0"/>
-                </a:lnTo>
-                <a:lnTo>
-                  <a:pt x="0" y="172511"/>
+                  <a:pt x="347098" y="428087"/>
+                </a:lnTo>
+                <a:lnTo>
+                  <a:pt x="347098" y="196689"/>
+                </a:lnTo>
+                <a:lnTo>
+                  <a:pt x="173549" y="0"/>
+                </a:lnTo>
+                <a:lnTo>
+                  <a:pt x="0" y="196689"/>
                 </a:lnTo>
                 <a:close/>
               </a:path>
@@ -11702,8 +11702,8 @@
         </p:nvSpPr>
         <p:spPr>
           <a:xfrm>
-            <a:off x="4785421" y="3791532"/>
-            <a:ext cx="334875" cy="334875"/>
+            <a:off x="5366397" y="3900101"/>
+            <a:ext cx="381808" cy="381808"/>
           </a:xfrm>
           <a:custGeom>
             <a:avLst/>
@@ -11712,42 +11712,42 @@
             <a:cxnLst/>
             <a:rect l="l" t="t" r="r" b="b"/>
             <a:pathLst>
-              <a:path w="334875" h="334875">
+              <a:path w="381808" h="381808">
                 <a:moveTo>
-                  <a:pt x="116699" y="334875"/>
+                  <a:pt x="133054" y="381808"/>
                 </a:moveTo>
                 <a:lnTo>
-                  <a:pt x="218176" y="334875"/>
-                </a:lnTo>
-                <a:lnTo>
-                  <a:pt x="218176" y="218176"/>
-                </a:lnTo>
-                <a:lnTo>
-                  <a:pt x="334875" y="218176"/>
-                </a:lnTo>
-                <a:lnTo>
-                  <a:pt x="334875" y="116699"/>
-                </a:lnTo>
-                <a:lnTo>
-                  <a:pt x="218176" y="116699"/>
-                </a:lnTo>
-                <a:lnTo>
-                  <a:pt x="218176" y="0"/>
-                </a:lnTo>
-                <a:lnTo>
-                  <a:pt x="116699" y="0"/>
-                </a:lnTo>
-                <a:lnTo>
-                  <a:pt x="116699" y="116699"/>
-                </a:lnTo>
-                <a:lnTo>
-                  <a:pt x="0" y="116699"/>
-                </a:lnTo>
-                <a:lnTo>
-                  <a:pt x="0" y="218176"/>
-                </a:lnTo>
-                <a:lnTo>
-                  <a:pt x="116699" y="218176"/>
+                  <a:pt x="248754" y="381808"/>
+                </a:lnTo>
+                <a:lnTo>
+                  <a:pt x="248754" y="248754"/>
+                </a:lnTo>
+                <a:lnTo>
+                  <a:pt x="381808" y="248754"/>
+                </a:lnTo>
+                <a:lnTo>
+                  <a:pt x="381808" y="133054"/>
+                </a:lnTo>
+                <a:lnTo>
+                  <a:pt x="248754" y="133054"/>
+                </a:lnTo>
+                <a:lnTo>
+                  <a:pt x="248754" y="0"/>
+                </a:lnTo>
+                <a:lnTo>
+                  <a:pt x="133054" y="0"/>
+                </a:lnTo>
+                <a:lnTo>
+                  <a:pt x="133054" y="133054"/>
+                </a:lnTo>
+                <a:lnTo>
+                  <a:pt x="0" y="133054"/>
+                </a:lnTo>
+                <a:lnTo>
+                  <a:pt x="0" y="248754"/>
+                </a:lnTo>
+                <a:lnTo>
+                  <a:pt x="133054" y="248754"/>
                 </a:lnTo>
                 <a:close/>
               </a:path>
@@ -11772,8 +11772,8 @@
         </p:nvSpPr>
         <p:spPr>
           <a:xfrm>
-            <a:off x="640080" y="2183119"/>
-            <a:ext cx="5073857" cy="2029543"/>
+            <a:off x="640080" y="2066267"/>
+            <a:ext cx="5784965" cy="2313986"/>
           </a:xfrm>
           <a:custGeom>
             <a:avLst/>
@@ -11782,15 +11782,15 @@
             <a:cxnLst/>
             <a:rect l="l" t="t" r="r" b="b"/>
             <a:pathLst>
-              <a:path w="5073857" h="2029543">
+              <a:path w="5784965" h="2313986">
                 <a:moveTo>
-                  <a:pt x="0" y="2029543"/>
+                  <a:pt x="0" y="2313986"/>
                 </a:moveTo>
                 <a:lnTo>
-                  <a:pt x="5073857" y="2029543"/>
-                </a:lnTo>
-                <a:lnTo>
-                  <a:pt x="5073857" y="0"/>
+                  <a:pt x="5784965" y="2313986"/>
+                </a:lnTo>
+                <a:lnTo>
+                  <a:pt x="5784965" y="0"/>
                 </a:lnTo>
                 <a:lnTo>
                   <a:pt x="0" y="0"/>
@@ -11816,8 +11816,8 @@
         </p:nvSpPr>
         <p:spPr>
           <a:xfrm>
-            <a:off x="7692741" y="2081642"/>
-            <a:ext cx="3856131" cy="2283236"/>
+            <a:off x="8036572" y="2293533"/>
+            <a:ext cx="3512300" cy="1859453"/>
           </a:xfrm>
           <a:custGeom>
             <a:avLst/>
@@ -11826,15 +11826,15 @@
             <a:cxnLst/>
             <a:rect l="l" t="t" r="r" b="b"/>
             <a:pathLst>
-              <a:path w="3856131" h="2283236">
+              <a:path w="3512300" h="1859453">
                 <a:moveTo>
-                  <a:pt x="0" y="2283236"/>
+                  <a:pt x="0" y="1859453"/>
                 </a:moveTo>
                 <a:lnTo>
-                  <a:pt x="3856131" y="2283236"/>
-                </a:lnTo>
-                <a:lnTo>
-                  <a:pt x="3856131" y="0"/>
+                  <a:pt x="3512300" y="1859453"/>
+                </a:lnTo>
+                <a:lnTo>
+                  <a:pt x="3512300" y="0"/>
                 </a:lnTo>
                 <a:lnTo>
                   <a:pt x="0" y="0"/>
@@ -11862,8 +11862,8 @@
         </p:nvSpPr>
         <p:spPr>
           <a:xfrm>
-            <a:off x="7692741" y="2081642"/>
-            <a:ext cx="3856131" cy="380539"/>
+            <a:off x="8036572" y="2293533"/>
+            <a:ext cx="3512300" cy="309909"/>
           </a:xfrm>
           <a:custGeom>
             <a:avLst/>
@@ -11872,15 +11872,15 @@
             <a:cxnLst/>
             <a:rect l="l" t="t" r="r" b="b"/>
             <a:pathLst>
-              <a:path w="3856131" h="380539">
+              <a:path w="3512300" h="309909">
                 <a:moveTo>
-                  <a:pt x="0" y="380539"/>
+                  <a:pt x="0" y="309909"/>
                 </a:moveTo>
                 <a:lnTo>
-                  <a:pt x="3856131" y="380539"/>
-                </a:lnTo>
-                <a:lnTo>
-                  <a:pt x="3856131" y="0"/>
+                  <a:pt x="3512300" y="309909"/>
+                </a:lnTo>
+                <a:lnTo>
+                  <a:pt x="3512300" y="0"/>
                 </a:lnTo>
                 <a:lnTo>
                   <a:pt x="0" y="0"/>
@@ -11908,8 +11908,8 @@
         </p:nvSpPr>
         <p:spPr>
           <a:xfrm>
-            <a:off x="7972818" y="2490595"/>
-            <a:ext cx="246589" cy="146127"/>
+            <a:off x="8244004" y="2626582"/>
+            <a:ext cx="200821" cy="119005"/>
           </a:xfrm>
           <a:custGeom>
             <a:avLst/>
@@ -11918,15 +11918,15 @@
             <a:cxnLst/>
             <a:rect l="l" t="t" r="r" b="b"/>
             <a:pathLst>
-              <a:path w="246589" h="146127">
+              <a:path w="200821" h="119005">
                 <a:moveTo>
                   <a:pt x="0" y="0"/>
                 </a:moveTo>
                 <a:lnTo>
-                  <a:pt x="246589" y="73064"/>
-                </a:lnTo>
-                <a:lnTo>
-                  <a:pt x="0" y="146127"/>
+                  <a:pt x="200821" y="59503"/>
+                </a:lnTo>
+                <a:lnTo>
+                  <a:pt x="0" y="119005"/>
                 </a:lnTo>
                 <a:close/>
               </a:path>
@@ -11951,8 +11951,8 @@
         </p:nvSpPr>
         <p:spPr>
           <a:xfrm>
-            <a:off x="9850652" y="2504294"/>
-            <a:ext cx="301387" cy="301387"/>
+            <a:off x="9938586" y="2637739"/>
+            <a:ext cx="245448" cy="245448"/>
           </a:xfrm>
           <a:custGeom>
             <a:avLst/>
@@ -11961,42 +11961,42 @@
             <a:cxnLst/>
             <a:rect l="l" t="t" r="r" b="b"/>
             <a:pathLst>
-              <a:path w="301387" h="301387">
+              <a:path w="245448" h="245448">
                 <a:moveTo>
-                  <a:pt x="105029" y="301387"/>
+                  <a:pt x="85535" y="245448"/>
                 </a:moveTo>
                 <a:lnTo>
-                  <a:pt x="196358" y="301387"/>
-                </a:lnTo>
-                <a:lnTo>
-                  <a:pt x="196358" y="196358"/>
-                </a:lnTo>
-                <a:lnTo>
-                  <a:pt x="301387" y="196358"/>
-                </a:lnTo>
-                <a:lnTo>
-                  <a:pt x="301387" y="105029"/>
-                </a:lnTo>
-                <a:lnTo>
-                  <a:pt x="196358" y="105029"/>
-                </a:lnTo>
-                <a:lnTo>
-                  <a:pt x="196358" y="0"/>
-                </a:lnTo>
-                <a:lnTo>
-                  <a:pt x="105029" y="0"/>
-                </a:lnTo>
-                <a:lnTo>
-                  <a:pt x="105029" y="105029"/>
-                </a:lnTo>
-                <a:lnTo>
-                  <a:pt x="0" y="105029"/>
-                </a:lnTo>
-                <a:lnTo>
-                  <a:pt x="0" y="196358"/>
-                </a:lnTo>
-                <a:lnTo>
-                  <a:pt x="105029" y="196358"/>
+                  <a:pt x="159913" y="245448"/>
+                </a:lnTo>
+                <a:lnTo>
+                  <a:pt x="159913" y="159913"/>
+                </a:lnTo>
+                <a:lnTo>
+                  <a:pt x="245448" y="159913"/>
+                </a:lnTo>
+                <a:lnTo>
+                  <a:pt x="245448" y="85535"/>
+                </a:lnTo>
+                <a:lnTo>
+                  <a:pt x="159913" y="85535"/>
+                </a:lnTo>
+                <a:lnTo>
+                  <a:pt x="159913" y="0"/>
+                </a:lnTo>
+                <a:lnTo>
+                  <a:pt x="85535" y="0"/>
+                </a:lnTo>
+                <a:lnTo>
+                  <a:pt x="85535" y="85535"/>
+                </a:lnTo>
+                <a:lnTo>
+                  <a:pt x="0" y="85535"/>
+                </a:lnTo>
+                <a:lnTo>
+                  <a:pt x="0" y="159913"/>
+                </a:lnTo>
+                <a:lnTo>
+                  <a:pt x="85535" y="159913"/>
                 </a:lnTo>
                 <a:close/>
               </a:path>
@@ -12021,8 +12021,8 @@
         </p:nvSpPr>
         <p:spPr>
           <a:xfrm>
-            <a:off x="8041315" y="3166433"/>
-            <a:ext cx="63931" cy="118728"/>
+            <a:off x="8299787" y="3176980"/>
+            <a:ext cx="52065" cy="96692"/>
           </a:xfrm>
           <a:custGeom>
             <a:avLst/>
@@ -12031,15 +12031,15 @@
             <a:cxnLst/>
             <a:rect l="l" t="t" r="r" b="b"/>
             <a:pathLst>
-              <a:path w="63931" h="118728">
+              <a:path w="52065" h="96692">
                 <a:moveTo>
-                  <a:pt x="0" y="118728"/>
+                  <a:pt x="0" y="96692"/>
                 </a:moveTo>
                 <a:lnTo>
-                  <a:pt x="63931" y="118728"/>
-                </a:lnTo>
-                <a:lnTo>
-                  <a:pt x="63931" y="0"/>
+                  <a:pt x="52065" y="96692"/>
+                </a:lnTo>
+                <a:lnTo>
+                  <a:pt x="52065" y="0"/>
                 </a:lnTo>
                 <a:lnTo>
                   <a:pt x="0" y="0"/>
@@ -12067,8 +12067,8 @@
         </p:nvSpPr>
         <p:spPr>
           <a:xfrm>
-            <a:off x="7927153" y="2928976"/>
-            <a:ext cx="292254" cy="237456"/>
+            <a:off x="8206815" y="2983597"/>
+            <a:ext cx="238010" cy="193383"/>
           </a:xfrm>
           <a:custGeom>
             <a:avLst/>
@@ -12077,15 +12077,15 @@
             <a:cxnLst/>
             <a:rect l="l" t="t" r="r" b="b"/>
             <a:pathLst>
-              <a:path w="292254" h="237456">
+              <a:path w="238010" h="193383">
                 <a:moveTo>
-                  <a:pt x="0" y="237456"/>
+                  <a:pt x="0" y="193383"/>
                 </a:moveTo>
                 <a:lnTo>
-                  <a:pt x="292254" y="237456"/>
-                </a:lnTo>
-                <a:lnTo>
-                  <a:pt x="146127" y="0"/>
+                  <a:pt x="238010" y="193383"/>
+                </a:lnTo>
+                <a:lnTo>
+                  <a:pt x="119005" y="0"/>
                 </a:lnTo>
                 <a:close/>
               </a:path>
@@ -12110,8 +12110,8 @@
         </p:nvSpPr>
         <p:spPr>
           <a:xfrm>
-            <a:off x="9836953" y="2965508"/>
-            <a:ext cx="164393" cy="283121"/>
+            <a:off x="9927429" y="3013348"/>
+            <a:ext cx="133881" cy="230572"/>
           </a:xfrm>
           <a:custGeom>
             <a:avLst/>
@@ -12120,15 +12120,15 @@
             <a:cxnLst/>
             <a:rect l="l" t="t" r="r" b="b"/>
             <a:pathLst>
-              <a:path w="164393" h="283121">
+              <a:path w="133881" h="230572">
                 <a:moveTo>
-                  <a:pt x="0" y="246589"/>
+                  <a:pt x="0" y="200821"/>
                 </a:moveTo>
                 <a:lnTo>
-                  <a:pt x="164393" y="283121"/>
-                </a:lnTo>
-                <a:lnTo>
-                  <a:pt x="164393" y="36532"/>
+                  <a:pt x="133881" y="230572"/>
+                </a:lnTo>
+                <a:lnTo>
+                  <a:pt x="133881" y="29751"/>
                 </a:lnTo>
                 <a:lnTo>
                   <a:pt x="0" y="0"/>
@@ -12156,8 +12156,8 @@
         </p:nvSpPr>
         <p:spPr>
           <a:xfrm>
-            <a:off x="10001346" y="2965508"/>
-            <a:ext cx="164393" cy="283121"/>
+            <a:off x="10061309" y="3013348"/>
+            <a:ext cx="133881" cy="230572"/>
           </a:xfrm>
           <a:custGeom>
             <a:avLst/>
@@ -12166,18 +12166,18 @@
             <a:cxnLst/>
             <a:rect l="l" t="t" r="r" b="b"/>
             <a:pathLst>
-              <a:path w="164393" h="283121">
+              <a:path w="133881" h="230572">
                 <a:moveTo>
-                  <a:pt x="164393" y="246589"/>
+                  <a:pt x="133881" y="200821"/>
                 </a:moveTo>
                 <a:lnTo>
-                  <a:pt x="0" y="283121"/>
-                </a:lnTo>
-                <a:lnTo>
-                  <a:pt x="0" y="36532"/>
-                </a:lnTo>
-                <a:lnTo>
-                  <a:pt x="164393" y="0"/>
+                  <a:pt x="0" y="230572"/>
+                </a:lnTo>
+                <a:lnTo>
+                  <a:pt x="0" y="29751"/>
+                </a:lnTo>
+                <a:lnTo>
+                  <a:pt x="133881" y="0"/>
                 </a:lnTo>
                 <a:close/>
               </a:path>
@@ -12202,8 +12202,8 @@
         </p:nvSpPr>
         <p:spPr>
           <a:xfrm>
-            <a:off x="9923716" y="3413022"/>
-            <a:ext cx="155260" cy="118728"/>
+            <a:off x="9998088" y="3377801"/>
+            <a:ext cx="126443" cy="96692"/>
           </a:xfrm>
           <a:custGeom>
             <a:avLst/>
@@ -12212,27 +12212,27 @@
             <a:cxnLst/>
             <a:rect l="l" t="t" r="r" b="b"/>
             <a:pathLst>
-              <a:path w="155260" h="118728">
+              <a:path w="126443" h="96692">
                 <a:moveTo>
-                  <a:pt x="155260" y="118728"/>
+                  <a:pt x="126443" y="96692"/>
                 </a:moveTo>
                 <a:lnTo>
-                  <a:pt x="145112" y="59364"/>
-                </a:lnTo>
-                <a:lnTo>
-                  <a:pt x="116191" y="15729"/>
-                </a:lnTo>
-                <a:lnTo>
-                  <a:pt x="77630" y="0"/>
-                </a:lnTo>
-                <a:lnTo>
-                  <a:pt x="38561" y="15729"/>
-                </a:lnTo>
-                <a:lnTo>
-                  <a:pt x="10148" y="59364"/>
-                </a:lnTo>
-                <a:lnTo>
-                  <a:pt x="0" y="118728"/>
+                  <a:pt x="118179" y="48346"/>
+                </a:lnTo>
+                <a:lnTo>
+                  <a:pt x="94626" y="12810"/>
+                </a:lnTo>
+                <a:lnTo>
+                  <a:pt x="63221" y="0"/>
+                </a:lnTo>
+                <a:lnTo>
+                  <a:pt x="31404" y="12810"/>
+                </a:lnTo>
+                <a:lnTo>
+                  <a:pt x="8264" y="48346"/>
+                </a:lnTo>
+                <a:lnTo>
+                  <a:pt x="0" y="96692"/>
                 </a:lnTo>
               </a:path>
             </a:pathLst>
@@ -12254,8 +12254,8 @@
         </p:nvSpPr>
         <p:spPr>
           <a:xfrm>
-            <a:off x="9850652" y="3531750"/>
-            <a:ext cx="301387" cy="200925"/>
+            <a:off x="9938586" y="3474493"/>
+            <a:ext cx="245448" cy="163632"/>
           </a:xfrm>
           <a:custGeom>
             <a:avLst/>
@@ -12264,18 +12264,18 @@
             <a:cxnLst/>
             <a:rect l="l" t="t" r="r" b="b"/>
             <a:pathLst>
-              <a:path w="301387" h="200925">
+              <a:path w="245448" h="163632">
                 <a:moveTo>
                   <a:pt x="0" y="0"/>
                 </a:moveTo>
                 <a:lnTo>
-                  <a:pt x="301387" y="0"/>
-                </a:lnTo>
-                <a:lnTo>
-                  <a:pt x="264855" y="200925"/>
-                </a:lnTo>
-                <a:lnTo>
-                  <a:pt x="36532" y="200925"/>
+                  <a:pt x="245448" y="0"/>
+                </a:lnTo>
+                <a:lnTo>
+                  <a:pt x="215697" y="163632"/>
+                </a:lnTo>
+                <a:lnTo>
+                  <a:pt x="29751" y="163632"/>
                 </a:lnTo>
                 <a:close/>
               </a:path>
@@ -12300,8 +12300,8 @@
         </p:nvSpPr>
         <p:spPr>
           <a:xfrm>
-            <a:off x="7936286" y="3851403"/>
-            <a:ext cx="273988" cy="337919"/>
+            <a:off x="8214253" y="3734816"/>
+            <a:ext cx="223134" cy="275199"/>
           </a:xfrm>
           <a:custGeom>
             <a:avLst/>
@@ -12310,21 +12310,21 @@
             <a:cxnLst/>
             <a:rect l="l" t="t" r="r" b="b"/>
             <a:pathLst>
-              <a:path w="273988" h="337919">
+              <a:path w="223134" h="275199">
                 <a:moveTo>
-                  <a:pt x="0" y="337919"/>
+                  <a:pt x="0" y="275199"/>
                 </a:moveTo>
                 <a:lnTo>
-                  <a:pt x="273988" y="337919"/>
-                </a:lnTo>
-                <a:lnTo>
-                  <a:pt x="273988" y="155260"/>
-                </a:lnTo>
-                <a:lnTo>
-                  <a:pt x="136994" y="0"/>
-                </a:lnTo>
-                <a:lnTo>
-                  <a:pt x="0" y="155260"/>
+                  <a:pt x="223134" y="275199"/>
+                </a:lnTo>
+                <a:lnTo>
+                  <a:pt x="223134" y="126443"/>
+                </a:lnTo>
+                <a:lnTo>
+                  <a:pt x="111567" y="0"/>
+                </a:lnTo>
+                <a:lnTo>
+                  <a:pt x="0" y="126443"/>
                 </a:lnTo>
                 <a:close/>
               </a:path>
@@ -12349,8 +12349,8 @@
         </p:nvSpPr>
         <p:spPr>
           <a:xfrm>
-            <a:off x="4785421" y="2776761"/>
-            <a:ext cx="334875" cy="334875"/>
+            <a:off x="5366397" y="2743108"/>
+            <a:ext cx="381808" cy="381808"/>
           </a:xfrm>
           <a:prstGeom prst="ellipse">
             <a:avLst/>
@@ -12374,8 +12374,8 @@
         </p:nvSpPr>
         <p:spPr>
           <a:xfrm>
-            <a:off x="4881824" y="2873164"/>
-            <a:ext cx="142068" cy="142068"/>
+            <a:off x="5476311" y="2853022"/>
+            <a:ext cx="161979" cy="161979"/>
           </a:xfrm>
           <a:prstGeom prst="ellipse">
             <a:avLst/>
@@ -12399,8 +12399,8 @@
         </p:nvSpPr>
         <p:spPr>
           <a:xfrm>
-            <a:off x="7922587" y="3417589"/>
-            <a:ext cx="301387" cy="301387"/>
+            <a:off x="8203096" y="3381520"/>
+            <a:ext cx="245448" cy="245448"/>
           </a:xfrm>
           <a:prstGeom prst="ellipse">
             <a:avLst/>
@@ -12424,8 +12424,8 @@
         </p:nvSpPr>
         <p:spPr>
           <a:xfrm>
-            <a:off x="8009350" y="3504352"/>
-            <a:ext cx="127861" cy="127861"/>
+            <a:off x="8273755" y="3452179"/>
+            <a:ext cx="104129" cy="104129"/>
           </a:xfrm>
           <a:prstGeom prst="ellipse">
             <a:avLst/>
@@ -12449,8 +12449,8 @@
         </p:nvSpPr>
         <p:spPr>
           <a:xfrm flipV="1">
-            <a:off x="2811691" y="2761539"/>
-            <a:ext cx="0" cy="365318"/>
+            <a:off x="3116045" y="2725753"/>
+            <a:ext cx="0" cy="416518"/>
           </a:xfrm>
           <a:prstGeom prst="line">
             <a:avLst/>
@@ -12472,8 +12472,8 @@
         </p:nvSpPr>
         <p:spPr>
           <a:xfrm flipV="1">
-            <a:off x="640080" y="2183119"/>
-            <a:ext cx="0" cy="2029543"/>
+            <a:off x="640080" y="2066267"/>
+            <a:ext cx="0" cy="2313986"/>
           </a:xfrm>
           <a:prstGeom prst="line">
             <a:avLst/>
@@ -12495,8 +12495,8 @@
         </p:nvSpPr>
         <p:spPr>
           <a:xfrm flipV="1">
-            <a:off x="1147466" y="2183119"/>
-            <a:ext cx="0" cy="2029543"/>
+            <a:off x="1218577" y="2066267"/>
+            <a:ext cx="0" cy="2313986"/>
           </a:xfrm>
           <a:prstGeom prst="line">
             <a:avLst/>
@@ -12518,8 +12518,8 @@
         </p:nvSpPr>
         <p:spPr>
           <a:xfrm flipV="1">
-            <a:off x="1654851" y="2183119"/>
-            <a:ext cx="0" cy="2029543"/>
+            <a:off x="1797073" y="2066267"/>
+            <a:ext cx="0" cy="2313986"/>
           </a:xfrm>
           <a:prstGeom prst="line">
             <a:avLst/>
@@ -12541,8 +12541,8 @@
         </p:nvSpPr>
         <p:spPr>
           <a:xfrm flipV="1">
-            <a:off x="2162237" y="2183119"/>
-            <a:ext cx="0" cy="2029543"/>
+            <a:off x="2375570" y="2066267"/>
+            <a:ext cx="0" cy="2313986"/>
           </a:xfrm>
           <a:prstGeom prst="line">
             <a:avLst/>
@@ -12564,8 +12564,8 @@
         </p:nvSpPr>
         <p:spPr>
           <a:xfrm flipV="1">
-            <a:off x="2669623" y="2183119"/>
-            <a:ext cx="0" cy="2029543"/>
+            <a:off x="2954066" y="2066267"/>
+            <a:ext cx="0" cy="2313986"/>
           </a:xfrm>
           <a:prstGeom prst="line">
             <a:avLst/>
@@ -12587,8 +12587,8 @@
         </p:nvSpPr>
         <p:spPr>
           <a:xfrm flipV="1">
-            <a:off x="3177008" y="2183119"/>
-            <a:ext cx="0" cy="2029543"/>
+            <a:off x="3532563" y="2066267"/>
+            <a:ext cx="0" cy="2313986"/>
           </a:xfrm>
           <a:prstGeom prst="line">
             <a:avLst/>
@@ -12610,8 +12610,8 @@
         </p:nvSpPr>
         <p:spPr>
           <a:xfrm flipV="1">
-            <a:off x="3684394" y="2183119"/>
-            <a:ext cx="0" cy="2029543"/>
+            <a:off x="4111059" y="2066267"/>
+            <a:ext cx="0" cy="2313986"/>
           </a:xfrm>
           <a:prstGeom prst="line">
             <a:avLst/>
@@ -12633,8 +12633,8 @@
         </p:nvSpPr>
         <p:spPr>
           <a:xfrm flipV="1">
-            <a:off x="4191780" y="2183119"/>
-            <a:ext cx="0" cy="2029543"/>
+            <a:off x="4689556" y="2066267"/>
+            <a:ext cx="0" cy="2313986"/>
           </a:xfrm>
           <a:prstGeom prst="line">
             <a:avLst/>
@@ -12656,8 +12656,8 @@
         </p:nvSpPr>
         <p:spPr>
           <a:xfrm flipV="1">
-            <a:off x="4699165" y="2183119"/>
-            <a:ext cx="0" cy="2029543"/>
+            <a:off x="5268052" y="2066267"/>
+            <a:ext cx="0" cy="2313986"/>
           </a:xfrm>
           <a:prstGeom prst="line">
             <a:avLst/>
@@ -12679,8 +12679,8 @@
         </p:nvSpPr>
         <p:spPr>
           <a:xfrm flipV="1">
-            <a:off x="5206551" y="2183119"/>
-            <a:ext cx="0" cy="2029543"/>
+            <a:off x="5846549" y="2066267"/>
+            <a:ext cx="0" cy="2313986"/>
           </a:xfrm>
           <a:prstGeom prst="line">
             <a:avLst/>
@@ -12702,8 +12702,8 @@
         </p:nvSpPr>
         <p:spPr>
           <a:xfrm flipV="1">
-            <a:off x="5713937" y="2183119"/>
-            <a:ext cx="0" cy="2029543"/>
+            <a:off x="6425045" y="2066267"/>
+            <a:ext cx="0" cy="2313986"/>
           </a:xfrm>
           <a:prstGeom prst="line">
             <a:avLst/>
@@ -12725,8 +12725,8 @@
         </p:nvSpPr>
         <p:spPr>
           <a:xfrm>
-            <a:off x="640080" y="4212662"/>
-            <a:ext cx="5073857" cy="0"/>
+            <a:off x="640080" y="4380253"/>
+            <a:ext cx="5784965" cy="0"/>
           </a:xfrm>
           <a:prstGeom prst="line">
             <a:avLst/>
@@ -12748,8 +12748,8 @@
         </p:nvSpPr>
         <p:spPr>
           <a:xfrm>
-            <a:off x="640080" y="3705276"/>
-            <a:ext cx="5073857" cy="0"/>
+            <a:off x="640080" y="3801757"/>
+            <a:ext cx="5784965" cy="0"/>
           </a:xfrm>
           <a:prstGeom prst="line">
             <a:avLst/>
@@ -12771,8 +12771,8 @@
         </p:nvSpPr>
         <p:spPr>
           <a:xfrm>
-            <a:off x="640080" y="3197891"/>
-            <a:ext cx="5073857" cy="0"/>
+            <a:off x="640080" y="3223260"/>
+            <a:ext cx="5784965" cy="0"/>
           </a:xfrm>
           <a:prstGeom prst="line">
             <a:avLst/>
@@ -12794,8 +12794,8 @@
         </p:nvSpPr>
         <p:spPr>
           <a:xfrm>
-            <a:off x="640080" y="2690505"/>
-            <a:ext cx="5073857" cy="0"/>
+            <a:off x="640080" y="2644763"/>
+            <a:ext cx="5784965" cy="0"/>
           </a:xfrm>
           <a:prstGeom prst="line">
             <a:avLst/>
@@ -12817,8 +12817,8 @@
         </p:nvSpPr>
         <p:spPr>
           <a:xfrm>
-            <a:off x="640080" y="2183119"/>
-            <a:ext cx="5073857" cy="0"/>
+            <a:off x="640080" y="2066267"/>
+            <a:ext cx="5784965" cy="0"/>
           </a:xfrm>
           <a:prstGeom prst="line">
             <a:avLst/>
@@ -12840,8 +12840,8 @@
         </p:nvSpPr>
         <p:spPr>
           <a:xfrm flipV="1">
-            <a:off x="6677970" y="2766613"/>
-            <a:ext cx="0" cy="862556"/>
+            <a:off x="7210148" y="2872030"/>
+            <a:ext cx="0" cy="702460"/>
           </a:xfrm>
           <a:prstGeom prst="line">
             <a:avLst/>
@@ -12864,8 +12864,8 @@
         </p:nvSpPr>
         <p:spPr>
           <a:xfrm>
-            <a:off x="6246692" y="3197891"/>
-            <a:ext cx="862556" cy="0"/>
+            <a:off x="6858918" y="3223260"/>
+            <a:ext cx="702460" cy="0"/>
           </a:xfrm>
           <a:prstGeom prst="line">
             <a:avLst/>
@@ -12887,8 +12887,8 @@
         </p:nvSpPr>
         <p:spPr>
           <a:xfrm flipV="1">
-            <a:off x="7972818" y="2490595"/>
-            <a:ext cx="0" cy="328786"/>
+            <a:off x="8244004" y="2626582"/>
+            <a:ext cx="0" cy="267761"/>
           </a:xfrm>
           <a:prstGeom prst="line">
             <a:avLst/>
@@ -12910,7 +12910,7 @@
         </p:nvSpPr>
         <p:spPr>
           <a:xfrm>
-            <a:off x="6473754" y="2347789"/>
+            <a:off x="7005932" y="2495585"/>
             <a:ext cx="408432" cy="381000"/>
           </a:xfrm>
           <a:prstGeom prst="rect">
@@ -12949,7 +12949,7 @@
         </p:nvSpPr>
         <p:spPr>
           <a:xfrm>
-            <a:off x="6473754" y="3666992"/>
+            <a:off x="7005932" y="3569935"/>
             <a:ext cx="408432" cy="381000"/>
           </a:xfrm>
           <a:prstGeom prst="rect">
@@ -12988,7 +12988,7 @@
         </p:nvSpPr>
         <p:spPr>
           <a:xfrm>
-            <a:off x="7133355" y="3007391"/>
+            <a:off x="7543107" y="3032760"/>
             <a:ext cx="408432" cy="381000"/>
           </a:xfrm>
           <a:prstGeom prst="rect">
@@ -13027,7 +13027,7 @@
         </p:nvSpPr>
         <p:spPr>
           <a:xfrm>
-            <a:off x="5814152" y="3007391"/>
+            <a:off x="6468757" y="3032760"/>
             <a:ext cx="408432" cy="381000"/>
           </a:xfrm>
           <a:prstGeom prst="rect">
@@ -13066,7 +13066,7 @@
         </p:nvSpPr>
         <p:spPr>
           <a:xfrm>
-            <a:off x="9267238" y="2081412"/>
+            <a:off x="9439154" y="2257988"/>
             <a:ext cx="707136" cy="381000"/>
           </a:xfrm>
           <a:prstGeom prst="rect">
@@ -13105,7 +13105,7 @@
         </p:nvSpPr>
         <p:spPr>
           <a:xfrm>
-            <a:off x="8556898" y="2464488"/>
+            <a:off x="8798675" y="2569963"/>
             <a:ext cx="707136" cy="381000"/>
           </a:xfrm>
           <a:prstGeom prst="rect">
@@ -13144,7 +13144,7 @@
         </p:nvSpPr>
         <p:spPr>
           <a:xfrm>
-            <a:off x="10484964" y="2464488"/>
+            <a:off x="10534165" y="2569963"/>
             <a:ext cx="707136" cy="381000"/>
           </a:xfrm>
           <a:prstGeom prst="rect">
@@ -13183,7 +13183,7 @@
         </p:nvSpPr>
         <p:spPr>
           <a:xfrm>
-            <a:off x="8556898" y="2921135"/>
+            <a:off x="8798675" y="2941853"/>
             <a:ext cx="707136" cy="381000"/>
           </a:xfrm>
           <a:prstGeom prst="rect">
@@ -13222,7 +13222,7 @@
         </p:nvSpPr>
         <p:spPr>
           <a:xfrm>
-            <a:off x="10335612" y="2921135"/>
+            <a:off x="10384813" y="2941853"/>
             <a:ext cx="1005840" cy="381000"/>
           </a:xfrm>
           <a:prstGeom prst="rect">
@@ -13261,7 +13261,7 @@
         </p:nvSpPr>
         <p:spPr>
           <a:xfrm>
-            <a:off x="8258194" y="3377782"/>
+            <a:off x="8499971" y="3313744"/>
             <a:ext cx="1304544" cy="381000"/>
           </a:xfrm>
           <a:prstGeom prst="rect">
@@ -13300,7 +13300,7 @@
         </p:nvSpPr>
         <p:spPr>
           <a:xfrm>
-            <a:off x="10484964" y="3377782"/>
+            <a:off x="10534165" y="3313744"/>
             <a:ext cx="707136" cy="381000"/>
           </a:xfrm>
           <a:prstGeom prst="rect">
@@ -13339,7 +13339,7 @@
         </p:nvSpPr>
         <p:spPr>
           <a:xfrm>
-            <a:off x="8706250" y="3834429"/>
+            <a:off x="8948027" y="3685635"/>
             <a:ext cx="408432" cy="381000"/>
           </a:xfrm>
           <a:prstGeom prst="rect">
@@ -13601,8 +13601,8 @@
         </p:nvSpPr>
         <p:spPr>
           <a:xfrm>
-            <a:off x="640080" y="2770409"/>
-            <a:ext cx="507386" cy="507386"/>
+            <a:off x="640080" y="2795778"/>
+            <a:ext cx="578497" cy="578497"/>
           </a:xfrm>
           <a:custGeom>
             <a:avLst/>
@@ -13611,15 +13611,15 @@
             <a:cxnLst/>
             <a:rect l="l" t="t" r="r" b="b"/>
             <a:pathLst>
-              <a:path w="507386" h="507386">
+              <a:path w="578497" h="578497">
                 <a:moveTo>
-                  <a:pt x="0" y="507386"/>
+                  <a:pt x="0" y="578497"/>
                 </a:moveTo>
                 <a:lnTo>
-                  <a:pt x="507386" y="507386"/>
-                </a:lnTo>
-                <a:lnTo>
-                  <a:pt x="507386" y="0"/>
+                  <a:pt x="578497" y="578497"/>
+                </a:lnTo>
+                <a:lnTo>
+                  <a:pt x="578497" y="0"/>
                 </a:lnTo>
                 <a:lnTo>
                   <a:pt x="0" y="0"/>
@@ -13642,8 +13642,8 @@
         </p:nvSpPr>
         <p:spPr>
           <a:xfrm>
-            <a:off x="1147466" y="2770409"/>
-            <a:ext cx="507386" cy="507386"/>
+            <a:off x="1218577" y="2795778"/>
+            <a:ext cx="578497" cy="578497"/>
           </a:xfrm>
           <a:custGeom>
             <a:avLst/>
@@ -13652,15 +13652,15 @@
             <a:cxnLst/>
             <a:rect l="l" t="t" r="r" b="b"/>
             <a:pathLst>
-              <a:path w="507386" h="507386">
+              <a:path w="578497" h="578497">
                 <a:moveTo>
-                  <a:pt x="0" y="507386"/>
+                  <a:pt x="0" y="578497"/>
                 </a:moveTo>
                 <a:lnTo>
-                  <a:pt x="507386" y="507386"/>
-                </a:lnTo>
-                <a:lnTo>
-                  <a:pt x="507386" y="0"/>
+                  <a:pt x="578497" y="578497"/>
+                </a:lnTo>
+                <a:lnTo>
+                  <a:pt x="578497" y="0"/>
                 </a:lnTo>
                 <a:lnTo>
                   <a:pt x="0" y="0"/>
@@ -13683,8 +13683,8 @@
         </p:nvSpPr>
         <p:spPr>
           <a:xfrm>
-            <a:off x="1654851" y="2770409"/>
-            <a:ext cx="507386" cy="507386"/>
+            <a:off x="1797073" y="2795778"/>
+            <a:ext cx="578497" cy="578497"/>
           </a:xfrm>
           <a:custGeom>
             <a:avLst/>
@@ -13693,15 +13693,15 @@
             <a:cxnLst/>
             <a:rect l="l" t="t" r="r" b="b"/>
             <a:pathLst>
-              <a:path w="507386" h="507386">
+              <a:path w="578497" h="578497">
                 <a:moveTo>
-                  <a:pt x="0" y="507386"/>
+                  <a:pt x="0" y="578497"/>
                 </a:moveTo>
                 <a:lnTo>
-                  <a:pt x="507386" y="507386"/>
-                </a:lnTo>
-                <a:lnTo>
-                  <a:pt x="507386" y="0"/>
+                  <a:pt x="578497" y="578497"/>
+                </a:lnTo>
+                <a:lnTo>
+                  <a:pt x="578497" y="0"/>
                 </a:lnTo>
                 <a:lnTo>
                   <a:pt x="0" y="0"/>
@@ -13724,8 +13724,8 @@
         </p:nvSpPr>
         <p:spPr>
           <a:xfrm>
-            <a:off x="2162237" y="2770409"/>
-            <a:ext cx="507386" cy="507386"/>
+            <a:off x="2375570" y="2795778"/>
+            <a:ext cx="578497" cy="578497"/>
           </a:xfrm>
           <a:custGeom>
             <a:avLst/>
@@ -13734,15 +13734,15 @@
             <a:cxnLst/>
             <a:rect l="l" t="t" r="r" b="b"/>
             <a:pathLst>
-              <a:path w="507386" h="507386">
+              <a:path w="578497" h="578497">
                 <a:moveTo>
-                  <a:pt x="0" y="507386"/>
+                  <a:pt x="0" y="578497"/>
                 </a:moveTo>
                 <a:lnTo>
-                  <a:pt x="507386" y="507386"/>
-                </a:lnTo>
-                <a:lnTo>
-                  <a:pt x="507386" y="0"/>
+                  <a:pt x="578497" y="578497"/>
+                </a:lnTo>
+                <a:lnTo>
+                  <a:pt x="578497" y="0"/>
                 </a:lnTo>
                 <a:lnTo>
                   <a:pt x="0" y="0"/>
@@ -13765,8 +13765,8 @@
         </p:nvSpPr>
         <p:spPr>
           <a:xfrm>
-            <a:off x="2669623" y="2770409"/>
-            <a:ext cx="507386" cy="507386"/>
+            <a:off x="2954066" y="2795778"/>
+            <a:ext cx="578497" cy="578497"/>
           </a:xfrm>
           <a:custGeom>
             <a:avLst/>
@@ -13775,15 +13775,15 @@
             <a:cxnLst/>
             <a:rect l="l" t="t" r="r" b="b"/>
             <a:pathLst>
-              <a:path w="507386" h="507386">
+              <a:path w="578497" h="578497">
                 <a:moveTo>
-                  <a:pt x="0" y="507386"/>
+                  <a:pt x="0" y="578497"/>
                 </a:moveTo>
                 <a:lnTo>
-                  <a:pt x="507386" y="507386"/>
-                </a:lnTo>
-                <a:lnTo>
-                  <a:pt x="507386" y="0"/>
+                  <a:pt x="578497" y="578497"/>
+                </a:lnTo>
+                <a:lnTo>
+                  <a:pt x="578497" y="0"/>
                 </a:lnTo>
                 <a:lnTo>
                   <a:pt x="0" y="0"/>
@@ -13806,8 +13806,8 @@
         </p:nvSpPr>
         <p:spPr>
           <a:xfrm>
-            <a:off x="3177008" y="2770409"/>
-            <a:ext cx="507386" cy="507386"/>
+            <a:off x="3532563" y="2795778"/>
+            <a:ext cx="578497" cy="578497"/>
           </a:xfrm>
           <a:custGeom>
             <a:avLst/>
@@ -13816,15 +13816,15 @@
             <a:cxnLst/>
             <a:rect l="l" t="t" r="r" b="b"/>
             <a:pathLst>
-              <a:path w="507386" h="507386">
+              <a:path w="578497" h="578497">
                 <a:moveTo>
-                  <a:pt x="0" y="507386"/>
+                  <a:pt x="0" y="578497"/>
                 </a:moveTo>
                 <a:lnTo>
-                  <a:pt x="507386" y="507386"/>
-                </a:lnTo>
-                <a:lnTo>
-                  <a:pt x="507386" y="0"/>
+                  <a:pt x="578497" y="578497"/>
+                </a:lnTo>
+                <a:lnTo>
+                  <a:pt x="578497" y="0"/>
                 </a:lnTo>
                 <a:lnTo>
                   <a:pt x="0" y="0"/>
@@ -13847,8 +13847,8 @@
         </p:nvSpPr>
         <p:spPr>
           <a:xfrm>
-            <a:off x="3684394" y="2770409"/>
-            <a:ext cx="507386" cy="507386"/>
+            <a:off x="4111059" y="2795778"/>
+            <a:ext cx="578497" cy="578497"/>
           </a:xfrm>
           <a:custGeom>
             <a:avLst/>
@@ -13857,15 +13857,15 @@
             <a:cxnLst/>
             <a:rect l="l" t="t" r="r" b="b"/>
             <a:pathLst>
-              <a:path w="507386" h="507386">
+              <a:path w="578497" h="578497">
                 <a:moveTo>
-                  <a:pt x="0" y="507386"/>
+                  <a:pt x="0" y="578497"/>
                 </a:moveTo>
                 <a:lnTo>
-                  <a:pt x="507386" y="507386"/>
-                </a:lnTo>
-                <a:lnTo>
-                  <a:pt x="507386" y="0"/>
+                  <a:pt x="578497" y="578497"/>
+                </a:lnTo>
+                <a:lnTo>
+                  <a:pt x="578497" y="0"/>
                 </a:lnTo>
                 <a:lnTo>
                   <a:pt x="0" y="0"/>
@@ -13888,8 +13888,8 @@
         </p:nvSpPr>
         <p:spPr>
           <a:xfrm>
-            <a:off x="4191780" y="2770409"/>
-            <a:ext cx="507386" cy="507386"/>
+            <a:off x="4689556" y="2795778"/>
+            <a:ext cx="578497" cy="578497"/>
           </a:xfrm>
           <a:custGeom>
             <a:avLst/>
@@ -13898,15 +13898,15 @@
             <a:cxnLst/>
             <a:rect l="l" t="t" r="r" b="b"/>
             <a:pathLst>
-              <a:path w="507386" h="507386">
+              <a:path w="578497" h="578497">
                 <a:moveTo>
-                  <a:pt x="0" y="507386"/>
+                  <a:pt x="0" y="578497"/>
                 </a:moveTo>
                 <a:lnTo>
-                  <a:pt x="507386" y="507386"/>
-                </a:lnTo>
-                <a:lnTo>
-                  <a:pt x="507386" y="0"/>
+                  <a:pt x="578497" y="578497"/>
+                </a:lnTo>
+                <a:lnTo>
+                  <a:pt x="578497" y="0"/>
                 </a:lnTo>
                 <a:lnTo>
                   <a:pt x="0" y="0"/>
@@ -13929,8 +13929,8 @@
         </p:nvSpPr>
         <p:spPr>
           <a:xfrm>
-            <a:off x="4699165" y="2770409"/>
-            <a:ext cx="507386" cy="507386"/>
+            <a:off x="5268052" y="2795778"/>
+            <a:ext cx="578497" cy="578497"/>
           </a:xfrm>
           <a:custGeom>
             <a:avLst/>
@@ -13939,15 +13939,15 @@
             <a:cxnLst/>
             <a:rect l="l" t="t" r="r" b="b"/>
             <a:pathLst>
-              <a:path w="507386" h="507386">
+              <a:path w="578497" h="578497">
                 <a:moveTo>
-                  <a:pt x="0" y="507386"/>
+                  <a:pt x="0" y="578497"/>
                 </a:moveTo>
                 <a:lnTo>
-                  <a:pt x="507386" y="507386"/>
-                </a:lnTo>
-                <a:lnTo>
-                  <a:pt x="507386" y="0"/>
+                  <a:pt x="578497" y="578497"/>
+                </a:lnTo>
+                <a:lnTo>
+                  <a:pt x="578497" y="0"/>
                 </a:lnTo>
                 <a:lnTo>
                   <a:pt x="0" y="0"/>
@@ -13970,8 +13970,8 @@
         </p:nvSpPr>
         <p:spPr>
           <a:xfrm>
-            <a:off x="5206551" y="2770409"/>
-            <a:ext cx="507386" cy="507386"/>
+            <a:off x="5846549" y="2795778"/>
+            <a:ext cx="578497" cy="578497"/>
           </a:xfrm>
           <a:custGeom>
             <a:avLst/>
@@ -13980,15 +13980,15 @@
             <a:cxnLst/>
             <a:rect l="l" t="t" r="r" b="b"/>
             <a:pathLst>
-              <a:path w="507386" h="507386">
+              <a:path w="578497" h="578497">
                 <a:moveTo>
-                  <a:pt x="0" y="507386"/>
+                  <a:pt x="0" y="578497"/>
                 </a:moveTo>
                 <a:lnTo>
-                  <a:pt x="507386" y="507386"/>
-                </a:lnTo>
-                <a:lnTo>
-                  <a:pt x="507386" y="0"/>
+                  <a:pt x="578497" y="578497"/>
+                </a:lnTo>
+                <a:lnTo>
+                  <a:pt x="578497" y="0"/>
                 </a:lnTo>
                 <a:lnTo>
                   <a:pt x="0" y="0"/>
@@ -14011,8 +14011,8 @@
         </p:nvSpPr>
         <p:spPr>
           <a:xfrm>
-            <a:off x="1218500" y="2354352"/>
-            <a:ext cx="182659" cy="314579"/>
+            <a:off x="1299566" y="2321411"/>
+            <a:ext cx="208259" cy="358668"/>
           </a:xfrm>
           <a:custGeom>
             <a:avLst/>
@@ -14021,15 +14021,15 @@
             <a:cxnLst/>
             <a:rect l="l" t="t" r="r" b="b"/>
             <a:pathLst>
-              <a:path w="182659" h="314579">
+              <a:path w="208259" h="358668">
                 <a:moveTo>
-                  <a:pt x="0" y="273988"/>
+                  <a:pt x="0" y="312388"/>
                 </a:moveTo>
                 <a:lnTo>
-                  <a:pt x="182659" y="314579"/>
-                </a:lnTo>
-                <a:lnTo>
-                  <a:pt x="182659" y="40591"/>
+                  <a:pt x="208259" y="358668"/>
+                </a:lnTo>
+                <a:lnTo>
+                  <a:pt x="208259" y="46280"/>
                 </a:lnTo>
                 <a:lnTo>
                   <a:pt x="0" y="0"/>
@@ -14057,8 +14057,8 @@
         </p:nvSpPr>
         <p:spPr>
           <a:xfrm>
-            <a:off x="1401159" y="2354352"/>
-            <a:ext cx="182659" cy="314579"/>
+            <a:off x="1507825" y="2321411"/>
+            <a:ext cx="208259" cy="358668"/>
           </a:xfrm>
           <a:custGeom>
             <a:avLst/>
@@ -14067,18 +14067,18 @@
             <a:cxnLst/>
             <a:rect l="l" t="t" r="r" b="b"/>
             <a:pathLst>
-              <a:path w="182659" h="314579">
+              <a:path w="208259" h="358668">
                 <a:moveTo>
-                  <a:pt x="182659" y="273988"/>
+                  <a:pt x="208259" y="312388"/>
                 </a:moveTo>
                 <a:lnTo>
-                  <a:pt x="0" y="314579"/>
-                </a:lnTo>
-                <a:lnTo>
-                  <a:pt x="0" y="40591"/>
-                </a:lnTo>
-                <a:lnTo>
-                  <a:pt x="182659" y="0"/>
+                  <a:pt x="0" y="358668"/>
+                </a:lnTo>
+                <a:lnTo>
+                  <a:pt x="0" y="46280"/>
+                </a:lnTo>
+                <a:lnTo>
+                  <a:pt x="208259" y="0"/>
                 </a:lnTo>
                 <a:close/>
               </a:path>
@@ -14103,8 +14103,8 @@
         </p:nvSpPr>
         <p:spPr>
           <a:xfrm>
-            <a:off x="2811691" y="2334057"/>
-            <a:ext cx="273988" cy="162363"/>
+            <a:off x="3116045" y="2298271"/>
+            <a:ext cx="312388" cy="185119"/>
           </a:xfrm>
           <a:custGeom>
             <a:avLst/>
@@ -14113,15 +14113,15 @@
             <a:cxnLst/>
             <a:rect l="l" t="t" r="r" b="b"/>
             <a:pathLst>
-              <a:path w="273988" h="162363">
+              <a:path w="312388" h="185119">
                 <a:moveTo>
                   <a:pt x="0" y="0"/>
                 </a:moveTo>
                 <a:lnTo>
-                  <a:pt x="273988" y="81182"/>
-                </a:lnTo>
-                <a:lnTo>
-                  <a:pt x="0" y="162363"/>
+                  <a:pt x="312388" y="92559"/>
+                </a:lnTo>
+                <a:lnTo>
+                  <a:pt x="0" y="185119"/>
                 </a:lnTo>
                 <a:close/>
               </a:path>
@@ -14146,8 +14146,8 @@
         </p:nvSpPr>
         <p:spPr>
           <a:xfrm>
-            <a:off x="2887799" y="2070216"/>
-            <a:ext cx="71034" cy="131920"/>
+            <a:off x="3202820" y="1997453"/>
+            <a:ext cx="80990" cy="150409"/>
           </a:xfrm>
           <a:custGeom>
             <a:avLst/>
@@ -14156,15 +14156,15 @@
             <a:cxnLst/>
             <a:rect l="l" t="t" r="r" b="b"/>
             <a:pathLst>
-              <a:path w="71034" h="131920">
+              <a:path w="80990" h="150409">
                 <a:moveTo>
-                  <a:pt x="0" y="131920"/>
+                  <a:pt x="0" y="150409"/>
                 </a:moveTo>
                 <a:lnTo>
-                  <a:pt x="71034" y="131920"/>
-                </a:lnTo>
-                <a:lnTo>
-                  <a:pt x="71034" y="0"/>
+                  <a:pt x="80990" y="150409"/>
+                </a:lnTo>
+                <a:lnTo>
+                  <a:pt x="80990" y="0"/>
                 </a:lnTo>
                 <a:lnTo>
                   <a:pt x="0" y="0"/>
@@ -14192,8 +14192,8 @@
         </p:nvSpPr>
         <p:spPr>
           <a:xfrm>
-            <a:off x="2760952" y="1806376"/>
-            <a:ext cx="324727" cy="263841"/>
+            <a:off x="3058196" y="1696635"/>
+            <a:ext cx="370238" cy="300818"/>
           </a:xfrm>
           <a:custGeom>
             <a:avLst/>
@@ -14202,15 +14202,15 @@
             <a:cxnLst/>
             <a:rect l="l" t="t" r="r" b="b"/>
             <a:pathLst>
-              <a:path w="324727" h="263841">
+              <a:path w="370238" h="300818">
                 <a:moveTo>
-                  <a:pt x="0" y="263841"/>
+                  <a:pt x="0" y="300818"/>
                 </a:moveTo>
                 <a:lnTo>
-                  <a:pt x="324727" y="263841"/>
-                </a:lnTo>
-                <a:lnTo>
-                  <a:pt x="162363" y="0"/>
+                  <a:pt x="370238" y="300818"/>
+                </a:lnTo>
+                <a:lnTo>
+                  <a:pt x="185119" y="0"/>
                 </a:lnTo>
                 <a:close/>
               </a:path>
@@ -14235,8 +14235,8 @@
         </p:nvSpPr>
         <p:spPr>
           <a:xfrm>
-            <a:off x="2329674" y="3358976"/>
-            <a:ext cx="172511" cy="131920"/>
+            <a:off x="2566473" y="3466834"/>
+            <a:ext cx="196689" cy="150409"/>
           </a:xfrm>
           <a:custGeom>
             <a:avLst/>
@@ -14245,27 +14245,27 @@
             <a:cxnLst/>
             <a:rect l="l" t="t" r="r" b="b"/>
             <a:pathLst>
-              <a:path w="172511" h="131920">
+              <a:path w="196689" h="150409">
                 <a:moveTo>
-                  <a:pt x="172511" y="131920"/>
+                  <a:pt x="196689" y="150409"/>
                 </a:moveTo>
                 <a:lnTo>
-                  <a:pt x="160841" y="65960"/>
-                </a:lnTo>
-                <a:lnTo>
-                  <a:pt x="129383" y="17758"/>
-                </a:lnTo>
-                <a:lnTo>
-                  <a:pt x="86256" y="0"/>
-                </a:lnTo>
-                <a:lnTo>
-                  <a:pt x="43128" y="17758"/>
-                </a:lnTo>
-                <a:lnTo>
-                  <a:pt x="11670" y="65960"/>
-                </a:lnTo>
-                <a:lnTo>
-                  <a:pt x="0" y="131920"/>
+                  <a:pt x="183466" y="75205"/>
+                </a:lnTo>
+                <a:lnTo>
+                  <a:pt x="147517" y="20247"/>
+                </a:lnTo>
+                <a:lnTo>
+                  <a:pt x="98344" y="0"/>
+                </a:lnTo>
+                <a:lnTo>
+                  <a:pt x="49172" y="20247"/>
+                </a:lnTo>
+                <a:lnTo>
+                  <a:pt x="13223" y="75205"/>
+                </a:lnTo>
+                <a:lnTo>
+                  <a:pt x="0" y="150409"/>
                 </a:lnTo>
               </a:path>
             </a:pathLst>
@@ -14287,8 +14287,8 @@
         </p:nvSpPr>
         <p:spPr>
           <a:xfrm>
-            <a:off x="2248493" y="3490896"/>
-            <a:ext cx="334875" cy="223250"/>
+            <a:off x="2473914" y="3617243"/>
+            <a:ext cx="381808" cy="254538"/>
           </a:xfrm>
           <a:custGeom>
             <a:avLst/>
@@ -14297,18 +14297,18 @@
             <a:cxnLst/>
             <a:rect l="l" t="t" r="r" b="b"/>
             <a:pathLst>
-              <a:path w="334875" h="223250">
+              <a:path w="381808" h="254538">
                 <a:moveTo>
                   <a:pt x="0" y="0"/>
                 </a:moveTo>
                 <a:lnTo>
-                  <a:pt x="334875" y="0"/>
-                </a:lnTo>
-                <a:lnTo>
-                  <a:pt x="294284" y="223250"/>
-                </a:lnTo>
-                <a:lnTo>
-                  <a:pt x="40591" y="223250"/>
+                  <a:pt x="381808" y="0"/>
+                </a:lnTo>
+                <a:lnTo>
+                  <a:pt x="335528" y="254538"/>
+                </a:lnTo>
+                <a:lnTo>
+                  <a:pt x="46280" y="254538"/>
                 </a:lnTo>
                 <a:close/>
               </a:path>
@@ -14333,8 +14333,8 @@
         </p:nvSpPr>
         <p:spPr>
           <a:xfrm>
-            <a:off x="2771100" y="3338681"/>
-            <a:ext cx="304431" cy="375465"/>
+            <a:off x="3069765" y="3443694"/>
+            <a:ext cx="347098" cy="428087"/>
           </a:xfrm>
           <a:custGeom>
             <a:avLst/>
@@ -14343,21 +14343,21 @@
             <a:cxnLst/>
             <a:rect l="l" t="t" r="r" b="b"/>
             <a:pathLst>
-              <a:path w="304431" h="375465">
+              <a:path w="347098" h="428087">
                 <a:moveTo>
-                  <a:pt x="0" y="375465"/>
+                  <a:pt x="0" y="428087"/>
                 </a:moveTo>
                 <a:lnTo>
-                  <a:pt x="304431" y="375465"/>
-                </a:lnTo>
-                <a:lnTo>
-                  <a:pt x="304431" y="172511"/>
-                </a:lnTo>
-                <a:lnTo>
-                  <a:pt x="152216" y="0"/>
-                </a:lnTo>
-                <a:lnTo>
-                  <a:pt x="0" y="172511"/>
+                  <a:pt x="347098" y="428087"/>
+                </a:lnTo>
+                <a:lnTo>
+                  <a:pt x="347098" y="196689"/>
+                </a:lnTo>
+                <a:lnTo>
+                  <a:pt x="173549" y="0"/>
+                </a:lnTo>
+                <a:lnTo>
+                  <a:pt x="0" y="196689"/>
                 </a:lnTo>
                 <a:close/>
               </a:path>
@@ -14382,8 +14382,8 @@
         </p:nvSpPr>
         <p:spPr>
           <a:xfrm>
-            <a:off x="4785421" y="3364050"/>
-            <a:ext cx="334875" cy="334875"/>
+            <a:off x="5366397" y="3472619"/>
+            <a:ext cx="381808" cy="381808"/>
           </a:xfrm>
           <a:custGeom>
             <a:avLst/>
@@ -14392,42 +14392,42 @@
             <a:cxnLst/>
             <a:rect l="l" t="t" r="r" b="b"/>
             <a:pathLst>
-              <a:path w="334875" h="334875">
+              <a:path w="381808" h="381808">
                 <a:moveTo>
-                  <a:pt x="116699" y="334875"/>
+                  <a:pt x="133054" y="381808"/>
                 </a:moveTo>
                 <a:lnTo>
-                  <a:pt x="218176" y="334875"/>
-                </a:lnTo>
-                <a:lnTo>
-                  <a:pt x="218176" y="218176"/>
-                </a:lnTo>
-                <a:lnTo>
-                  <a:pt x="334875" y="218176"/>
-                </a:lnTo>
-                <a:lnTo>
-                  <a:pt x="334875" y="116699"/>
-                </a:lnTo>
-                <a:lnTo>
-                  <a:pt x="218176" y="116699"/>
-                </a:lnTo>
-                <a:lnTo>
-                  <a:pt x="218176" y="0"/>
-                </a:lnTo>
-                <a:lnTo>
-                  <a:pt x="116699" y="0"/>
-                </a:lnTo>
-                <a:lnTo>
-                  <a:pt x="116699" y="116699"/>
-                </a:lnTo>
-                <a:lnTo>
-                  <a:pt x="0" y="116699"/>
-                </a:lnTo>
-                <a:lnTo>
-                  <a:pt x="0" y="218176"/>
-                </a:lnTo>
-                <a:lnTo>
-                  <a:pt x="116699" y="218176"/>
+                  <a:pt x="248754" y="381808"/>
+                </a:lnTo>
+                <a:lnTo>
+                  <a:pt x="248754" y="248754"/>
+                </a:lnTo>
+                <a:lnTo>
+                  <a:pt x="381808" y="248754"/>
+                </a:lnTo>
+                <a:lnTo>
+                  <a:pt x="381808" y="133054"/>
+                </a:lnTo>
+                <a:lnTo>
+                  <a:pt x="248754" y="133054"/>
+                </a:lnTo>
+                <a:lnTo>
+                  <a:pt x="248754" y="0"/>
+                </a:lnTo>
+                <a:lnTo>
+                  <a:pt x="133054" y="0"/>
+                </a:lnTo>
+                <a:lnTo>
+                  <a:pt x="133054" y="133054"/>
+                </a:lnTo>
+                <a:lnTo>
+                  <a:pt x="0" y="133054"/>
+                </a:lnTo>
+                <a:lnTo>
+                  <a:pt x="0" y="248754"/>
+                </a:lnTo>
+                <a:lnTo>
+                  <a:pt x="133054" y="248754"/>
                 </a:lnTo>
                 <a:close/>
               </a:path>
@@ -14452,8 +14452,8 @@
         </p:nvSpPr>
         <p:spPr>
           <a:xfrm>
-            <a:off x="640080" y="1755637"/>
-            <a:ext cx="5073857" cy="2029543"/>
+            <a:off x="640080" y="1638785"/>
+            <a:ext cx="5784965" cy="2313986"/>
           </a:xfrm>
           <a:custGeom>
             <a:avLst/>
@@ -14462,15 +14462,15 @@
             <a:cxnLst/>
             <a:rect l="l" t="t" r="r" b="b"/>
             <a:pathLst>
-              <a:path w="5073857" h="2029543">
+              <a:path w="5784965" h="2313986">
                 <a:moveTo>
-                  <a:pt x="0" y="2029543"/>
+                  <a:pt x="0" y="2313986"/>
                 </a:moveTo>
                 <a:lnTo>
-                  <a:pt x="5073857" y="2029543"/>
-                </a:lnTo>
-                <a:lnTo>
-                  <a:pt x="5073857" y="0"/>
+                  <a:pt x="5784965" y="2313986"/>
+                </a:lnTo>
+                <a:lnTo>
+                  <a:pt x="5784965" y="0"/>
                 </a:lnTo>
                 <a:lnTo>
                   <a:pt x="0" y="0"/>
@@ -14496,8 +14496,8 @@
         </p:nvSpPr>
         <p:spPr>
           <a:xfrm>
-            <a:off x="7692741" y="1654160"/>
-            <a:ext cx="3856131" cy="2283236"/>
+            <a:off x="8036572" y="1866051"/>
+            <a:ext cx="3512300" cy="1859453"/>
           </a:xfrm>
           <a:custGeom>
             <a:avLst/>
@@ -14506,15 +14506,15 @@
             <a:cxnLst/>
             <a:rect l="l" t="t" r="r" b="b"/>
             <a:pathLst>
-              <a:path w="3856131" h="2283236">
+              <a:path w="3512300" h="1859453">
                 <a:moveTo>
-                  <a:pt x="0" y="2283236"/>
+                  <a:pt x="0" y="1859453"/>
                 </a:moveTo>
                 <a:lnTo>
-                  <a:pt x="3856131" y="2283236"/>
-                </a:lnTo>
-                <a:lnTo>
-                  <a:pt x="3856131" y="0"/>
+                  <a:pt x="3512300" y="1859453"/>
+                </a:lnTo>
+                <a:lnTo>
+                  <a:pt x="3512300" y="0"/>
                 </a:lnTo>
                 <a:lnTo>
                   <a:pt x="0" y="0"/>
@@ -14542,8 +14542,8 @@
         </p:nvSpPr>
         <p:spPr>
           <a:xfrm>
-            <a:off x="7692741" y="1654160"/>
-            <a:ext cx="3856131" cy="380539"/>
+            <a:off x="8036572" y="1866051"/>
+            <a:ext cx="3512300" cy="309909"/>
           </a:xfrm>
           <a:custGeom>
             <a:avLst/>
@@ -14552,15 +14552,15 @@
             <a:cxnLst/>
             <a:rect l="l" t="t" r="r" b="b"/>
             <a:pathLst>
-              <a:path w="3856131" h="380539">
+              <a:path w="3512300" h="309909">
                 <a:moveTo>
-                  <a:pt x="0" y="380539"/>
+                  <a:pt x="0" y="309909"/>
                 </a:moveTo>
                 <a:lnTo>
-                  <a:pt x="3856131" y="380539"/>
-                </a:lnTo>
-                <a:lnTo>
-                  <a:pt x="3856131" y="0"/>
+                  <a:pt x="3512300" y="309909"/>
+                </a:lnTo>
+                <a:lnTo>
+                  <a:pt x="3512300" y="0"/>
                 </a:lnTo>
                 <a:lnTo>
                   <a:pt x="0" y="0"/>
@@ -14588,8 +14588,8 @@
         </p:nvSpPr>
         <p:spPr>
           <a:xfrm>
-            <a:off x="7972818" y="2063113"/>
-            <a:ext cx="246589" cy="146127"/>
+            <a:off x="8244004" y="2199100"/>
+            <a:ext cx="200821" cy="119005"/>
           </a:xfrm>
           <a:custGeom>
             <a:avLst/>
@@ -14598,15 +14598,15 @@
             <a:cxnLst/>
             <a:rect l="l" t="t" r="r" b="b"/>
             <a:pathLst>
-              <a:path w="246589" h="146127">
+              <a:path w="200821" h="119005">
                 <a:moveTo>
                   <a:pt x="0" y="0"/>
                 </a:moveTo>
                 <a:lnTo>
-                  <a:pt x="246589" y="73064"/>
-                </a:lnTo>
-                <a:lnTo>
-                  <a:pt x="0" y="146127"/>
+                  <a:pt x="200821" y="59503"/>
+                </a:lnTo>
+                <a:lnTo>
+                  <a:pt x="0" y="119005"/>
                 </a:lnTo>
                 <a:close/>
               </a:path>
@@ -14631,8 +14631,8 @@
         </p:nvSpPr>
         <p:spPr>
           <a:xfrm>
-            <a:off x="9850652" y="2076812"/>
-            <a:ext cx="301387" cy="301387"/>
+            <a:off x="9938586" y="2210257"/>
+            <a:ext cx="245448" cy="245448"/>
           </a:xfrm>
           <a:custGeom>
             <a:avLst/>
@@ -14641,42 +14641,42 @@
             <a:cxnLst/>
             <a:rect l="l" t="t" r="r" b="b"/>
             <a:pathLst>
-              <a:path w="301387" h="301387">
+              <a:path w="245448" h="245448">
                 <a:moveTo>
-                  <a:pt x="105029" y="301387"/>
+                  <a:pt x="85535" y="245448"/>
                 </a:moveTo>
                 <a:lnTo>
-                  <a:pt x="196358" y="301387"/>
-                </a:lnTo>
-                <a:lnTo>
-                  <a:pt x="196358" y="196358"/>
-                </a:lnTo>
-                <a:lnTo>
-                  <a:pt x="301387" y="196358"/>
-                </a:lnTo>
-                <a:lnTo>
-                  <a:pt x="301387" y="105029"/>
-                </a:lnTo>
-                <a:lnTo>
-                  <a:pt x="196358" y="105029"/>
-                </a:lnTo>
-                <a:lnTo>
-                  <a:pt x="196358" y="0"/>
-                </a:lnTo>
-                <a:lnTo>
-                  <a:pt x="105029" y="0"/>
-                </a:lnTo>
-                <a:lnTo>
-                  <a:pt x="105029" y="105029"/>
-                </a:lnTo>
-                <a:lnTo>
-                  <a:pt x="0" y="105029"/>
-                </a:lnTo>
-                <a:lnTo>
-                  <a:pt x="0" y="196358"/>
-                </a:lnTo>
-                <a:lnTo>
-                  <a:pt x="105029" y="196358"/>
+                  <a:pt x="159913" y="245448"/>
+                </a:lnTo>
+                <a:lnTo>
+                  <a:pt x="159913" y="159913"/>
+                </a:lnTo>
+                <a:lnTo>
+                  <a:pt x="245448" y="159913"/>
+                </a:lnTo>
+                <a:lnTo>
+                  <a:pt x="245448" y="85535"/>
+                </a:lnTo>
+                <a:lnTo>
+                  <a:pt x="159913" y="85535"/>
+                </a:lnTo>
+                <a:lnTo>
+                  <a:pt x="159913" y="0"/>
+                </a:lnTo>
+                <a:lnTo>
+                  <a:pt x="85535" y="0"/>
+                </a:lnTo>
+                <a:lnTo>
+                  <a:pt x="85535" y="85535"/>
+                </a:lnTo>
+                <a:lnTo>
+                  <a:pt x="0" y="85535"/>
+                </a:lnTo>
+                <a:lnTo>
+                  <a:pt x="0" y="159913"/>
+                </a:lnTo>
+                <a:lnTo>
+                  <a:pt x="85535" y="159913"/>
                 </a:lnTo>
                 <a:close/>
               </a:path>
@@ -14701,8 +14701,8 @@
         </p:nvSpPr>
         <p:spPr>
           <a:xfrm>
-            <a:off x="8041315" y="2738951"/>
-            <a:ext cx="63931" cy="118728"/>
+            <a:off x="8299787" y="2749498"/>
+            <a:ext cx="52065" cy="96692"/>
           </a:xfrm>
           <a:custGeom>
             <a:avLst/>
@@ -14711,15 +14711,15 @@
             <a:cxnLst/>
             <a:rect l="l" t="t" r="r" b="b"/>
             <a:pathLst>
-              <a:path w="63931" h="118728">
+              <a:path w="52065" h="96692">
                 <a:moveTo>
-                  <a:pt x="0" y="118728"/>
+                  <a:pt x="0" y="96692"/>
                 </a:moveTo>
                 <a:lnTo>
-                  <a:pt x="63931" y="118728"/>
-                </a:lnTo>
-                <a:lnTo>
-                  <a:pt x="63931" y="0"/>
+                  <a:pt x="52065" y="96692"/>
+                </a:lnTo>
+                <a:lnTo>
+                  <a:pt x="52065" y="0"/>
                 </a:lnTo>
                 <a:lnTo>
                   <a:pt x="0" y="0"/>
@@ -14747,8 +14747,8 @@
         </p:nvSpPr>
         <p:spPr>
           <a:xfrm>
-            <a:off x="7927153" y="2501494"/>
-            <a:ext cx="292254" cy="237456"/>
+            <a:off x="8206815" y="2556115"/>
+            <a:ext cx="238010" cy="193383"/>
           </a:xfrm>
           <a:custGeom>
             <a:avLst/>
@@ -14757,15 +14757,15 @@
             <a:cxnLst/>
             <a:rect l="l" t="t" r="r" b="b"/>
             <a:pathLst>
-              <a:path w="292254" h="237456">
+              <a:path w="238010" h="193383">
                 <a:moveTo>
-                  <a:pt x="0" y="237456"/>
+                  <a:pt x="0" y="193383"/>
                 </a:moveTo>
                 <a:lnTo>
-                  <a:pt x="292254" y="237456"/>
-                </a:lnTo>
-                <a:lnTo>
-                  <a:pt x="146127" y="0"/>
+                  <a:pt x="238010" y="193383"/>
+                </a:lnTo>
+                <a:lnTo>
+                  <a:pt x="119005" y="0"/>
                 </a:lnTo>
                 <a:close/>
               </a:path>
@@ -14790,8 +14790,8 @@
         </p:nvSpPr>
         <p:spPr>
           <a:xfrm>
-            <a:off x="9836953" y="2538026"/>
-            <a:ext cx="164393" cy="283121"/>
+            <a:off x="9927429" y="2585866"/>
+            <a:ext cx="133881" cy="230572"/>
           </a:xfrm>
           <a:custGeom>
             <a:avLst/>
@@ -14800,15 +14800,15 @@
             <a:cxnLst/>
             <a:rect l="l" t="t" r="r" b="b"/>
             <a:pathLst>
-              <a:path w="164393" h="283121">
+              <a:path w="133881" h="230572">
                 <a:moveTo>
-                  <a:pt x="0" y="246589"/>
+                  <a:pt x="0" y="200821"/>
                 </a:moveTo>
                 <a:lnTo>
-                  <a:pt x="164393" y="283121"/>
-                </a:lnTo>
-                <a:lnTo>
-                  <a:pt x="164393" y="36532"/>
+                  <a:pt x="133881" y="230572"/>
+                </a:lnTo>
+                <a:lnTo>
+                  <a:pt x="133881" y="29751"/>
                 </a:lnTo>
                 <a:lnTo>
                   <a:pt x="0" y="0"/>
@@ -14836,8 +14836,8 @@
         </p:nvSpPr>
         <p:spPr>
           <a:xfrm>
-            <a:off x="10001346" y="2538026"/>
-            <a:ext cx="164393" cy="283121"/>
+            <a:off x="10061309" y="2585866"/>
+            <a:ext cx="133881" cy="230572"/>
           </a:xfrm>
           <a:custGeom>
             <a:avLst/>
@@ -14846,18 +14846,18 @@
             <a:cxnLst/>
             <a:rect l="l" t="t" r="r" b="b"/>
             <a:pathLst>
-              <a:path w="164393" h="283121">
+              <a:path w="133881" h="230572">
                 <a:moveTo>
-                  <a:pt x="164393" y="246589"/>
+                  <a:pt x="133881" y="200821"/>
                 </a:moveTo>
                 <a:lnTo>
-                  <a:pt x="0" y="283121"/>
-                </a:lnTo>
-                <a:lnTo>
-                  <a:pt x="0" y="36532"/>
-                </a:lnTo>
-                <a:lnTo>
-                  <a:pt x="164393" y="0"/>
+                  <a:pt x="0" y="230572"/>
+                </a:lnTo>
+                <a:lnTo>
+                  <a:pt x="0" y="29751"/>
+                </a:lnTo>
+                <a:lnTo>
+                  <a:pt x="133881" y="0"/>
                 </a:lnTo>
                 <a:close/>
               </a:path>
@@ -14882,8 +14882,8 @@
         </p:nvSpPr>
         <p:spPr>
           <a:xfrm>
-            <a:off x="9923716" y="2985540"/>
-            <a:ext cx="155260" cy="118728"/>
+            <a:off x="9998088" y="2950319"/>
+            <a:ext cx="126443" cy="96692"/>
           </a:xfrm>
           <a:custGeom>
             <a:avLst/>
@@ -14892,27 +14892,27 @@
             <a:cxnLst/>
             <a:rect l="l" t="t" r="r" b="b"/>
             <a:pathLst>
-              <a:path w="155260" h="118728">
+              <a:path w="126443" h="96692">
                 <a:moveTo>
-                  <a:pt x="155260" y="118728"/>
+                  <a:pt x="126443" y="96692"/>
                 </a:moveTo>
                 <a:lnTo>
-                  <a:pt x="145112" y="59364"/>
-                </a:lnTo>
-                <a:lnTo>
-                  <a:pt x="116191" y="15729"/>
-                </a:lnTo>
-                <a:lnTo>
-                  <a:pt x="77630" y="0"/>
-                </a:lnTo>
-                <a:lnTo>
-                  <a:pt x="38561" y="15729"/>
-                </a:lnTo>
-                <a:lnTo>
-                  <a:pt x="10148" y="59364"/>
-                </a:lnTo>
-                <a:lnTo>
-                  <a:pt x="0" y="118728"/>
+                  <a:pt x="118179" y="48346"/>
+                </a:lnTo>
+                <a:lnTo>
+                  <a:pt x="94626" y="12810"/>
+                </a:lnTo>
+                <a:lnTo>
+                  <a:pt x="63221" y="0"/>
+                </a:lnTo>
+                <a:lnTo>
+                  <a:pt x="31404" y="12810"/>
+                </a:lnTo>
+                <a:lnTo>
+                  <a:pt x="8264" y="48346"/>
+                </a:lnTo>
+                <a:lnTo>
+                  <a:pt x="0" y="96692"/>
                 </a:lnTo>
               </a:path>
             </a:pathLst>
@@ -14934,8 +14934,8 @@
         </p:nvSpPr>
         <p:spPr>
           <a:xfrm>
-            <a:off x="9850652" y="3104268"/>
-            <a:ext cx="301387" cy="200925"/>
+            <a:off x="9938586" y="3047011"/>
+            <a:ext cx="245448" cy="163632"/>
           </a:xfrm>
           <a:custGeom>
             <a:avLst/>
@@ -14944,18 +14944,18 @@
             <a:cxnLst/>
             <a:rect l="l" t="t" r="r" b="b"/>
             <a:pathLst>
-              <a:path w="301387" h="200925">
+              <a:path w="245448" h="163632">
                 <a:moveTo>
                   <a:pt x="0" y="0"/>
                 </a:moveTo>
                 <a:lnTo>
-                  <a:pt x="301387" y="0"/>
-                </a:lnTo>
-                <a:lnTo>
-                  <a:pt x="264855" y="200925"/>
-                </a:lnTo>
-                <a:lnTo>
-                  <a:pt x="36532" y="200925"/>
+                  <a:pt x="245448" y="0"/>
+                </a:lnTo>
+                <a:lnTo>
+                  <a:pt x="215697" y="163632"/>
+                </a:lnTo>
+                <a:lnTo>
+                  <a:pt x="29751" y="163632"/>
                 </a:lnTo>
                 <a:close/>
               </a:path>
@@ -14980,8 +14980,8 @@
         </p:nvSpPr>
         <p:spPr>
           <a:xfrm>
-            <a:off x="7936286" y="3423921"/>
-            <a:ext cx="273988" cy="337919"/>
+            <a:off x="8214253" y="3307334"/>
+            <a:ext cx="223134" cy="275199"/>
           </a:xfrm>
           <a:custGeom>
             <a:avLst/>
@@ -14990,21 +14990,21 @@
             <a:cxnLst/>
             <a:rect l="l" t="t" r="r" b="b"/>
             <a:pathLst>
-              <a:path w="273988" h="337919">
+              <a:path w="223134" h="275199">
                 <a:moveTo>
-                  <a:pt x="0" y="337919"/>
+                  <a:pt x="0" y="275199"/>
                 </a:moveTo>
                 <a:lnTo>
-                  <a:pt x="273988" y="337919"/>
-                </a:lnTo>
-                <a:lnTo>
-                  <a:pt x="273988" y="155260"/>
-                </a:lnTo>
-                <a:lnTo>
-                  <a:pt x="136994" y="0"/>
-                </a:lnTo>
-                <a:lnTo>
-                  <a:pt x="0" y="155260"/>
+                  <a:pt x="223134" y="275199"/>
+                </a:lnTo>
+                <a:lnTo>
+                  <a:pt x="223134" y="126443"/>
+                </a:lnTo>
+                <a:lnTo>
+                  <a:pt x="111567" y="0"/>
+                </a:lnTo>
+                <a:lnTo>
+                  <a:pt x="0" y="126443"/>
                 </a:lnTo>
                 <a:close/>
               </a:path>
@@ -15029,8 +15029,8 @@
         </p:nvSpPr>
         <p:spPr>
           <a:xfrm>
-            <a:off x="4785421" y="2349279"/>
-            <a:ext cx="334875" cy="334875"/>
+            <a:off x="5366397" y="2315626"/>
+            <a:ext cx="381808" cy="381808"/>
           </a:xfrm>
           <a:prstGeom prst="ellipse">
             <a:avLst/>
@@ -15054,8 +15054,8 @@
         </p:nvSpPr>
         <p:spPr>
           <a:xfrm>
-            <a:off x="4881824" y="2445682"/>
-            <a:ext cx="142068" cy="142068"/>
+            <a:off x="5476311" y="2425540"/>
+            <a:ext cx="161979" cy="161979"/>
           </a:xfrm>
           <a:prstGeom prst="ellipse">
             <a:avLst/>
@@ -15079,8 +15079,8 @@
         </p:nvSpPr>
         <p:spPr>
           <a:xfrm>
-            <a:off x="7922587" y="2990107"/>
-            <a:ext cx="301387" cy="301387"/>
+            <a:off x="8203096" y="2954038"/>
+            <a:ext cx="245448" cy="245448"/>
           </a:xfrm>
           <a:prstGeom prst="ellipse">
             <a:avLst/>
@@ -15104,8 +15104,8 @@
         </p:nvSpPr>
         <p:spPr>
           <a:xfrm>
-            <a:off x="8009350" y="3076870"/>
-            <a:ext cx="127861" cy="127861"/>
+            <a:off x="8273755" y="3024697"/>
+            <a:ext cx="104129" cy="104129"/>
           </a:xfrm>
           <a:prstGeom prst="ellipse">
             <a:avLst/>
@@ -15129,8 +15129,8 @@
         </p:nvSpPr>
         <p:spPr>
           <a:xfrm flipV="1">
-            <a:off x="2811691" y="2334057"/>
-            <a:ext cx="0" cy="365318"/>
+            <a:off x="3116045" y="2298271"/>
+            <a:ext cx="0" cy="416518"/>
           </a:xfrm>
           <a:prstGeom prst="line">
             <a:avLst/>
@@ -15152,8 +15152,8 @@
         </p:nvSpPr>
         <p:spPr>
           <a:xfrm flipV="1">
-            <a:off x="640080" y="1755637"/>
-            <a:ext cx="0" cy="2029543"/>
+            <a:off x="640080" y="1638785"/>
+            <a:ext cx="0" cy="2313986"/>
           </a:xfrm>
           <a:prstGeom prst="line">
             <a:avLst/>
@@ -15175,8 +15175,8 @@
         </p:nvSpPr>
         <p:spPr>
           <a:xfrm flipV="1">
-            <a:off x="1147466" y="1755637"/>
-            <a:ext cx="0" cy="2029543"/>
+            <a:off x="1218577" y="1638785"/>
+            <a:ext cx="0" cy="2313986"/>
           </a:xfrm>
           <a:prstGeom prst="line">
             <a:avLst/>
@@ -15198,8 +15198,8 @@
         </p:nvSpPr>
         <p:spPr>
           <a:xfrm flipV="1">
-            <a:off x="1654851" y="1755637"/>
-            <a:ext cx="0" cy="2029543"/>
+            <a:off x="1797073" y="1638785"/>
+            <a:ext cx="0" cy="2313986"/>
           </a:xfrm>
           <a:prstGeom prst="line">
             <a:avLst/>
@@ -15221,8 +15221,8 @@
         </p:nvSpPr>
         <p:spPr>
           <a:xfrm flipV="1">
-            <a:off x="2162237" y="1755637"/>
-            <a:ext cx="0" cy="2029543"/>
+            <a:off x="2375570" y="1638785"/>
+            <a:ext cx="0" cy="2313986"/>
           </a:xfrm>
           <a:prstGeom prst="line">
             <a:avLst/>
@@ -15244,8 +15244,8 @@
         </p:nvSpPr>
         <p:spPr>
           <a:xfrm flipV="1">
-            <a:off x="2669623" y="1755637"/>
-            <a:ext cx="0" cy="2029543"/>
+            <a:off x="2954066" y="1638785"/>
+            <a:ext cx="0" cy="2313986"/>
           </a:xfrm>
           <a:prstGeom prst="line">
             <a:avLst/>
@@ -15267,8 +15267,8 @@
         </p:nvSpPr>
         <p:spPr>
           <a:xfrm flipV="1">
-            <a:off x="3177008" y="1755637"/>
-            <a:ext cx="0" cy="2029543"/>
+            <a:off x="3532563" y="1638785"/>
+            <a:ext cx="0" cy="2313986"/>
           </a:xfrm>
           <a:prstGeom prst="line">
             <a:avLst/>
@@ -15290,8 +15290,8 @@
         </p:nvSpPr>
         <p:spPr>
           <a:xfrm flipV="1">
-            <a:off x="3684394" y="1755637"/>
-            <a:ext cx="0" cy="2029543"/>
+            <a:off x="4111059" y="1638785"/>
+            <a:ext cx="0" cy="2313986"/>
           </a:xfrm>
           <a:prstGeom prst="line">
             <a:avLst/>
@@ -15313,8 +15313,8 @@
         </p:nvSpPr>
         <p:spPr>
           <a:xfrm flipV="1">
-            <a:off x="4191780" y="1755637"/>
-            <a:ext cx="0" cy="2029543"/>
+            <a:off x="4689556" y="1638785"/>
+            <a:ext cx="0" cy="2313986"/>
           </a:xfrm>
           <a:prstGeom prst="line">
             <a:avLst/>
@@ -15336,8 +15336,8 @@
         </p:nvSpPr>
         <p:spPr>
           <a:xfrm flipV="1">
-            <a:off x="4699165" y="1755637"/>
-            <a:ext cx="0" cy="2029543"/>
+            <a:off x="5268052" y="1638785"/>
+            <a:ext cx="0" cy="2313986"/>
           </a:xfrm>
           <a:prstGeom prst="line">
             <a:avLst/>
@@ -15359,8 +15359,8 @@
         </p:nvSpPr>
         <p:spPr>
           <a:xfrm flipV="1">
-            <a:off x="5206551" y="1755637"/>
-            <a:ext cx="0" cy="2029543"/>
+            <a:off x="5846549" y="1638785"/>
+            <a:ext cx="0" cy="2313986"/>
           </a:xfrm>
           <a:prstGeom prst="line">
             <a:avLst/>
@@ -15382,8 +15382,8 @@
         </p:nvSpPr>
         <p:spPr>
           <a:xfrm flipV="1">
-            <a:off x="5713937" y="1755637"/>
-            <a:ext cx="0" cy="2029543"/>
+            <a:off x="6425045" y="1638785"/>
+            <a:ext cx="0" cy="2313986"/>
           </a:xfrm>
           <a:prstGeom prst="line">
             <a:avLst/>
@@ -15405,8 +15405,8 @@
         </p:nvSpPr>
         <p:spPr>
           <a:xfrm>
-            <a:off x="640080" y="3785180"/>
-            <a:ext cx="5073857" cy="0"/>
+            <a:off x="640080" y="3952771"/>
+            <a:ext cx="5784965" cy="0"/>
           </a:xfrm>
           <a:prstGeom prst="line">
             <a:avLst/>
@@ -15428,8 +15428,8 @@
         </p:nvSpPr>
         <p:spPr>
           <a:xfrm>
-            <a:off x="640080" y="3277794"/>
-            <a:ext cx="5073857" cy="0"/>
+            <a:off x="640080" y="3374275"/>
+            <a:ext cx="5784965" cy="0"/>
           </a:xfrm>
           <a:prstGeom prst="line">
             <a:avLst/>
@@ -15451,8 +15451,8 @@
         </p:nvSpPr>
         <p:spPr>
           <a:xfrm>
-            <a:off x="640080" y="2770409"/>
-            <a:ext cx="5073857" cy="0"/>
+            <a:off x="640080" y="2795778"/>
+            <a:ext cx="5784965" cy="0"/>
           </a:xfrm>
           <a:prstGeom prst="line">
             <a:avLst/>
@@ -15474,8 +15474,8 @@
         </p:nvSpPr>
         <p:spPr>
           <a:xfrm>
-            <a:off x="640080" y="2263023"/>
-            <a:ext cx="5073857" cy="0"/>
+            <a:off x="640080" y="2217281"/>
+            <a:ext cx="5784965" cy="0"/>
           </a:xfrm>
           <a:prstGeom prst="line">
             <a:avLst/>
@@ -15497,8 +15497,8 @@
         </p:nvSpPr>
         <p:spPr>
           <a:xfrm>
-            <a:off x="640080" y="1755637"/>
-            <a:ext cx="5073857" cy="0"/>
+            <a:off x="640080" y="1638785"/>
+            <a:ext cx="5784965" cy="0"/>
           </a:xfrm>
           <a:prstGeom prst="line">
             <a:avLst/>
@@ -15520,8 +15520,8 @@
         </p:nvSpPr>
         <p:spPr>
           <a:xfrm flipV="1">
-            <a:off x="6677970" y="2339131"/>
-            <a:ext cx="0" cy="862556"/>
+            <a:off x="7210148" y="2444548"/>
+            <a:ext cx="0" cy="702460"/>
           </a:xfrm>
           <a:prstGeom prst="line">
             <a:avLst/>
@@ -15544,8 +15544,8 @@
         </p:nvSpPr>
         <p:spPr>
           <a:xfrm>
-            <a:off x="6246692" y="2770409"/>
-            <a:ext cx="862556" cy="0"/>
+            <a:off x="6858918" y="2795778"/>
+            <a:ext cx="702460" cy="0"/>
           </a:xfrm>
           <a:prstGeom prst="line">
             <a:avLst/>
@@ -15567,8 +15567,8 @@
         </p:nvSpPr>
         <p:spPr>
           <a:xfrm flipV="1">
-            <a:off x="7972818" y="2063113"/>
-            <a:ext cx="0" cy="328786"/>
+            <a:off x="8244004" y="2199100"/>
+            <a:ext cx="0" cy="267761"/>
           </a:xfrm>
           <a:prstGeom prst="line">
             <a:avLst/>
@@ -15590,7 +15590,7 @@
         </p:nvSpPr>
         <p:spPr>
           <a:xfrm>
-            <a:off x="6473754" y="1920307"/>
+            <a:off x="7005932" y="2068103"/>
             <a:ext cx="408432" cy="381000"/>
           </a:xfrm>
           <a:prstGeom prst="rect">
@@ -15629,7 +15629,7 @@
         </p:nvSpPr>
         <p:spPr>
           <a:xfrm>
-            <a:off x="6473754" y="3239510"/>
+            <a:off x="7005932" y="3142453"/>
             <a:ext cx="408432" cy="381000"/>
           </a:xfrm>
           <a:prstGeom prst="rect">
@@ -15668,7 +15668,7 @@
         </p:nvSpPr>
         <p:spPr>
           <a:xfrm>
-            <a:off x="7133355" y="2579909"/>
+            <a:off x="7543107" y="2605278"/>
             <a:ext cx="408432" cy="381000"/>
           </a:xfrm>
           <a:prstGeom prst="rect">
@@ -15707,7 +15707,7 @@
         </p:nvSpPr>
         <p:spPr>
           <a:xfrm>
-            <a:off x="5814152" y="2579909"/>
+            <a:off x="6468757" y="2605278"/>
             <a:ext cx="408432" cy="381000"/>
           </a:xfrm>
           <a:prstGeom prst="rect">
@@ -15746,7 +15746,7 @@
         </p:nvSpPr>
         <p:spPr>
           <a:xfrm>
-            <a:off x="9267238" y="1653930"/>
+            <a:off x="9439154" y="1830506"/>
             <a:ext cx="707136" cy="381000"/>
           </a:xfrm>
           <a:prstGeom prst="rect">
@@ -15785,7 +15785,7 @@
         </p:nvSpPr>
         <p:spPr>
           <a:xfrm>
-            <a:off x="8556898" y="2037006"/>
+            <a:off x="8798675" y="2142481"/>
             <a:ext cx="707136" cy="381000"/>
           </a:xfrm>
           <a:prstGeom prst="rect">
@@ -15824,7 +15824,7 @@
         </p:nvSpPr>
         <p:spPr>
           <a:xfrm>
-            <a:off x="10484964" y="2037006"/>
+            <a:off x="10534165" y="2142481"/>
             <a:ext cx="707136" cy="381000"/>
           </a:xfrm>
           <a:prstGeom prst="rect">
@@ -15863,7 +15863,7 @@
         </p:nvSpPr>
         <p:spPr>
           <a:xfrm>
-            <a:off x="8556898" y="2493653"/>
+            <a:off x="8798675" y="2514371"/>
             <a:ext cx="707136" cy="381000"/>
           </a:xfrm>
           <a:prstGeom prst="rect">
@@ -15902,7 +15902,7 @@
         </p:nvSpPr>
         <p:spPr>
           <a:xfrm>
-            <a:off x="10335612" y="2493653"/>
+            <a:off x="10384813" y="2514371"/>
             <a:ext cx="1005840" cy="381000"/>
           </a:xfrm>
           <a:prstGeom prst="rect">
@@ -15941,7 +15941,7 @@
         </p:nvSpPr>
         <p:spPr>
           <a:xfrm>
-            <a:off x="8258194" y="2950300"/>
+            <a:off x="8499971" y="2886262"/>
             <a:ext cx="1304544" cy="381000"/>
           </a:xfrm>
           <a:prstGeom prst="rect">
@@ -15980,7 +15980,7 @@
         </p:nvSpPr>
         <p:spPr>
           <a:xfrm>
-            <a:off x="10484964" y="2950300"/>
+            <a:off x="10534165" y="2886262"/>
             <a:ext cx="707136" cy="381000"/>
           </a:xfrm>
           <a:prstGeom prst="rect">
@@ -16019,7 +16019,7 @@
         </p:nvSpPr>
         <p:spPr>
           <a:xfrm>
-            <a:off x="8706250" y="3406947"/>
+            <a:off x="8948027" y="3258153"/>
             <a:ext cx="408432" cy="381000"/>
           </a:xfrm>
           <a:prstGeom prst="rect">
@@ -17334,8 +17334,8 @@
         </p:nvSpPr>
         <p:spPr>
           <a:xfrm>
-            <a:off x="640080" y="3002819"/>
-            <a:ext cx="507386" cy="507386"/>
+            <a:off x="640080" y="3028188"/>
+            <a:ext cx="578497" cy="578497"/>
           </a:xfrm>
           <a:custGeom>
             <a:avLst/>
@@ -17344,15 +17344,15 @@
             <a:cxnLst/>
             <a:rect l="l" t="t" r="r" b="b"/>
             <a:pathLst>
-              <a:path w="507386" h="507386">
+              <a:path w="578497" h="578497">
                 <a:moveTo>
-                  <a:pt x="0" y="507386"/>
+                  <a:pt x="0" y="578497"/>
                 </a:moveTo>
                 <a:lnTo>
-                  <a:pt x="507386" y="507386"/>
-                </a:lnTo>
-                <a:lnTo>
-                  <a:pt x="507386" y="0"/>
+                  <a:pt x="578497" y="578497"/>
+                </a:lnTo>
+                <a:lnTo>
+                  <a:pt x="578497" y="0"/>
                 </a:lnTo>
                 <a:lnTo>
                   <a:pt x="0" y="0"/>
@@ -17375,8 +17375,8 @@
         </p:nvSpPr>
         <p:spPr>
           <a:xfrm>
-            <a:off x="1147466" y="3002819"/>
-            <a:ext cx="507386" cy="507386"/>
+            <a:off x="1218577" y="3028188"/>
+            <a:ext cx="578497" cy="578497"/>
           </a:xfrm>
           <a:custGeom>
             <a:avLst/>
@@ -17385,15 +17385,15 @@
             <a:cxnLst/>
             <a:rect l="l" t="t" r="r" b="b"/>
             <a:pathLst>
-              <a:path w="507386" h="507386">
+              <a:path w="578497" h="578497">
                 <a:moveTo>
-                  <a:pt x="0" y="507386"/>
+                  <a:pt x="0" y="578497"/>
                 </a:moveTo>
                 <a:lnTo>
-                  <a:pt x="507386" y="507386"/>
-                </a:lnTo>
-                <a:lnTo>
-                  <a:pt x="507386" y="0"/>
+                  <a:pt x="578497" y="578497"/>
+                </a:lnTo>
+                <a:lnTo>
+                  <a:pt x="578497" y="0"/>
                 </a:lnTo>
                 <a:lnTo>
                   <a:pt x="0" y="0"/>
@@ -17416,8 +17416,8 @@
         </p:nvSpPr>
         <p:spPr>
           <a:xfrm>
-            <a:off x="1654851" y="3002819"/>
-            <a:ext cx="507386" cy="507386"/>
+            <a:off x="1797073" y="3028188"/>
+            <a:ext cx="578497" cy="578497"/>
           </a:xfrm>
           <a:custGeom>
             <a:avLst/>
@@ -17426,15 +17426,15 @@
             <a:cxnLst/>
             <a:rect l="l" t="t" r="r" b="b"/>
             <a:pathLst>
-              <a:path w="507386" h="507386">
+              <a:path w="578497" h="578497">
                 <a:moveTo>
-                  <a:pt x="0" y="507386"/>
+                  <a:pt x="0" y="578497"/>
                 </a:moveTo>
                 <a:lnTo>
-                  <a:pt x="507386" y="507386"/>
-                </a:lnTo>
-                <a:lnTo>
-                  <a:pt x="507386" y="0"/>
+                  <a:pt x="578497" y="578497"/>
+                </a:lnTo>
+                <a:lnTo>
+                  <a:pt x="578497" y="0"/>
                 </a:lnTo>
                 <a:lnTo>
                   <a:pt x="0" y="0"/>
@@ -17457,8 +17457,8 @@
         </p:nvSpPr>
         <p:spPr>
           <a:xfrm>
-            <a:off x="2162237" y="3002819"/>
-            <a:ext cx="507386" cy="507386"/>
+            <a:off x="2375570" y="3028188"/>
+            <a:ext cx="578497" cy="578497"/>
           </a:xfrm>
           <a:custGeom>
             <a:avLst/>
@@ -17467,15 +17467,15 @@
             <a:cxnLst/>
             <a:rect l="l" t="t" r="r" b="b"/>
             <a:pathLst>
-              <a:path w="507386" h="507386">
+              <a:path w="578497" h="578497">
                 <a:moveTo>
-                  <a:pt x="0" y="507386"/>
+                  <a:pt x="0" y="578497"/>
                 </a:moveTo>
                 <a:lnTo>
-                  <a:pt x="507386" y="507386"/>
-                </a:lnTo>
-                <a:lnTo>
-                  <a:pt x="507386" y="0"/>
+                  <a:pt x="578497" y="578497"/>
+                </a:lnTo>
+                <a:lnTo>
+                  <a:pt x="578497" y="0"/>
                 </a:lnTo>
                 <a:lnTo>
                   <a:pt x="0" y="0"/>
@@ -17498,8 +17498,8 @@
         </p:nvSpPr>
         <p:spPr>
           <a:xfrm>
-            <a:off x="2669623" y="3002819"/>
-            <a:ext cx="507386" cy="507386"/>
+            <a:off x="2954066" y="3028188"/>
+            <a:ext cx="578497" cy="578497"/>
           </a:xfrm>
           <a:custGeom>
             <a:avLst/>
@@ -17508,15 +17508,15 @@
             <a:cxnLst/>
             <a:rect l="l" t="t" r="r" b="b"/>
             <a:pathLst>
-              <a:path w="507386" h="507386">
+              <a:path w="578497" h="578497">
                 <a:moveTo>
-                  <a:pt x="0" y="507386"/>
+                  <a:pt x="0" y="578497"/>
                 </a:moveTo>
                 <a:lnTo>
-                  <a:pt x="507386" y="507386"/>
-                </a:lnTo>
-                <a:lnTo>
-                  <a:pt x="507386" y="0"/>
+                  <a:pt x="578497" y="578497"/>
+                </a:lnTo>
+                <a:lnTo>
+                  <a:pt x="578497" y="0"/>
                 </a:lnTo>
                 <a:lnTo>
                   <a:pt x="0" y="0"/>
@@ -17539,8 +17539,8 @@
         </p:nvSpPr>
         <p:spPr>
           <a:xfrm>
-            <a:off x="3177008" y="3002819"/>
-            <a:ext cx="507386" cy="507386"/>
+            <a:off x="3532563" y="3028188"/>
+            <a:ext cx="578497" cy="578497"/>
           </a:xfrm>
           <a:custGeom>
             <a:avLst/>
@@ -17549,15 +17549,15 @@
             <a:cxnLst/>
             <a:rect l="l" t="t" r="r" b="b"/>
             <a:pathLst>
-              <a:path w="507386" h="507386">
+              <a:path w="578497" h="578497">
                 <a:moveTo>
-                  <a:pt x="0" y="507386"/>
+                  <a:pt x="0" y="578497"/>
                 </a:moveTo>
                 <a:lnTo>
-                  <a:pt x="507386" y="507386"/>
-                </a:lnTo>
-                <a:lnTo>
-                  <a:pt x="507386" y="0"/>
+                  <a:pt x="578497" y="578497"/>
+                </a:lnTo>
+                <a:lnTo>
+                  <a:pt x="578497" y="0"/>
                 </a:lnTo>
                 <a:lnTo>
                   <a:pt x="0" y="0"/>
@@ -17580,8 +17580,8 @@
         </p:nvSpPr>
         <p:spPr>
           <a:xfrm>
-            <a:off x="3684394" y="3002819"/>
-            <a:ext cx="507386" cy="507386"/>
+            <a:off x="4111059" y="3028188"/>
+            <a:ext cx="578497" cy="578497"/>
           </a:xfrm>
           <a:custGeom>
             <a:avLst/>
@@ -17590,15 +17590,15 @@
             <a:cxnLst/>
             <a:rect l="l" t="t" r="r" b="b"/>
             <a:pathLst>
-              <a:path w="507386" h="507386">
+              <a:path w="578497" h="578497">
                 <a:moveTo>
-                  <a:pt x="0" y="507386"/>
+                  <a:pt x="0" y="578497"/>
                 </a:moveTo>
                 <a:lnTo>
-                  <a:pt x="507386" y="507386"/>
-                </a:lnTo>
-                <a:lnTo>
-                  <a:pt x="507386" y="0"/>
+                  <a:pt x="578497" y="578497"/>
+                </a:lnTo>
+                <a:lnTo>
+                  <a:pt x="578497" y="0"/>
                 </a:lnTo>
                 <a:lnTo>
                   <a:pt x="0" y="0"/>
@@ -17621,8 +17621,8 @@
         </p:nvSpPr>
         <p:spPr>
           <a:xfrm>
-            <a:off x="4191780" y="3002819"/>
-            <a:ext cx="507386" cy="507386"/>
+            <a:off x="4689556" y="3028188"/>
+            <a:ext cx="578497" cy="578497"/>
           </a:xfrm>
           <a:custGeom>
             <a:avLst/>
@@ -17631,15 +17631,15 @@
             <a:cxnLst/>
             <a:rect l="l" t="t" r="r" b="b"/>
             <a:pathLst>
-              <a:path w="507386" h="507386">
+              <a:path w="578497" h="578497">
                 <a:moveTo>
-                  <a:pt x="0" y="507386"/>
+                  <a:pt x="0" y="578497"/>
                 </a:moveTo>
                 <a:lnTo>
-                  <a:pt x="507386" y="507386"/>
-                </a:lnTo>
-                <a:lnTo>
-                  <a:pt x="507386" y="0"/>
+                  <a:pt x="578497" y="578497"/>
+                </a:lnTo>
+                <a:lnTo>
+                  <a:pt x="578497" y="0"/>
                 </a:lnTo>
                 <a:lnTo>
                   <a:pt x="0" y="0"/>
@@ -17662,8 +17662,8 @@
         </p:nvSpPr>
         <p:spPr>
           <a:xfrm>
-            <a:off x="4699165" y="3002819"/>
-            <a:ext cx="507386" cy="507386"/>
+            <a:off x="5268052" y="3028188"/>
+            <a:ext cx="578497" cy="578497"/>
           </a:xfrm>
           <a:custGeom>
             <a:avLst/>
@@ -17672,15 +17672,15 @@
             <a:cxnLst/>
             <a:rect l="l" t="t" r="r" b="b"/>
             <a:pathLst>
-              <a:path w="507386" h="507386">
+              <a:path w="578497" h="578497">
                 <a:moveTo>
-                  <a:pt x="0" y="507386"/>
+                  <a:pt x="0" y="578497"/>
                 </a:moveTo>
                 <a:lnTo>
-                  <a:pt x="507386" y="507386"/>
-                </a:lnTo>
-                <a:lnTo>
-                  <a:pt x="507386" y="0"/>
+                  <a:pt x="578497" y="578497"/>
+                </a:lnTo>
+                <a:lnTo>
+                  <a:pt x="578497" y="0"/>
                 </a:lnTo>
                 <a:lnTo>
                   <a:pt x="0" y="0"/>
@@ -17703,8 +17703,8 @@
         </p:nvSpPr>
         <p:spPr>
           <a:xfrm>
-            <a:off x="5206551" y="3002819"/>
-            <a:ext cx="507386" cy="507386"/>
+            <a:off x="5846549" y="3028188"/>
+            <a:ext cx="578497" cy="578497"/>
           </a:xfrm>
           <a:custGeom>
             <a:avLst/>
@@ -17713,15 +17713,15 @@
             <a:cxnLst/>
             <a:rect l="l" t="t" r="r" b="b"/>
             <a:pathLst>
-              <a:path w="507386" h="507386">
+              <a:path w="578497" h="578497">
                 <a:moveTo>
-                  <a:pt x="0" y="507386"/>
+                  <a:pt x="0" y="578497"/>
                 </a:moveTo>
                 <a:lnTo>
-                  <a:pt x="507386" y="507386"/>
-                </a:lnTo>
-                <a:lnTo>
-                  <a:pt x="507386" y="0"/>
+                  <a:pt x="578497" y="578497"/>
+                </a:lnTo>
+                <a:lnTo>
+                  <a:pt x="578497" y="0"/>
                 </a:lnTo>
                 <a:lnTo>
                   <a:pt x="0" y="0"/>
@@ -17744,8 +17744,8 @@
         </p:nvSpPr>
         <p:spPr>
           <a:xfrm>
-            <a:off x="1218500" y="2586762"/>
-            <a:ext cx="182659" cy="314579"/>
+            <a:off x="1299566" y="2553821"/>
+            <a:ext cx="208259" cy="358668"/>
           </a:xfrm>
           <a:custGeom>
             <a:avLst/>
@@ -17754,15 +17754,15 @@
             <a:cxnLst/>
             <a:rect l="l" t="t" r="r" b="b"/>
             <a:pathLst>
-              <a:path w="182659" h="314579">
+              <a:path w="208259" h="358668">
                 <a:moveTo>
-                  <a:pt x="0" y="273988"/>
+                  <a:pt x="0" y="312388"/>
                 </a:moveTo>
                 <a:lnTo>
-                  <a:pt x="182659" y="314579"/>
-                </a:lnTo>
-                <a:lnTo>
-                  <a:pt x="182659" y="40591"/>
+                  <a:pt x="208259" y="358668"/>
+                </a:lnTo>
+                <a:lnTo>
+                  <a:pt x="208259" y="46280"/>
                 </a:lnTo>
                 <a:lnTo>
                   <a:pt x="0" y="0"/>
@@ -17790,8 +17790,8 @@
         </p:nvSpPr>
         <p:spPr>
           <a:xfrm>
-            <a:off x="1401159" y="2586762"/>
-            <a:ext cx="182659" cy="314579"/>
+            <a:off x="1507825" y="2553821"/>
+            <a:ext cx="208259" cy="358668"/>
           </a:xfrm>
           <a:custGeom>
             <a:avLst/>
@@ -17800,18 +17800,18 @@
             <a:cxnLst/>
             <a:rect l="l" t="t" r="r" b="b"/>
             <a:pathLst>
-              <a:path w="182659" h="314579">
+              <a:path w="208259" h="358668">
                 <a:moveTo>
-                  <a:pt x="182659" y="273988"/>
+                  <a:pt x="208259" y="312388"/>
                 </a:moveTo>
                 <a:lnTo>
-                  <a:pt x="0" y="314579"/>
-                </a:lnTo>
-                <a:lnTo>
-                  <a:pt x="0" y="40591"/>
-                </a:lnTo>
-                <a:lnTo>
-                  <a:pt x="182659" y="0"/>
+                  <a:pt x="0" y="358668"/>
+                </a:lnTo>
+                <a:lnTo>
+                  <a:pt x="0" y="46280"/>
+                </a:lnTo>
+                <a:lnTo>
+                  <a:pt x="208259" y="0"/>
                 </a:lnTo>
                 <a:close/>
               </a:path>
@@ -17836,8 +17836,8 @@
         </p:nvSpPr>
         <p:spPr>
           <a:xfrm>
-            <a:off x="2811691" y="2566467"/>
-            <a:ext cx="273988" cy="162363"/>
+            <a:off x="3116045" y="2530681"/>
+            <a:ext cx="312388" cy="185119"/>
           </a:xfrm>
           <a:custGeom>
             <a:avLst/>
@@ -17846,15 +17846,15 @@
             <a:cxnLst/>
             <a:rect l="l" t="t" r="r" b="b"/>
             <a:pathLst>
-              <a:path w="273988" h="162363">
+              <a:path w="312388" h="185119">
                 <a:moveTo>
                   <a:pt x="0" y="0"/>
                 </a:moveTo>
                 <a:lnTo>
-                  <a:pt x="273988" y="81182"/>
-                </a:lnTo>
-                <a:lnTo>
-                  <a:pt x="0" y="162363"/>
+                  <a:pt x="312388" y="92559"/>
+                </a:lnTo>
+                <a:lnTo>
+                  <a:pt x="0" y="185119"/>
                 </a:lnTo>
                 <a:close/>
               </a:path>
@@ -17879,8 +17879,8 @@
         </p:nvSpPr>
         <p:spPr>
           <a:xfrm>
-            <a:off x="2887799" y="2302626"/>
-            <a:ext cx="71034" cy="131920"/>
+            <a:off x="3202820" y="2229863"/>
+            <a:ext cx="80990" cy="150409"/>
           </a:xfrm>
           <a:custGeom>
             <a:avLst/>
@@ -17889,15 +17889,15 @@
             <a:cxnLst/>
             <a:rect l="l" t="t" r="r" b="b"/>
             <a:pathLst>
-              <a:path w="71034" h="131920">
+              <a:path w="80990" h="150409">
                 <a:moveTo>
-                  <a:pt x="0" y="131920"/>
+                  <a:pt x="0" y="150409"/>
                 </a:moveTo>
                 <a:lnTo>
-                  <a:pt x="71034" y="131920"/>
-                </a:lnTo>
-                <a:lnTo>
-                  <a:pt x="71034" y="0"/>
+                  <a:pt x="80990" y="150409"/>
+                </a:lnTo>
+                <a:lnTo>
+                  <a:pt x="80990" y="0"/>
                 </a:lnTo>
                 <a:lnTo>
                   <a:pt x="0" y="0"/>
@@ -17925,8 +17925,8 @@
         </p:nvSpPr>
         <p:spPr>
           <a:xfrm>
-            <a:off x="2760952" y="2038786"/>
-            <a:ext cx="324727" cy="263841"/>
+            <a:off x="3058196" y="1929045"/>
+            <a:ext cx="370238" cy="300818"/>
           </a:xfrm>
           <a:custGeom>
             <a:avLst/>
@@ -17935,15 +17935,15 @@
             <a:cxnLst/>
             <a:rect l="l" t="t" r="r" b="b"/>
             <a:pathLst>
-              <a:path w="324727" h="263841">
+              <a:path w="370238" h="300818">
                 <a:moveTo>
-                  <a:pt x="0" y="263841"/>
+                  <a:pt x="0" y="300818"/>
                 </a:moveTo>
                 <a:lnTo>
-                  <a:pt x="324727" y="263841"/>
-                </a:lnTo>
-                <a:lnTo>
-                  <a:pt x="162363" y="0"/>
+                  <a:pt x="370238" y="300818"/>
+                </a:lnTo>
+                <a:lnTo>
+                  <a:pt x="185119" y="0"/>
                 </a:lnTo>
                 <a:close/>
               </a:path>
@@ -17968,8 +17968,8 @@
         </p:nvSpPr>
         <p:spPr>
           <a:xfrm>
-            <a:off x="2329674" y="3591386"/>
-            <a:ext cx="172511" cy="131920"/>
+            <a:off x="2566473" y="3699244"/>
+            <a:ext cx="196689" cy="150409"/>
           </a:xfrm>
           <a:custGeom>
             <a:avLst/>
@@ -17978,27 +17978,27 @@
             <a:cxnLst/>
             <a:rect l="l" t="t" r="r" b="b"/>
             <a:pathLst>
-              <a:path w="172511" h="131920">
+              <a:path w="196689" h="150409">
                 <a:moveTo>
-                  <a:pt x="172511" y="131920"/>
+                  <a:pt x="196689" y="150409"/>
                 </a:moveTo>
                 <a:lnTo>
-                  <a:pt x="160841" y="65960"/>
-                </a:lnTo>
-                <a:lnTo>
-                  <a:pt x="129383" y="17758"/>
-                </a:lnTo>
-                <a:lnTo>
-                  <a:pt x="86256" y="0"/>
-                </a:lnTo>
-                <a:lnTo>
-                  <a:pt x="43128" y="17758"/>
-                </a:lnTo>
-                <a:lnTo>
-                  <a:pt x="11670" y="65960"/>
-                </a:lnTo>
-                <a:lnTo>
-                  <a:pt x="0" y="131920"/>
+                  <a:pt x="183466" y="75205"/>
+                </a:lnTo>
+                <a:lnTo>
+                  <a:pt x="147517" y="20247"/>
+                </a:lnTo>
+                <a:lnTo>
+                  <a:pt x="98344" y="0"/>
+                </a:lnTo>
+                <a:lnTo>
+                  <a:pt x="49172" y="20247"/>
+                </a:lnTo>
+                <a:lnTo>
+                  <a:pt x="13223" y="75205"/>
+                </a:lnTo>
+                <a:lnTo>
+                  <a:pt x="0" y="150409"/>
                 </a:lnTo>
               </a:path>
             </a:pathLst>
@@ -18020,8 +18020,8 @@
         </p:nvSpPr>
         <p:spPr>
           <a:xfrm>
-            <a:off x="2248493" y="3723306"/>
-            <a:ext cx="334875" cy="223250"/>
+            <a:off x="2473914" y="3849653"/>
+            <a:ext cx="381808" cy="254538"/>
           </a:xfrm>
           <a:custGeom>
             <a:avLst/>
@@ -18030,18 +18030,18 @@
             <a:cxnLst/>
             <a:rect l="l" t="t" r="r" b="b"/>
             <a:pathLst>
-              <a:path w="334875" h="223250">
+              <a:path w="381808" h="254538">
                 <a:moveTo>
                   <a:pt x="0" y="0"/>
                 </a:moveTo>
                 <a:lnTo>
-                  <a:pt x="334875" y="0"/>
-                </a:lnTo>
-                <a:lnTo>
-                  <a:pt x="294284" y="223250"/>
-                </a:lnTo>
-                <a:lnTo>
-                  <a:pt x="40591" y="223250"/>
+                  <a:pt x="381808" y="0"/>
+                </a:lnTo>
+                <a:lnTo>
+                  <a:pt x="335528" y="254538"/>
+                </a:lnTo>
+                <a:lnTo>
+                  <a:pt x="46280" y="254538"/>
                 </a:lnTo>
                 <a:close/>
               </a:path>
@@ -18066,8 +18066,8 @@
         </p:nvSpPr>
         <p:spPr>
           <a:xfrm>
-            <a:off x="2771100" y="3571091"/>
-            <a:ext cx="304431" cy="375465"/>
+            <a:off x="3069765" y="3676104"/>
+            <a:ext cx="347098" cy="428087"/>
           </a:xfrm>
           <a:custGeom>
             <a:avLst/>
@@ -18076,21 +18076,21 @@
             <a:cxnLst/>
             <a:rect l="l" t="t" r="r" b="b"/>
             <a:pathLst>
-              <a:path w="304431" h="375465">
+              <a:path w="347098" h="428087">
                 <a:moveTo>
-                  <a:pt x="0" y="375465"/>
+                  <a:pt x="0" y="428087"/>
                 </a:moveTo>
                 <a:lnTo>
-                  <a:pt x="304431" y="375465"/>
-                </a:lnTo>
-                <a:lnTo>
-                  <a:pt x="304431" y="172511"/>
-                </a:lnTo>
-                <a:lnTo>
-                  <a:pt x="152216" y="0"/>
-                </a:lnTo>
-                <a:lnTo>
-                  <a:pt x="0" y="172511"/>
+                  <a:pt x="347098" y="428087"/>
+                </a:lnTo>
+                <a:lnTo>
+                  <a:pt x="347098" y="196689"/>
+                </a:lnTo>
+                <a:lnTo>
+                  <a:pt x="173549" y="0"/>
+                </a:lnTo>
+                <a:lnTo>
+                  <a:pt x="0" y="196689"/>
                 </a:lnTo>
                 <a:close/>
               </a:path>
@@ -18115,8 +18115,8 @@
         </p:nvSpPr>
         <p:spPr>
           <a:xfrm>
-            <a:off x="4785421" y="3596460"/>
-            <a:ext cx="334875" cy="334875"/>
+            <a:off x="5366397" y="3705029"/>
+            <a:ext cx="381808" cy="381808"/>
           </a:xfrm>
           <a:custGeom>
             <a:avLst/>
@@ -18125,42 +18125,42 @@
             <a:cxnLst/>
             <a:rect l="l" t="t" r="r" b="b"/>
             <a:pathLst>
-              <a:path w="334875" h="334875">
+              <a:path w="381808" h="381808">
                 <a:moveTo>
-                  <a:pt x="116699" y="334875"/>
+                  <a:pt x="133054" y="381808"/>
                 </a:moveTo>
                 <a:lnTo>
-                  <a:pt x="218176" y="334875"/>
-                </a:lnTo>
-                <a:lnTo>
-                  <a:pt x="218176" y="218176"/>
-                </a:lnTo>
-                <a:lnTo>
-                  <a:pt x="334875" y="218176"/>
-                </a:lnTo>
-                <a:lnTo>
-                  <a:pt x="334875" y="116699"/>
-                </a:lnTo>
-                <a:lnTo>
-                  <a:pt x="218176" y="116699"/>
-                </a:lnTo>
-                <a:lnTo>
-                  <a:pt x="218176" y="0"/>
-                </a:lnTo>
-                <a:lnTo>
-                  <a:pt x="116699" y="0"/>
-                </a:lnTo>
-                <a:lnTo>
-                  <a:pt x="116699" y="116699"/>
-                </a:lnTo>
-                <a:lnTo>
-                  <a:pt x="0" y="116699"/>
-                </a:lnTo>
-                <a:lnTo>
-                  <a:pt x="0" y="218176"/>
-                </a:lnTo>
-                <a:lnTo>
-                  <a:pt x="116699" y="218176"/>
+                  <a:pt x="248754" y="381808"/>
+                </a:lnTo>
+                <a:lnTo>
+                  <a:pt x="248754" y="248754"/>
+                </a:lnTo>
+                <a:lnTo>
+                  <a:pt x="381808" y="248754"/>
+                </a:lnTo>
+                <a:lnTo>
+                  <a:pt x="381808" y="133054"/>
+                </a:lnTo>
+                <a:lnTo>
+                  <a:pt x="248754" y="133054"/>
+                </a:lnTo>
+                <a:lnTo>
+                  <a:pt x="248754" y="0"/>
+                </a:lnTo>
+                <a:lnTo>
+                  <a:pt x="133054" y="0"/>
+                </a:lnTo>
+                <a:lnTo>
+                  <a:pt x="133054" y="133054"/>
+                </a:lnTo>
+                <a:lnTo>
+                  <a:pt x="0" y="133054"/>
+                </a:lnTo>
+                <a:lnTo>
+                  <a:pt x="0" y="248754"/>
+                </a:lnTo>
+                <a:lnTo>
+                  <a:pt x="133054" y="248754"/>
                 </a:lnTo>
                 <a:close/>
               </a:path>
@@ -18185,8 +18185,8 @@
         </p:nvSpPr>
         <p:spPr>
           <a:xfrm>
-            <a:off x="640080" y="1988047"/>
-            <a:ext cx="5073857" cy="2029543"/>
+            <a:off x="640080" y="1871195"/>
+            <a:ext cx="5784965" cy="2313986"/>
           </a:xfrm>
           <a:custGeom>
             <a:avLst/>
@@ -18195,15 +18195,15 @@
             <a:cxnLst/>
             <a:rect l="l" t="t" r="r" b="b"/>
             <a:pathLst>
-              <a:path w="5073857" h="2029543">
+              <a:path w="5784965" h="2313986">
                 <a:moveTo>
-                  <a:pt x="0" y="2029543"/>
+                  <a:pt x="0" y="2313986"/>
                 </a:moveTo>
                 <a:lnTo>
-                  <a:pt x="5073857" y="2029543"/>
-                </a:lnTo>
-                <a:lnTo>
-                  <a:pt x="5073857" y="0"/>
+                  <a:pt x="5784965" y="2313986"/>
+                </a:lnTo>
+                <a:lnTo>
+                  <a:pt x="5784965" y="0"/>
                 </a:lnTo>
                 <a:lnTo>
                   <a:pt x="0" y="0"/>
@@ -18229,8 +18229,8 @@
         </p:nvSpPr>
         <p:spPr>
           <a:xfrm>
-            <a:off x="7692741" y="1886570"/>
-            <a:ext cx="3856131" cy="2283236"/>
+            <a:off x="8036572" y="2098461"/>
+            <a:ext cx="3512300" cy="1859453"/>
           </a:xfrm>
           <a:custGeom>
             <a:avLst/>
@@ -18239,15 +18239,15 @@
             <a:cxnLst/>
             <a:rect l="l" t="t" r="r" b="b"/>
             <a:pathLst>
-              <a:path w="3856131" h="2283236">
+              <a:path w="3512300" h="1859453">
                 <a:moveTo>
-                  <a:pt x="0" y="2283236"/>
+                  <a:pt x="0" y="1859453"/>
                 </a:moveTo>
                 <a:lnTo>
-                  <a:pt x="3856131" y="2283236"/>
-                </a:lnTo>
-                <a:lnTo>
-                  <a:pt x="3856131" y="0"/>
+                  <a:pt x="3512300" y="1859453"/>
+                </a:lnTo>
+                <a:lnTo>
+                  <a:pt x="3512300" y="0"/>
                 </a:lnTo>
                 <a:lnTo>
                   <a:pt x="0" y="0"/>
@@ -18275,8 +18275,8 @@
         </p:nvSpPr>
         <p:spPr>
           <a:xfrm>
-            <a:off x="7692741" y="1886570"/>
-            <a:ext cx="3856131" cy="380539"/>
+            <a:off x="8036572" y="2098461"/>
+            <a:ext cx="3512300" cy="309909"/>
           </a:xfrm>
           <a:custGeom>
             <a:avLst/>
@@ -18285,15 +18285,15 @@
             <a:cxnLst/>
             <a:rect l="l" t="t" r="r" b="b"/>
             <a:pathLst>
-              <a:path w="3856131" h="380539">
+              <a:path w="3512300" h="309909">
                 <a:moveTo>
-                  <a:pt x="0" y="380539"/>
+                  <a:pt x="0" y="309909"/>
                 </a:moveTo>
                 <a:lnTo>
-                  <a:pt x="3856131" y="380539"/>
-                </a:lnTo>
-                <a:lnTo>
-                  <a:pt x="3856131" y="0"/>
+                  <a:pt x="3512300" y="309909"/>
+                </a:lnTo>
+                <a:lnTo>
+                  <a:pt x="3512300" y="0"/>
                 </a:lnTo>
                 <a:lnTo>
                   <a:pt x="0" y="0"/>
@@ -18321,8 +18321,8 @@
         </p:nvSpPr>
         <p:spPr>
           <a:xfrm>
-            <a:off x="7972818" y="2295523"/>
-            <a:ext cx="246589" cy="146127"/>
+            <a:off x="8244004" y="2431510"/>
+            <a:ext cx="200821" cy="119005"/>
           </a:xfrm>
           <a:custGeom>
             <a:avLst/>
@@ -18331,15 +18331,15 @@
             <a:cxnLst/>
             <a:rect l="l" t="t" r="r" b="b"/>
             <a:pathLst>
-              <a:path w="246589" h="146127">
+              <a:path w="200821" h="119005">
                 <a:moveTo>
                   <a:pt x="0" y="0"/>
                 </a:moveTo>
                 <a:lnTo>
-                  <a:pt x="246589" y="73064"/>
-                </a:lnTo>
-                <a:lnTo>
-                  <a:pt x="0" y="146127"/>
+                  <a:pt x="200821" y="59503"/>
+                </a:lnTo>
+                <a:lnTo>
+                  <a:pt x="0" y="119005"/>
                 </a:lnTo>
                 <a:close/>
               </a:path>
@@ -18364,8 +18364,8 @@
         </p:nvSpPr>
         <p:spPr>
           <a:xfrm>
-            <a:off x="9850652" y="2309222"/>
-            <a:ext cx="301387" cy="301387"/>
+            <a:off x="9938586" y="2442667"/>
+            <a:ext cx="245448" cy="245448"/>
           </a:xfrm>
           <a:custGeom>
             <a:avLst/>
@@ -18374,42 +18374,42 @@
             <a:cxnLst/>
             <a:rect l="l" t="t" r="r" b="b"/>
             <a:pathLst>
-              <a:path w="301387" h="301387">
+              <a:path w="245448" h="245448">
                 <a:moveTo>
-                  <a:pt x="105029" y="301387"/>
+                  <a:pt x="85535" y="245448"/>
                 </a:moveTo>
                 <a:lnTo>
-                  <a:pt x="196358" y="301387"/>
-                </a:lnTo>
-                <a:lnTo>
-                  <a:pt x="196358" y="196358"/>
-                </a:lnTo>
-                <a:lnTo>
-                  <a:pt x="301387" y="196358"/>
-                </a:lnTo>
-                <a:lnTo>
-                  <a:pt x="301387" y="105029"/>
-                </a:lnTo>
-                <a:lnTo>
-                  <a:pt x="196358" y="105029"/>
-                </a:lnTo>
-                <a:lnTo>
-                  <a:pt x="196358" y="0"/>
-                </a:lnTo>
-                <a:lnTo>
-                  <a:pt x="105029" y="0"/>
-                </a:lnTo>
-                <a:lnTo>
-                  <a:pt x="105029" y="105029"/>
-                </a:lnTo>
-                <a:lnTo>
-                  <a:pt x="0" y="105029"/>
-                </a:lnTo>
-                <a:lnTo>
-                  <a:pt x="0" y="196358"/>
-                </a:lnTo>
-                <a:lnTo>
-                  <a:pt x="105029" y="196358"/>
+                  <a:pt x="159913" y="245448"/>
+                </a:lnTo>
+                <a:lnTo>
+                  <a:pt x="159913" y="159913"/>
+                </a:lnTo>
+                <a:lnTo>
+                  <a:pt x="245448" y="159913"/>
+                </a:lnTo>
+                <a:lnTo>
+                  <a:pt x="245448" y="85535"/>
+                </a:lnTo>
+                <a:lnTo>
+                  <a:pt x="159913" y="85535"/>
+                </a:lnTo>
+                <a:lnTo>
+                  <a:pt x="159913" y="0"/>
+                </a:lnTo>
+                <a:lnTo>
+                  <a:pt x="85535" y="0"/>
+                </a:lnTo>
+                <a:lnTo>
+                  <a:pt x="85535" y="85535"/>
+                </a:lnTo>
+                <a:lnTo>
+                  <a:pt x="0" y="85535"/>
+                </a:lnTo>
+                <a:lnTo>
+                  <a:pt x="0" y="159913"/>
+                </a:lnTo>
+                <a:lnTo>
+                  <a:pt x="85535" y="159913"/>
                 </a:lnTo>
                 <a:close/>
               </a:path>
@@ -18434,8 +18434,8 @@
         </p:nvSpPr>
         <p:spPr>
           <a:xfrm>
-            <a:off x="8041315" y="2971361"/>
-            <a:ext cx="63931" cy="118728"/>
+            <a:off x="8299787" y="2981908"/>
+            <a:ext cx="52065" cy="96692"/>
           </a:xfrm>
           <a:custGeom>
             <a:avLst/>
@@ -18444,15 +18444,15 @@
             <a:cxnLst/>
             <a:rect l="l" t="t" r="r" b="b"/>
             <a:pathLst>
-              <a:path w="63931" h="118728">
+              <a:path w="52065" h="96692">
                 <a:moveTo>
-                  <a:pt x="0" y="118728"/>
+                  <a:pt x="0" y="96692"/>
                 </a:moveTo>
                 <a:lnTo>
-                  <a:pt x="63931" y="118728"/>
-                </a:lnTo>
-                <a:lnTo>
-                  <a:pt x="63931" y="0"/>
+                  <a:pt x="52065" y="96692"/>
+                </a:lnTo>
+                <a:lnTo>
+                  <a:pt x="52065" y="0"/>
                 </a:lnTo>
                 <a:lnTo>
                   <a:pt x="0" y="0"/>
@@ -18480,8 +18480,8 @@
         </p:nvSpPr>
         <p:spPr>
           <a:xfrm>
-            <a:off x="7927153" y="2733904"/>
-            <a:ext cx="292254" cy="237456"/>
+            <a:off x="8206815" y="2788525"/>
+            <a:ext cx="238010" cy="193383"/>
           </a:xfrm>
           <a:custGeom>
             <a:avLst/>
@@ -18490,15 +18490,15 @@
             <a:cxnLst/>
             <a:rect l="l" t="t" r="r" b="b"/>
             <a:pathLst>
-              <a:path w="292254" h="237456">
+              <a:path w="238010" h="193383">
                 <a:moveTo>
-                  <a:pt x="0" y="237456"/>
+                  <a:pt x="0" y="193383"/>
                 </a:moveTo>
                 <a:lnTo>
-                  <a:pt x="292254" y="237456"/>
-                </a:lnTo>
-                <a:lnTo>
-                  <a:pt x="146127" y="0"/>
+                  <a:pt x="238010" y="193383"/>
+                </a:lnTo>
+                <a:lnTo>
+                  <a:pt x="119005" y="0"/>
                 </a:lnTo>
                 <a:close/>
               </a:path>
@@ -18523,8 +18523,8 @@
         </p:nvSpPr>
         <p:spPr>
           <a:xfrm>
-            <a:off x="9836953" y="2770436"/>
-            <a:ext cx="164393" cy="283121"/>
+            <a:off x="9927429" y="2818276"/>
+            <a:ext cx="133881" cy="230572"/>
           </a:xfrm>
           <a:custGeom>
             <a:avLst/>
@@ -18533,15 +18533,15 @@
             <a:cxnLst/>
             <a:rect l="l" t="t" r="r" b="b"/>
             <a:pathLst>
-              <a:path w="164393" h="283121">
+              <a:path w="133881" h="230572">
                 <a:moveTo>
-                  <a:pt x="0" y="246589"/>
+                  <a:pt x="0" y="200821"/>
                 </a:moveTo>
                 <a:lnTo>
-                  <a:pt x="164393" y="283121"/>
-                </a:lnTo>
-                <a:lnTo>
-                  <a:pt x="164393" y="36532"/>
+                  <a:pt x="133881" y="230572"/>
+                </a:lnTo>
+                <a:lnTo>
+                  <a:pt x="133881" y="29751"/>
                 </a:lnTo>
                 <a:lnTo>
                   <a:pt x="0" y="0"/>
@@ -18569,8 +18569,8 @@
         </p:nvSpPr>
         <p:spPr>
           <a:xfrm>
-            <a:off x="10001346" y="2770436"/>
-            <a:ext cx="164393" cy="283121"/>
+            <a:off x="10061309" y="2818276"/>
+            <a:ext cx="133881" cy="230572"/>
           </a:xfrm>
           <a:custGeom>
             <a:avLst/>
@@ -18579,18 +18579,18 @@
             <a:cxnLst/>
             <a:rect l="l" t="t" r="r" b="b"/>
             <a:pathLst>
-              <a:path w="164393" h="283121">
+              <a:path w="133881" h="230572">
                 <a:moveTo>
-                  <a:pt x="164393" y="246589"/>
+                  <a:pt x="133881" y="200821"/>
                 </a:moveTo>
                 <a:lnTo>
-                  <a:pt x="0" y="283121"/>
-                </a:lnTo>
-                <a:lnTo>
-                  <a:pt x="0" y="36532"/>
-                </a:lnTo>
-                <a:lnTo>
-                  <a:pt x="164393" y="0"/>
+                  <a:pt x="0" y="230572"/>
+                </a:lnTo>
+                <a:lnTo>
+                  <a:pt x="0" y="29751"/>
+                </a:lnTo>
+                <a:lnTo>
+                  <a:pt x="133881" y="0"/>
                 </a:lnTo>
                 <a:close/>
               </a:path>
@@ -18615,8 +18615,8 @@
         </p:nvSpPr>
         <p:spPr>
           <a:xfrm>
-            <a:off x="9923716" y="3217950"/>
-            <a:ext cx="155260" cy="118728"/>
+            <a:off x="9998088" y="3182729"/>
+            <a:ext cx="126443" cy="96692"/>
           </a:xfrm>
           <a:custGeom>
             <a:avLst/>
@@ -18625,27 +18625,27 @@
             <a:cxnLst/>
             <a:rect l="l" t="t" r="r" b="b"/>
             <a:pathLst>
-              <a:path w="155260" h="118728">
+              <a:path w="126443" h="96692">
                 <a:moveTo>
-                  <a:pt x="155260" y="118728"/>
+                  <a:pt x="126443" y="96692"/>
                 </a:moveTo>
                 <a:lnTo>
-                  <a:pt x="145112" y="59364"/>
-                </a:lnTo>
-                <a:lnTo>
-                  <a:pt x="116191" y="15729"/>
-                </a:lnTo>
-                <a:lnTo>
-                  <a:pt x="77630" y="0"/>
-                </a:lnTo>
-                <a:lnTo>
-                  <a:pt x="38561" y="15729"/>
-                </a:lnTo>
-                <a:lnTo>
-                  <a:pt x="10148" y="59364"/>
-                </a:lnTo>
-                <a:lnTo>
-                  <a:pt x="0" y="118728"/>
+                  <a:pt x="118179" y="48346"/>
+                </a:lnTo>
+                <a:lnTo>
+                  <a:pt x="94626" y="12810"/>
+                </a:lnTo>
+                <a:lnTo>
+                  <a:pt x="63221" y="0"/>
+                </a:lnTo>
+                <a:lnTo>
+                  <a:pt x="31404" y="12810"/>
+                </a:lnTo>
+                <a:lnTo>
+                  <a:pt x="8264" y="48346"/>
+                </a:lnTo>
+                <a:lnTo>
+                  <a:pt x="0" y="96692"/>
                 </a:lnTo>
               </a:path>
             </a:pathLst>
@@ -18667,8 +18667,8 @@
         </p:nvSpPr>
         <p:spPr>
           <a:xfrm>
-            <a:off x="9850652" y="3336678"/>
-            <a:ext cx="301387" cy="200925"/>
+            <a:off x="9938586" y="3279421"/>
+            <a:ext cx="245448" cy="163632"/>
           </a:xfrm>
           <a:custGeom>
             <a:avLst/>
@@ -18677,18 +18677,18 @@
             <a:cxnLst/>
             <a:rect l="l" t="t" r="r" b="b"/>
             <a:pathLst>
-              <a:path w="301387" h="200925">
+              <a:path w="245448" h="163632">
                 <a:moveTo>
                   <a:pt x="0" y="0"/>
                 </a:moveTo>
                 <a:lnTo>
-                  <a:pt x="301387" y="0"/>
-                </a:lnTo>
-                <a:lnTo>
-                  <a:pt x="264855" y="200925"/>
-                </a:lnTo>
-                <a:lnTo>
-                  <a:pt x="36532" y="200925"/>
+                  <a:pt x="245448" y="0"/>
+                </a:lnTo>
+                <a:lnTo>
+                  <a:pt x="215697" y="163632"/>
+                </a:lnTo>
+                <a:lnTo>
+                  <a:pt x="29751" y="163632"/>
                 </a:lnTo>
                 <a:close/>
               </a:path>
@@ -18713,8 +18713,8 @@
         </p:nvSpPr>
         <p:spPr>
           <a:xfrm>
-            <a:off x="7936286" y="3656331"/>
-            <a:ext cx="273988" cy="337919"/>
+            <a:off x="8214253" y="3539744"/>
+            <a:ext cx="223134" cy="275199"/>
           </a:xfrm>
           <a:custGeom>
             <a:avLst/>
@@ -18723,21 +18723,21 @@
             <a:cxnLst/>
             <a:rect l="l" t="t" r="r" b="b"/>
             <a:pathLst>
-              <a:path w="273988" h="337919">
+              <a:path w="223134" h="275199">
                 <a:moveTo>
-                  <a:pt x="0" y="337919"/>
+                  <a:pt x="0" y="275199"/>
                 </a:moveTo>
                 <a:lnTo>
-                  <a:pt x="273988" y="337919"/>
-                </a:lnTo>
-                <a:lnTo>
-                  <a:pt x="273988" y="155260"/>
-                </a:lnTo>
-                <a:lnTo>
-                  <a:pt x="136994" y="0"/>
-                </a:lnTo>
-                <a:lnTo>
-                  <a:pt x="0" y="155260"/>
+                  <a:pt x="223134" y="275199"/>
+                </a:lnTo>
+                <a:lnTo>
+                  <a:pt x="223134" y="126443"/>
+                </a:lnTo>
+                <a:lnTo>
+                  <a:pt x="111567" y="0"/>
+                </a:lnTo>
+                <a:lnTo>
+                  <a:pt x="0" y="126443"/>
                 </a:lnTo>
                 <a:close/>
               </a:path>
@@ -18762,8 +18762,8 @@
         </p:nvSpPr>
         <p:spPr>
           <a:xfrm>
-            <a:off x="4785421" y="2581689"/>
-            <a:ext cx="334875" cy="334875"/>
+            <a:off x="5366397" y="2548036"/>
+            <a:ext cx="381808" cy="381808"/>
           </a:xfrm>
           <a:prstGeom prst="ellipse">
             <a:avLst/>
@@ -18787,8 +18787,8 @@
         </p:nvSpPr>
         <p:spPr>
           <a:xfrm>
-            <a:off x="4881824" y="2678092"/>
-            <a:ext cx="142068" cy="142068"/>
+            <a:off x="5476311" y="2657950"/>
+            <a:ext cx="161979" cy="161979"/>
           </a:xfrm>
           <a:prstGeom prst="ellipse">
             <a:avLst/>
@@ -18812,8 +18812,8 @@
         </p:nvSpPr>
         <p:spPr>
           <a:xfrm>
-            <a:off x="7922587" y="3222517"/>
-            <a:ext cx="301387" cy="301387"/>
+            <a:off x="8203096" y="3186448"/>
+            <a:ext cx="245448" cy="245448"/>
           </a:xfrm>
           <a:prstGeom prst="ellipse">
             <a:avLst/>
@@ -18837,8 +18837,8 @@
         </p:nvSpPr>
         <p:spPr>
           <a:xfrm>
-            <a:off x="8009350" y="3309280"/>
-            <a:ext cx="127861" cy="127861"/>
+            <a:off x="8273755" y="3257107"/>
+            <a:ext cx="104129" cy="104129"/>
           </a:xfrm>
           <a:prstGeom prst="ellipse">
             <a:avLst/>
@@ -18862,8 +18862,8 @@
         </p:nvSpPr>
         <p:spPr>
           <a:xfrm flipV="1">
-            <a:off x="2811691" y="2566467"/>
-            <a:ext cx="0" cy="365318"/>
+            <a:off x="3116045" y="2530681"/>
+            <a:ext cx="0" cy="416518"/>
           </a:xfrm>
           <a:prstGeom prst="line">
             <a:avLst/>
@@ -18885,8 +18885,8 @@
         </p:nvSpPr>
         <p:spPr>
           <a:xfrm flipV="1">
-            <a:off x="640080" y="1988047"/>
-            <a:ext cx="0" cy="2029543"/>
+            <a:off x="640080" y="1871195"/>
+            <a:ext cx="0" cy="2313986"/>
           </a:xfrm>
           <a:prstGeom prst="line">
             <a:avLst/>
@@ -18908,8 +18908,8 @@
         </p:nvSpPr>
         <p:spPr>
           <a:xfrm flipV="1">
-            <a:off x="1147466" y="1988047"/>
-            <a:ext cx="0" cy="2029543"/>
+            <a:off x="1218577" y="1871195"/>
+            <a:ext cx="0" cy="2313986"/>
           </a:xfrm>
           <a:prstGeom prst="line">
             <a:avLst/>
@@ -18931,8 +18931,8 @@
         </p:nvSpPr>
         <p:spPr>
           <a:xfrm flipV="1">
-            <a:off x="1654851" y="1988047"/>
-            <a:ext cx="0" cy="2029543"/>
+            <a:off x="1797073" y="1871195"/>
+            <a:ext cx="0" cy="2313986"/>
           </a:xfrm>
           <a:prstGeom prst="line">
             <a:avLst/>
@@ -18954,8 +18954,8 @@
         </p:nvSpPr>
         <p:spPr>
           <a:xfrm flipV="1">
-            <a:off x="2162237" y="1988047"/>
-            <a:ext cx="0" cy="2029543"/>
+            <a:off x="2375570" y="1871195"/>
+            <a:ext cx="0" cy="2313986"/>
           </a:xfrm>
           <a:prstGeom prst="line">
             <a:avLst/>
@@ -18977,8 +18977,8 @@
         </p:nvSpPr>
         <p:spPr>
           <a:xfrm flipV="1">
-            <a:off x="2669623" y="1988047"/>
-            <a:ext cx="0" cy="2029543"/>
+            <a:off x="2954066" y="1871195"/>
+            <a:ext cx="0" cy="2313986"/>
           </a:xfrm>
           <a:prstGeom prst="line">
             <a:avLst/>
@@ -19000,8 +19000,8 @@
         </p:nvSpPr>
         <p:spPr>
           <a:xfrm flipV="1">
-            <a:off x="3177008" y="1988047"/>
-            <a:ext cx="0" cy="2029543"/>
+            <a:off x="3532563" y="1871195"/>
+            <a:ext cx="0" cy="2313986"/>
           </a:xfrm>
           <a:prstGeom prst="line">
             <a:avLst/>
@@ -19023,8 +19023,8 @@
         </p:nvSpPr>
         <p:spPr>
           <a:xfrm flipV="1">
-            <a:off x="3684394" y="1988047"/>
-            <a:ext cx="0" cy="2029543"/>
+            <a:off x="4111059" y="1871195"/>
+            <a:ext cx="0" cy="2313986"/>
           </a:xfrm>
           <a:prstGeom prst="line">
             <a:avLst/>
@@ -19046,8 +19046,8 @@
         </p:nvSpPr>
         <p:spPr>
           <a:xfrm flipV="1">
-            <a:off x="4191780" y="1988047"/>
-            <a:ext cx="0" cy="2029543"/>
+            <a:off x="4689556" y="1871195"/>
+            <a:ext cx="0" cy="2313986"/>
           </a:xfrm>
           <a:prstGeom prst="line">
             <a:avLst/>
@@ -19069,8 +19069,8 @@
         </p:nvSpPr>
         <p:spPr>
           <a:xfrm flipV="1">
-            <a:off x="4699165" y="1988047"/>
-            <a:ext cx="0" cy="2029543"/>
+            <a:off x="5268052" y="1871195"/>
+            <a:ext cx="0" cy="2313986"/>
           </a:xfrm>
           <a:prstGeom prst="line">
             <a:avLst/>
@@ -19092,8 +19092,8 @@
         </p:nvSpPr>
         <p:spPr>
           <a:xfrm flipV="1">
-            <a:off x="5206551" y="1988047"/>
-            <a:ext cx="0" cy="2029543"/>
+            <a:off x="5846549" y="1871195"/>
+            <a:ext cx="0" cy="2313986"/>
           </a:xfrm>
           <a:prstGeom prst="line">
             <a:avLst/>
@@ -19115,8 +19115,8 @@
         </p:nvSpPr>
         <p:spPr>
           <a:xfrm flipV="1">
-            <a:off x="5713937" y="1988047"/>
-            <a:ext cx="0" cy="2029543"/>
+            <a:off x="6425045" y="1871195"/>
+            <a:ext cx="0" cy="2313986"/>
           </a:xfrm>
           <a:prstGeom prst="line">
             <a:avLst/>
@@ -19138,8 +19138,8 @@
         </p:nvSpPr>
         <p:spPr>
           <a:xfrm>
-            <a:off x="640080" y="4017590"/>
-            <a:ext cx="5073857" cy="0"/>
+            <a:off x="640080" y="4185181"/>
+            <a:ext cx="5784965" cy="0"/>
           </a:xfrm>
           <a:prstGeom prst="line">
             <a:avLst/>
@@ -19161,8 +19161,8 @@
         </p:nvSpPr>
         <p:spPr>
           <a:xfrm>
-            <a:off x="640080" y="3510204"/>
-            <a:ext cx="5073857" cy="0"/>
+            <a:off x="640080" y="3606685"/>
+            <a:ext cx="5784965" cy="0"/>
           </a:xfrm>
           <a:prstGeom prst="line">
             <a:avLst/>
@@ -19184,8 +19184,8 @@
         </p:nvSpPr>
         <p:spPr>
           <a:xfrm>
-            <a:off x="640080" y="3002819"/>
-            <a:ext cx="5073857" cy="0"/>
+            <a:off x="640080" y="3028188"/>
+            <a:ext cx="5784965" cy="0"/>
           </a:xfrm>
           <a:prstGeom prst="line">
             <a:avLst/>
@@ -19207,8 +19207,8 @@
         </p:nvSpPr>
         <p:spPr>
           <a:xfrm>
-            <a:off x="640080" y="2495433"/>
-            <a:ext cx="5073857" cy="0"/>
+            <a:off x="640080" y="2449691"/>
+            <a:ext cx="5784965" cy="0"/>
           </a:xfrm>
           <a:prstGeom prst="line">
             <a:avLst/>
@@ -19230,8 +19230,8 @@
         </p:nvSpPr>
         <p:spPr>
           <a:xfrm>
-            <a:off x="640080" y="1988047"/>
-            <a:ext cx="5073857" cy="0"/>
+            <a:off x="640080" y="1871195"/>
+            <a:ext cx="5784965" cy="0"/>
           </a:xfrm>
           <a:prstGeom prst="line">
             <a:avLst/>
@@ -19253,8 +19253,8 @@
         </p:nvSpPr>
         <p:spPr>
           <a:xfrm flipV="1">
-            <a:off x="6677970" y="2571541"/>
-            <a:ext cx="0" cy="862556"/>
+            <a:off x="7210148" y="2676958"/>
+            <a:ext cx="0" cy="702460"/>
           </a:xfrm>
           <a:prstGeom prst="line">
             <a:avLst/>
@@ -19277,8 +19277,8 @@
         </p:nvSpPr>
         <p:spPr>
           <a:xfrm>
-            <a:off x="6246692" y="3002819"/>
-            <a:ext cx="862556" cy="0"/>
+            <a:off x="6858918" y="3028188"/>
+            <a:ext cx="702460" cy="0"/>
           </a:xfrm>
           <a:prstGeom prst="line">
             <a:avLst/>
@@ -19300,8 +19300,8 @@
         </p:nvSpPr>
         <p:spPr>
           <a:xfrm flipV="1">
-            <a:off x="7972818" y="2295523"/>
-            <a:ext cx="0" cy="328786"/>
+            <a:off x="8244004" y="2431510"/>
+            <a:ext cx="0" cy="267761"/>
           </a:xfrm>
           <a:prstGeom prst="line">
             <a:avLst/>
@@ -19323,7 +19323,7 @@
         </p:nvSpPr>
         <p:spPr>
           <a:xfrm>
-            <a:off x="6473754" y="2152717"/>
+            <a:off x="7005932" y="2300513"/>
             <a:ext cx="408432" cy="381000"/>
           </a:xfrm>
           <a:prstGeom prst="rect">
@@ -19362,7 +19362,7 @@
         </p:nvSpPr>
         <p:spPr>
           <a:xfrm>
-            <a:off x="6473754" y="3471920"/>
+            <a:off x="7005932" y="3374863"/>
             <a:ext cx="408432" cy="381000"/>
           </a:xfrm>
           <a:prstGeom prst="rect">
@@ -19401,7 +19401,7 @@
         </p:nvSpPr>
         <p:spPr>
           <a:xfrm>
-            <a:off x="7133355" y="2812319"/>
+            <a:off x="7543107" y="2837688"/>
             <a:ext cx="408432" cy="381000"/>
           </a:xfrm>
           <a:prstGeom prst="rect">
@@ -19440,7 +19440,7 @@
         </p:nvSpPr>
         <p:spPr>
           <a:xfrm>
-            <a:off x="5814152" y="2812319"/>
+            <a:off x="6468757" y="2837688"/>
             <a:ext cx="408432" cy="381000"/>
           </a:xfrm>
           <a:prstGeom prst="rect">
@@ -19479,7 +19479,7 @@
         </p:nvSpPr>
         <p:spPr>
           <a:xfrm>
-            <a:off x="9267238" y="1886340"/>
+            <a:off x="9439154" y="2062916"/>
             <a:ext cx="707136" cy="381000"/>
           </a:xfrm>
           <a:prstGeom prst="rect">
@@ -19518,7 +19518,7 @@
         </p:nvSpPr>
         <p:spPr>
           <a:xfrm>
-            <a:off x="8556898" y="2269416"/>
+            <a:off x="8798675" y="2374891"/>
             <a:ext cx="707136" cy="381000"/>
           </a:xfrm>
           <a:prstGeom prst="rect">
@@ -19557,7 +19557,7 @@
         </p:nvSpPr>
         <p:spPr>
           <a:xfrm>
-            <a:off x="10484964" y="2269416"/>
+            <a:off x="10534165" y="2374891"/>
             <a:ext cx="707136" cy="381000"/>
           </a:xfrm>
           <a:prstGeom prst="rect">
@@ -19596,7 +19596,7 @@
         </p:nvSpPr>
         <p:spPr>
           <a:xfrm>
-            <a:off x="8556898" y="2726063"/>
+            <a:off x="8798675" y="2746781"/>
             <a:ext cx="707136" cy="381000"/>
           </a:xfrm>
           <a:prstGeom prst="rect">
@@ -19635,7 +19635,7 @@
         </p:nvSpPr>
         <p:spPr>
           <a:xfrm>
-            <a:off x="10335612" y="2726063"/>
+            <a:off x="10384813" y="2746781"/>
             <a:ext cx="1005840" cy="381000"/>
           </a:xfrm>
           <a:prstGeom prst="rect">
@@ -19674,7 +19674,7 @@
         </p:nvSpPr>
         <p:spPr>
           <a:xfrm>
-            <a:off x="8258194" y="3182710"/>
+            <a:off x="8499971" y="3118672"/>
             <a:ext cx="1304544" cy="381000"/>
           </a:xfrm>
           <a:prstGeom prst="rect">
@@ -19713,7 +19713,7 @@
         </p:nvSpPr>
         <p:spPr>
           <a:xfrm>
-            <a:off x="10484964" y="3182710"/>
+            <a:off x="10534165" y="3118672"/>
             <a:ext cx="707136" cy="381000"/>
           </a:xfrm>
           <a:prstGeom prst="rect">
@@ -19752,7 +19752,7 @@
         </p:nvSpPr>
         <p:spPr>
           <a:xfrm>
-            <a:off x="8706250" y="3639357"/>
+            <a:off x="8948027" y="3490563"/>
             <a:ext cx="408432" cy="381000"/>
           </a:xfrm>
           <a:prstGeom prst="rect">
@@ -20014,8 +20014,8 @@
         </p:nvSpPr>
         <p:spPr>
           <a:xfrm>
-            <a:off x="640080" y="2770409"/>
-            <a:ext cx="507386" cy="507386"/>
+            <a:off x="640080" y="2795778"/>
+            <a:ext cx="578497" cy="578497"/>
           </a:xfrm>
           <a:custGeom>
             <a:avLst/>
@@ -20024,15 +20024,15 @@
             <a:cxnLst/>
             <a:rect l="l" t="t" r="r" b="b"/>
             <a:pathLst>
-              <a:path w="507386" h="507386">
+              <a:path w="578497" h="578497">
                 <a:moveTo>
-                  <a:pt x="0" y="507386"/>
+                  <a:pt x="0" y="578497"/>
                 </a:moveTo>
                 <a:lnTo>
-                  <a:pt x="507386" y="507386"/>
-                </a:lnTo>
-                <a:lnTo>
-                  <a:pt x="507386" y="0"/>
+                  <a:pt x="578497" y="578497"/>
+                </a:lnTo>
+                <a:lnTo>
+                  <a:pt x="578497" y="0"/>
                 </a:lnTo>
                 <a:lnTo>
                   <a:pt x="0" y="0"/>
@@ -20055,8 +20055,8 @@
         </p:nvSpPr>
         <p:spPr>
           <a:xfrm>
-            <a:off x="1147466" y="2770409"/>
-            <a:ext cx="507386" cy="507386"/>
+            <a:off x="1218577" y="2795778"/>
+            <a:ext cx="578497" cy="578497"/>
           </a:xfrm>
           <a:custGeom>
             <a:avLst/>
@@ -20065,15 +20065,15 @@
             <a:cxnLst/>
             <a:rect l="l" t="t" r="r" b="b"/>
             <a:pathLst>
-              <a:path w="507386" h="507386">
+              <a:path w="578497" h="578497">
                 <a:moveTo>
-                  <a:pt x="0" y="507386"/>
+                  <a:pt x="0" y="578497"/>
                 </a:moveTo>
                 <a:lnTo>
-                  <a:pt x="507386" y="507386"/>
-                </a:lnTo>
-                <a:lnTo>
-                  <a:pt x="507386" y="0"/>
+                  <a:pt x="578497" y="578497"/>
+                </a:lnTo>
+                <a:lnTo>
+                  <a:pt x="578497" y="0"/>
                 </a:lnTo>
                 <a:lnTo>
                   <a:pt x="0" y="0"/>
@@ -20096,8 +20096,8 @@
         </p:nvSpPr>
         <p:spPr>
           <a:xfrm>
-            <a:off x="1654851" y="2770409"/>
-            <a:ext cx="507386" cy="507386"/>
+            <a:off x="1797073" y="2795778"/>
+            <a:ext cx="578497" cy="578497"/>
           </a:xfrm>
           <a:custGeom>
             <a:avLst/>
@@ -20106,15 +20106,15 @@
             <a:cxnLst/>
             <a:rect l="l" t="t" r="r" b="b"/>
             <a:pathLst>
-              <a:path w="507386" h="507386">
+              <a:path w="578497" h="578497">
                 <a:moveTo>
-                  <a:pt x="0" y="507386"/>
+                  <a:pt x="0" y="578497"/>
                 </a:moveTo>
                 <a:lnTo>
-                  <a:pt x="507386" y="507386"/>
-                </a:lnTo>
-                <a:lnTo>
-                  <a:pt x="507386" y="0"/>
+                  <a:pt x="578497" y="578497"/>
+                </a:lnTo>
+                <a:lnTo>
+                  <a:pt x="578497" y="0"/>
                 </a:lnTo>
                 <a:lnTo>
                   <a:pt x="0" y="0"/>
@@ -20137,8 +20137,8 @@
         </p:nvSpPr>
         <p:spPr>
           <a:xfrm>
-            <a:off x="2162237" y="2770409"/>
-            <a:ext cx="507386" cy="507386"/>
+            <a:off x="2375570" y="2795778"/>
+            <a:ext cx="578497" cy="578497"/>
           </a:xfrm>
           <a:custGeom>
             <a:avLst/>
@@ -20147,15 +20147,15 @@
             <a:cxnLst/>
             <a:rect l="l" t="t" r="r" b="b"/>
             <a:pathLst>
-              <a:path w="507386" h="507386">
+              <a:path w="578497" h="578497">
                 <a:moveTo>
-                  <a:pt x="0" y="507386"/>
+                  <a:pt x="0" y="578497"/>
                 </a:moveTo>
                 <a:lnTo>
-                  <a:pt x="507386" y="507386"/>
-                </a:lnTo>
-                <a:lnTo>
-                  <a:pt x="507386" y="0"/>
+                  <a:pt x="578497" y="578497"/>
+                </a:lnTo>
+                <a:lnTo>
+                  <a:pt x="578497" y="0"/>
                 </a:lnTo>
                 <a:lnTo>
                   <a:pt x="0" y="0"/>
@@ -20178,8 +20178,8 @@
         </p:nvSpPr>
         <p:spPr>
           <a:xfrm>
-            <a:off x="2669623" y="2770409"/>
-            <a:ext cx="507386" cy="507386"/>
+            <a:off x="2954066" y="2795778"/>
+            <a:ext cx="578497" cy="578497"/>
           </a:xfrm>
           <a:custGeom>
             <a:avLst/>
@@ -20188,15 +20188,15 @@
             <a:cxnLst/>
             <a:rect l="l" t="t" r="r" b="b"/>
             <a:pathLst>
-              <a:path w="507386" h="507386">
+              <a:path w="578497" h="578497">
                 <a:moveTo>
-                  <a:pt x="0" y="507386"/>
+                  <a:pt x="0" y="578497"/>
                 </a:moveTo>
                 <a:lnTo>
-                  <a:pt x="507386" y="507386"/>
-                </a:lnTo>
-                <a:lnTo>
-                  <a:pt x="507386" y="0"/>
+                  <a:pt x="578497" y="578497"/>
+                </a:lnTo>
+                <a:lnTo>
+                  <a:pt x="578497" y="0"/>
                 </a:lnTo>
                 <a:lnTo>
                   <a:pt x="0" y="0"/>
@@ -20219,8 +20219,8 @@
         </p:nvSpPr>
         <p:spPr>
           <a:xfrm>
-            <a:off x="3177008" y="2770409"/>
-            <a:ext cx="507386" cy="507386"/>
+            <a:off x="3532563" y="2795778"/>
+            <a:ext cx="578497" cy="578497"/>
           </a:xfrm>
           <a:custGeom>
             <a:avLst/>
@@ -20229,15 +20229,15 @@
             <a:cxnLst/>
             <a:rect l="l" t="t" r="r" b="b"/>
             <a:pathLst>
-              <a:path w="507386" h="507386">
+              <a:path w="578497" h="578497">
                 <a:moveTo>
-                  <a:pt x="0" y="507386"/>
+                  <a:pt x="0" y="578497"/>
                 </a:moveTo>
                 <a:lnTo>
-                  <a:pt x="507386" y="507386"/>
-                </a:lnTo>
-                <a:lnTo>
-                  <a:pt x="507386" y="0"/>
+                  <a:pt x="578497" y="578497"/>
+                </a:lnTo>
+                <a:lnTo>
+                  <a:pt x="578497" y="0"/>
                 </a:lnTo>
                 <a:lnTo>
                   <a:pt x="0" y="0"/>
@@ -20260,8 +20260,8 @@
         </p:nvSpPr>
         <p:spPr>
           <a:xfrm>
-            <a:off x="3684394" y="2770409"/>
-            <a:ext cx="507386" cy="507386"/>
+            <a:off x="4111059" y="2795778"/>
+            <a:ext cx="578497" cy="578497"/>
           </a:xfrm>
           <a:custGeom>
             <a:avLst/>
@@ -20270,15 +20270,15 @@
             <a:cxnLst/>
             <a:rect l="l" t="t" r="r" b="b"/>
             <a:pathLst>
-              <a:path w="507386" h="507386">
+              <a:path w="578497" h="578497">
                 <a:moveTo>
-                  <a:pt x="0" y="507386"/>
+                  <a:pt x="0" y="578497"/>
                 </a:moveTo>
                 <a:lnTo>
-                  <a:pt x="507386" y="507386"/>
-                </a:lnTo>
-                <a:lnTo>
-                  <a:pt x="507386" y="0"/>
+                  <a:pt x="578497" y="578497"/>
+                </a:lnTo>
+                <a:lnTo>
+                  <a:pt x="578497" y="0"/>
                 </a:lnTo>
                 <a:lnTo>
                   <a:pt x="0" y="0"/>
@@ -20301,8 +20301,8 @@
         </p:nvSpPr>
         <p:spPr>
           <a:xfrm>
-            <a:off x="4191780" y="2770409"/>
-            <a:ext cx="507386" cy="507386"/>
+            <a:off x="4689556" y="2795778"/>
+            <a:ext cx="578497" cy="578497"/>
           </a:xfrm>
           <a:custGeom>
             <a:avLst/>
@@ -20311,15 +20311,15 @@
             <a:cxnLst/>
             <a:rect l="l" t="t" r="r" b="b"/>
             <a:pathLst>
-              <a:path w="507386" h="507386">
+              <a:path w="578497" h="578497">
                 <a:moveTo>
-                  <a:pt x="0" y="507386"/>
+                  <a:pt x="0" y="578497"/>
                 </a:moveTo>
                 <a:lnTo>
-                  <a:pt x="507386" y="507386"/>
-                </a:lnTo>
-                <a:lnTo>
-                  <a:pt x="507386" y="0"/>
+                  <a:pt x="578497" y="578497"/>
+                </a:lnTo>
+                <a:lnTo>
+                  <a:pt x="578497" y="0"/>
                 </a:lnTo>
                 <a:lnTo>
                   <a:pt x="0" y="0"/>
@@ -20342,8 +20342,8 @@
         </p:nvSpPr>
         <p:spPr>
           <a:xfrm>
-            <a:off x="4699165" y="2770409"/>
-            <a:ext cx="507386" cy="507386"/>
+            <a:off x="5268052" y="2795778"/>
+            <a:ext cx="578497" cy="578497"/>
           </a:xfrm>
           <a:custGeom>
             <a:avLst/>
@@ -20352,15 +20352,15 @@
             <a:cxnLst/>
             <a:rect l="l" t="t" r="r" b="b"/>
             <a:pathLst>
-              <a:path w="507386" h="507386">
+              <a:path w="578497" h="578497">
                 <a:moveTo>
-                  <a:pt x="0" y="507386"/>
+                  <a:pt x="0" y="578497"/>
                 </a:moveTo>
                 <a:lnTo>
-                  <a:pt x="507386" y="507386"/>
-                </a:lnTo>
-                <a:lnTo>
-                  <a:pt x="507386" y="0"/>
+                  <a:pt x="578497" y="578497"/>
+                </a:lnTo>
+                <a:lnTo>
+                  <a:pt x="578497" y="0"/>
                 </a:lnTo>
                 <a:lnTo>
                   <a:pt x="0" y="0"/>
@@ -20383,8 +20383,8 @@
         </p:nvSpPr>
         <p:spPr>
           <a:xfrm>
-            <a:off x="5206551" y="2770409"/>
-            <a:ext cx="507386" cy="507386"/>
+            <a:off x="5846549" y="2795778"/>
+            <a:ext cx="578497" cy="578497"/>
           </a:xfrm>
           <a:custGeom>
             <a:avLst/>
@@ -20393,15 +20393,15 @@
             <a:cxnLst/>
             <a:rect l="l" t="t" r="r" b="b"/>
             <a:pathLst>
-              <a:path w="507386" h="507386">
+              <a:path w="578497" h="578497">
                 <a:moveTo>
-                  <a:pt x="0" y="507386"/>
+                  <a:pt x="0" y="578497"/>
                 </a:moveTo>
                 <a:lnTo>
-                  <a:pt x="507386" y="507386"/>
-                </a:lnTo>
-                <a:lnTo>
-                  <a:pt x="507386" y="0"/>
+                  <a:pt x="578497" y="578497"/>
+                </a:lnTo>
+                <a:lnTo>
+                  <a:pt x="578497" y="0"/>
                 </a:lnTo>
                 <a:lnTo>
                   <a:pt x="0" y="0"/>
@@ -20424,8 +20424,8 @@
         </p:nvSpPr>
         <p:spPr>
           <a:xfrm>
-            <a:off x="1218500" y="2354352"/>
-            <a:ext cx="182659" cy="314579"/>
+            <a:off x="1299566" y="2321411"/>
+            <a:ext cx="208259" cy="358668"/>
           </a:xfrm>
           <a:custGeom>
             <a:avLst/>
@@ -20434,15 +20434,15 @@
             <a:cxnLst/>
             <a:rect l="l" t="t" r="r" b="b"/>
             <a:pathLst>
-              <a:path w="182659" h="314579">
+              <a:path w="208259" h="358668">
                 <a:moveTo>
-                  <a:pt x="0" y="273988"/>
+                  <a:pt x="0" y="312388"/>
                 </a:moveTo>
                 <a:lnTo>
-                  <a:pt x="182659" y="314579"/>
-                </a:lnTo>
-                <a:lnTo>
-                  <a:pt x="182659" y="40591"/>
+                  <a:pt x="208259" y="358668"/>
+                </a:lnTo>
+                <a:lnTo>
+                  <a:pt x="208259" y="46280"/>
                 </a:lnTo>
                 <a:lnTo>
                   <a:pt x="0" y="0"/>
@@ -20470,8 +20470,8 @@
         </p:nvSpPr>
         <p:spPr>
           <a:xfrm>
-            <a:off x="1401159" y="2354352"/>
-            <a:ext cx="182659" cy="314579"/>
+            <a:off x="1507825" y="2321411"/>
+            <a:ext cx="208259" cy="358668"/>
           </a:xfrm>
           <a:custGeom>
             <a:avLst/>
@@ -20480,18 +20480,18 @@
             <a:cxnLst/>
             <a:rect l="l" t="t" r="r" b="b"/>
             <a:pathLst>
-              <a:path w="182659" h="314579">
+              <a:path w="208259" h="358668">
                 <a:moveTo>
-                  <a:pt x="182659" y="273988"/>
+                  <a:pt x="208259" y="312388"/>
                 </a:moveTo>
                 <a:lnTo>
-                  <a:pt x="0" y="314579"/>
-                </a:lnTo>
-                <a:lnTo>
-                  <a:pt x="0" y="40591"/>
-                </a:lnTo>
-                <a:lnTo>
-                  <a:pt x="182659" y="0"/>
+                  <a:pt x="0" y="358668"/>
+                </a:lnTo>
+                <a:lnTo>
+                  <a:pt x="0" y="46280"/>
+                </a:lnTo>
+                <a:lnTo>
+                  <a:pt x="208259" y="0"/>
                 </a:lnTo>
                 <a:close/>
               </a:path>
@@ -20516,8 +20516,8 @@
         </p:nvSpPr>
         <p:spPr>
           <a:xfrm>
-            <a:off x="2811691" y="2334057"/>
-            <a:ext cx="273988" cy="162363"/>
+            <a:off x="3116045" y="2298271"/>
+            <a:ext cx="312388" cy="185119"/>
           </a:xfrm>
           <a:custGeom>
             <a:avLst/>
@@ -20526,15 +20526,15 @@
             <a:cxnLst/>
             <a:rect l="l" t="t" r="r" b="b"/>
             <a:pathLst>
-              <a:path w="273988" h="162363">
+              <a:path w="312388" h="185119">
                 <a:moveTo>
                   <a:pt x="0" y="0"/>
                 </a:moveTo>
                 <a:lnTo>
-                  <a:pt x="273988" y="81182"/>
-                </a:lnTo>
-                <a:lnTo>
-                  <a:pt x="0" y="162363"/>
+                  <a:pt x="312388" y="92559"/>
+                </a:lnTo>
+                <a:lnTo>
+                  <a:pt x="0" y="185119"/>
                 </a:lnTo>
                 <a:close/>
               </a:path>
@@ -20559,8 +20559,8 @@
         </p:nvSpPr>
         <p:spPr>
           <a:xfrm>
-            <a:off x="2887799" y="2070216"/>
-            <a:ext cx="71034" cy="131920"/>
+            <a:off x="3202820" y="1997453"/>
+            <a:ext cx="80990" cy="150409"/>
           </a:xfrm>
           <a:custGeom>
             <a:avLst/>
@@ -20569,15 +20569,15 @@
             <a:cxnLst/>
             <a:rect l="l" t="t" r="r" b="b"/>
             <a:pathLst>
-              <a:path w="71034" h="131920">
+              <a:path w="80990" h="150409">
                 <a:moveTo>
-                  <a:pt x="0" y="131920"/>
+                  <a:pt x="0" y="150409"/>
                 </a:moveTo>
                 <a:lnTo>
-                  <a:pt x="71034" y="131920"/>
-                </a:lnTo>
-                <a:lnTo>
-                  <a:pt x="71034" y="0"/>
+                  <a:pt x="80990" y="150409"/>
+                </a:lnTo>
+                <a:lnTo>
+                  <a:pt x="80990" y="0"/>
                 </a:lnTo>
                 <a:lnTo>
                   <a:pt x="0" y="0"/>
@@ -20605,8 +20605,8 @@
         </p:nvSpPr>
         <p:spPr>
           <a:xfrm>
-            <a:off x="2760952" y="1806376"/>
-            <a:ext cx="324727" cy="263841"/>
+            <a:off x="3058196" y="1696635"/>
+            <a:ext cx="370238" cy="300818"/>
           </a:xfrm>
           <a:custGeom>
             <a:avLst/>
@@ -20615,15 +20615,15 @@
             <a:cxnLst/>
             <a:rect l="l" t="t" r="r" b="b"/>
             <a:pathLst>
-              <a:path w="324727" h="263841">
+              <a:path w="370238" h="300818">
                 <a:moveTo>
-                  <a:pt x="0" y="263841"/>
+                  <a:pt x="0" y="300818"/>
                 </a:moveTo>
                 <a:lnTo>
-                  <a:pt x="324727" y="263841"/>
-                </a:lnTo>
-                <a:lnTo>
-                  <a:pt x="162363" y="0"/>
+                  <a:pt x="370238" y="300818"/>
+                </a:lnTo>
+                <a:lnTo>
+                  <a:pt x="185119" y="0"/>
                 </a:lnTo>
                 <a:close/>
               </a:path>
@@ -20648,8 +20648,8 @@
         </p:nvSpPr>
         <p:spPr>
           <a:xfrm>
-            <a:off x="2329674" y="3358976"/>
-            <a:ext cx="172511" cy="131920"/>
+            <a:off x="2566473" y="3466834"/>
+            <a:ext cx="196689" cy="150409"/>
           </a:xfrm>
           <a:custGeom>
             <a:avLst/>
@@ -20658,27 +20658,27 @@
             <a:cxnLst/>
             <a:rect l="l" t="t" r="r" b="b"/>
             <a:pathLst>
-              <a:path w="172511" h="131920">
+              <a:path w="196689" h="150409">
                 <a:moveTo>
-                  <a:pt x="172511" y="131920"/>
+                  <a:pt x="196689" y="150409"/>
                 </a:moveTo>
                 <a:lnTo>
-                  <a:pt x="160841" y="65960"/>
-                </a:lnTo>
-                <a:lnTo>
-                  <a:pt x="129383" y="17758"/>
-                </a:lnTo>
-                <a:lnTo>
-                  <a:pt x="86256" y="0"/>
-                </a:lnTo>
-                <a:lnTo>
-                  <a:pt x="43128" y="17758"/>
-                </a:lnTo>
-                <a:lnTo>
-                  <a:pt x="11670" y="65960"/>
-                </a:lnTo>
-                <a:lnTo>
-                  <a:pt x="0" y="131920"/>
+                  <a:pt x="183466" y="75205"/>
+                </a:lnTo>
+                <a:lnTo>
+                  <a:pt x="147517" y="20247"/>
+                </a:lnTo>
+                <a:lnTo>
+                  <a:pt x="98344" y="0"/>
+                </a:lnTo>
+                <a:lnTo>
+                  <a:pt x="49172" y="20247"/>
+                </a:lnTo>
+                <a:lnTo>
+                  <a:pt x="13223" y="75205"/>
+                </a:lnTo>
+                <a:lnTo>
+                  <a:pt x="0" y="150409"/>
                 </a:lnTo>
               </a:path>
             </a:pathLst>
@@ -20700,8 +20700,8 @@
         </p:nvSpPr>
         <p:spPr>
           <a:xfrm>
-            <a:off x="2248493" y="3490896"/>
-            <a:ext cx="334875" cy="223250"/>
+            <a:off x="2473914" y="3617243"/>
+            <a:ext cx="381808" cy="254538"/>
           </a:xfrm>
           <a:custGeom>
             <a:avLst/>
@@ -20710,18 +20710,18 @@
             <a:cxnLst/>
             <a:rect l="l" t="t" r="r" b="b"/>
             <a:pathLst>
-              <a:path w="334875" h="223250">
+              <a:path w="381808" h="254538">
                 <a:moveTo>
                   <a:pt x="0" y="0"/>
                 </a:moveTo>
                 <a:lnTo>
-                  <a:pt x="334875" y="0"/>
-                </a:lnTo>
-                <a:lnTo>
-                  <a:pt x="294284" y="223250"/>
-                </a:lnTo>
-                <a:lnTo>
-                  <a:pt x="40591" y="223250"/>
+                  <a:pt x="381808" y="0"/>
+                </a:lnTo>
+                <a:lnTo>
+                  <a:pt x="335528" y="254538"/>
+                </a:lnTo>
+                <a:lnTo>
+                  <a:pt x="46280" y="254538"/>
                 </a:lnTo>
                 <a:close/>
               </a:path>
@@ -20746,8 +20746,8 @@
         </p:nvSpPr>
         <p:spPr>
           <a:xfrm>
-            <a:off x="2771100" y="3338681"/>
-            <a:ext cx="304431" cy="375465"/>
+            <a:off x="3069765" y="3443694"/>
+            <a:ext cx="347098" cy="428087"/>
           </a:xfrm>
           <a:custGeom>
             <a:avLst/>
@@ -20756,21 +20756,21 @@
             <a:cxnLst/>
             <a:rect l="l" t="t" r="r" b="b"/>
             <a:pathLst>
-              <a:path w="304431" h="375465">
+              <a:path w="347098" h="428087">
                 <a:moveTo>
-                  <a:pt x="0" y="375465"/>
+                  <a:pt x="0" y="428087"/>
                 </a:moveTo>
                 <a:lnTo>
-                  <a:pt x="304431" y="375465"/>
-                </a:lnTo>
-                <a:lnTo>
-                  <a:pt x="304431" y="172511"/>
-                </a:lnTo>
-                <a:lnTo>
-                  <a:pt x="152216" y="0"/>
-                </a:lnTo>
-                <a:lnTo>
-                  <a:pt x="0" y="172511"/>
+                  <a:pt x="347098" y="428087"/>
+                </a:lnTo>
+                <a:lnTo>
+                  <a:pt x="347098" y="196689"/>
+                </a:lnTo>
+                <a:lnTo>
+                  <a:pt x="173549" y="0"/>
+                </a:lnTo>
+                <a:lnTo>
+                  <a:pt x="0" y="196689"/>
                 </a:lnTo>
                 <a:close/>
               </a:path>
@@ -20795,8 +20795,8 @@
         </p:nvSpPr>
         <p:spPr>
           <a:xfrm>
-            <a:off x="4785421" y="3364050"/>
-            <a:ext cx="334875" cy="334875"/>
+            <a:off x="5366397" y="3472619"/>
+            <a:ext cx="381808" cy="381808"/>
           </a:xfrm>
           <a:custGeom>
             <a:avLst/>
@@ -20805,42 +20805,42 @@
             <a:cxnLst/>
             <a:rect l="l" t="t" r="r" b="b"/>
             <a:pathLst>
-              <a:path w="334875" h="334875">
+              <a:path w="381808" h="381808">
                 <a:moveTo>
-                  <a:pt x="116699" y="334875"/>
+                  <a:pt x="133054" y="381808"/>
                 </a:moveTo>
                 <a:lnTo>
-                  <a:pt x="218176" y="334875"/>
-                </a:lnTo>
-                <a:lnTo>
-                  <a:pt x="218176" y="218176"/>
-                </a:lnTo>
-                <a:lnTo>
-                  <a:pt x="334875" y="218176"/>
-                </a:lnTo>
-                <a:lnTo>
-                  <a:pt x="334875" y="116699"/>
-                </a:lnTo>
-                <a:lnTo>
-                  <a:pt x="218176" y="116699"/>
-                </a:lnTo>
-                <a:lnTo>
-                  <a:pt x="218176" y="0"/>
-                </a:lnTo>
-                <a:lnTo>
-                  <a:pt x="116699" y="0"/>
-                </a:lnTo>
-                <a:lnTo>
-                  <a:pt x="116699" y="116699"/>
-                </a:lnTo>
-                <a:lnTo>
-                  <a:pt x="0" y="116699"/>
-                </a:lnTo>
-                <a:lnTo>
-                  <a:pt x="0" y="218176"/>
-                </a:lnTo>
-                <a:lnTo>
-                  <a:pt x="116699" y="218176"/>
+                  <a:pt x="248754" y="381808"/>
+                </a:lnTo>
+                <a:lnTo>
+                  <a:pt x="248754" y="248754"/>
+                </a:lnTo>
+                <a:lnTo>
+                  <a:pt x="381808" y="248754"/>
+                </a:lnTo>
+                <a:lnTo>
+                  <a:pt x="381808" y="133054"/>
+                </a:lnTo>
+                <a:lnTo>
+                  <a:pt x="248754" y="133054"/>
+                </a:lnTo>
+                <a:lnTo>
+                  <a:pt x="248754" y="0"/>
+                </a:lnTo>
+                <a:lnTo>
+                  <a:pt x="133054" y="0"/>
+                </a:lnTo>
+                <a:lnTo>
+                  <a:pt x="133054" y="133054"/>
+                </a:lnTo>
+                <a:lnTo>
+                  <a:pt x="0" y="133054"/>
+                </a:lnTo>
+                <a:lnTo>
+                  <a:pt x="0" y="248754"/>
+                </a:lnTo>
+                <a:lnTo>
+                  <a:pt x="133054" y="248754"/>
                 </a:lnTo>
                 <a:close/>
               </a:path>
@@ -20865,8 +20865,8 @@
         </p:nvSpPr>
         <p:spPr>
           <a:xfrm>
-            <a:off x="640080" y="1755637"/>
-            <a:ext cx="5073857" cy="2029543"/>
+            <a:off x="640080" y="1638785"/>
+            <a:ext cx="5784965" cy="2313986"/>
           </a:xfrm>
           <a:custGeom>
             <a:avLst/>
@@ -20875,15 +20875,15 @@
             <a:cxnLst/>
             <a:rect l="l" t="t" r="r" b="b"/>
             <a:pathLst>
-              <a:path w="5073857" h="2029543">
+              <a:path w="5784965" h="2313986">
                 <a:moveTo>
-                  <a:pt x="0" y="2029543"/>
+                  <a:pt x="0" y="2313986"/>
                 </a:moveTo>
                 <a:lnTo>
-                  <a:pt x="5073857" y="2029543"/>
-                </a:lnTo>
-                <a:lnTo>
-                  <a:pt x="5073857" y="0"/>
+                  <a:pt x="5784965" y="2313986"/>
+                </a:lnTo>
+                <a:lnTo>
+                  <a:pt x="5784965" y="0"/>
                 </a:lnTo>
                 <a:lnTo>
                   <a:pt x="0" y="0"/>
@@ -20909,8 +20909,8 @@
         </p:nvSpPr>
         <p:spPr>
           <a:xfrm>
-            <a:off x="7692741" y="1654160"/>
-            <a:ext cx="3856131" cy="2283236"/>
+            <a:off x="8036572" y="1866051"/>
+            <a:ext cx="3512300" cy="1859453"/>
           </a:xfrm>
           <a:custGeom>
             <a:avLst/>
@@ -20919,15 +20919,15 @@
             <a:cxnLst/>
             <a:rect l="l" t="t" r="r" b="b"/>
             <a:pathLst>
-              <a:path w="3856131" h="2283236">
+              <a:path w="3512300" h="1859453">
                 <a:moveTo>
-                  <a:pt x="0" y="2283236"/>
+                  <a:pt x="0" y="1859453"/>
                 </a:moveTo>
                 <a:lnTo>
-                  <a:pt x="3856131" y="2283236"/>
-                </a:lnTo>
-                <a:lnTo>
-                  <a:pt x="3856131" y="0"/>
+                  <a:pt x="3512300" y="1859453"/>
+                </a:lnTo>
+                <a:lnTo>
+                  <a:pt x="3512300" y="0"/>
                 </a:lnTo>
                 <a:lnTo>
                   <a:pt x="0" y="0"/>
@@ -20955,8 +20955,8 @@
         </p:nvSpPr>
         <p:spPr>
           <a:xfrm>
-            <a:off x="7692741" y="1654160"/>
-            <a:ext cx="3856131" cy="380539"/>
+            <a:off x="8036572" y="1866051"/>
+            <a:ext cx="3512300" cy="309909"/>
           </a:xfrm>
           <a:custGeom>
             <a:avLst/>
@@ -20965,15 +20965,15 @@
             <a:cxnLst/>
             <a:rect l="l" t="t" r="r" b="b"/>
             <a:pathLst>
-              <a:path w="3856131" h="380539">
+              <a:path w="3512300" h="309909">
                 <a:moveTo>
-                  <a:pt x="0" y="380539"/>
+                  <a:pt x="0" y="309909"/>
                 </a:moveTo>
                 <a:lnTo>
-                  <a:pt x="3856131" y="380539"/>
-                </a:lnTo>
-                <a:lnTo>
-                  <a:pt x="3856131" y="0"/>
+                  <a:pt x="3512300" y="309909"/>
+                </a:lnTo>
+                <a:lnTo>
+                  <a:pt x="3512300" y="0"/>
                 </a:lnTo>
                 <a:lnTo>
                   <a:pt x="0" y="0"/>
@@ -21001,8 +21001,8 @@
         </p:nvSpPr>
         <p:spPr>
           <a:xfrm>
-            <a:off x="7972818" y="2063113"/>
-            <a:ext cx="246589" cy="146127"/>
+            <a:off x="8244004" y="2199100"/>
+            <a:ext cx="200821" cy="119005"/>
           </a:xfrm>
           <a:custGeom>
             <a:avLst/>
@@ -21011,15 +21011,15 @@
             <a:cxnLst/>
             <a:rect l="l" t="t" r="r" b="b"/>
             <a:pathLst>
-              <a:path w="246589" h="146127">
+              <a:path w="200821" h="119005">
                 <a:moveTo>
                   <a:pt x="0" y="0"/>
                 </a:moveTo>
                 <a:lnTo>
-                  <a:pt x="246589" y="73064"/>
-                </a:lnTo>
-                <a:lnTo>
-                  <a:pt x="0" y="146127"/>
+                  <a:pt x="200821" y="59503"/>
+                </a:lnTo>
+                <a:lnTo>
+                  <a:pt x="0" y="119005"/>
                 </a:lnTo>
                 <a:close/>
               </a:path>
@@ -21044,8 +21044,8 @@
         </p:nvSpPr>
         <p:spPr>
           <a:xfrm>
-            <a:off x="9850652" y="2076812"/>
-            <a:ext cx="301387" cy="301387"/>
+            <a:off x="9938586" y="2210257"/>
+            <a:ext cx="245448" cy="245448"/>
           </a:xfrm>
           <a:custGeom>
             <a:avLst/>
@@ -21054,42 +21054,42 @@
             <a:cxnLst/>
             <a:rect l="l" t="t" r="r" b="b"/>
             <a:pathLst>
-              <a:path w="301387" h="301387">
+              <a:path w="245448" h="245448">
                 <a:moveTo>
-                  <a:pt x="105029" y="301387"/>
+                  <a:pt x="85535" y="245448"/>
                 </a:moveTo>
                 <a:lnTo>
-                  <a:pt x="196358" y="301387"/>
-                </a:lnTo>
-                <a:lnTo>
-                  <a:pt x="196358" y="196358"/>
-                </a:lnTo>
-                <a:lnTo>
-                  <a:pt x="301387" y="196358"/>
-                </a:lnTo>
-                <a:lnTo>
-                  <a:pt x="301387" y="105029"/>
-                </a:lnTo>
-                <a:lnTo>
-                  <a:pt x="196358" y="105029"/>
-                </a:lnTo>
-                <a:lnTo>
-                  <a:pt x="196358" y="0"/>
-                </a:lnTo>
-                <a:lnTo>
-                  <a:pt x="105029" y="0"/>
-                </a:lnTo>
-                <a:lnTo>
-                  <a:pt x="105029" y="105029"/>
-                </a:lnTo>
-                <a:lnTo>
-                  <a:pt x="0" y="105029"/>
-                </a:lnTo>
-                <a:lnTo>
-                  <a:pt x="0" y="196358"/>
-                </a:lnTo>
-                <a:lnTo>
-                  <a:pt x="105029" y="196358"/>
+                  <a:pt x="159913" y="245448"/>
+                </a:lnTo>
+                <a:lnTo>
+                  <a:pt x="159913" y="159913"/>
+                </a:lnTo>
+                <a:lnTo>
+                  <a:pt x="245448" y="159913"/>
+                </a:lnTo>
+                <a:lnTo>
+                  <a:pt x="245448" y="85535"/>
+                </a:lnTo>
+                <a:lnTo>
+                  <a:pt x="159913" y="85535"/>
+                </a:lnTo>
+                <a:lnTo>
+                  <a:pt x="159913" y="0"/>
+                </a:lnTo>
+                <a:lnTo>
+                  <a:pt x="85535" y="0"/>
+                </a:lnTo>
+                <a:lnTo>
+                  <a:pt x="85535" y="85535"/>
+                </a:lnTo>
+                <a:lnTo>
+                  <a:pt x="0" y="85535"/>
+                </a:lnTo>
+                <a:lnTo>
+                  <a:pt x="0" y="159913"/>
+                </a:lnTo>
+                <a:lnTo>
+                  <a:pt x="85535" y="159913"/>
                 </a:lnTo>
                 <a:close/>
               </a:path>
@@ -21114,8 +21114,8 @@
         </p:nvSpPr>
         <p:spPr>
           <a:xfrm>
-            <a:off x="8041315" y="2738951"/>
-            <a:ext cx="63931" cy="118728"/>
+            <a:off x="8299787" y="2749498"/>
+            <a:ext cx="52065" cy="96692"/>
           </a:xfrm>
           <a:custGeom>
             <a:avLst/>
@@ -21124,15 +21124,15 @@
             <a:cxnLst/>
             <a:rect l="l" t="t" r="r" b="b"/>
             <a:pathLst>
-              <a:path w="63931" h="118728">
+              <a:path w="52065" h="96692">
                 <a:moveTo>
-                  <a:pt x="0" y="118728"/>
+                  <a:pt x="0" y="96692"/>
                 </a:moveTo>
                 <a:lnTo>
-                  <a:pt x="63931" y="118728"/>
-                </a:lnTo>
-                <a:lnTo>
-                  <a:pt x="63931" y="0"/>
+                  <a:pt x="52065" y="96692"/>
+                </a:lnTo>
+                <a:lnTo>
+                  <a:pt x="52065" y="0"/>
                 </a:lnTo>
                 <a:lnTo>
                   <a:pt x="0" y="0"/>
@@ -21160,8 +21160,8 @@
         </p:nvSpPr>
         <p:spPr>
           <a:xfrm>
-            <a:off x="7927153" y="2501494"/>
-            <a:ext cx="292254" cy="237456"/>
+            <a:off x="8206815" y="2556115"/>
+            <a:ext cx="238010" cy="193383"/>
           </a:xfrm>
           <a:custGeom>
             <a:avLst/>
@@ -21170,15 +21170,15 @@
             <a:cxnLst/>
             <a:rect l="l" t="t" r="r" b="b"/>
             <a:pathLst>
-              <a:path w="292254" h="237456">
+              <a:path w="238010" h="193383">
                 <a:moveTo>
-                  <a:pt x="0" y="237456"/>
+                  <a:pt x="0" y="193383"/>
                 </a:moveTo>
                 <a:lnTo>
-                  <a:pt x="292254" y="237456"/>
-                </a:lnTo>
-                <a:lnTo>
-                  <a:pt x="146127" y="0"/>
+                  <a:pt x="238010" y="193383"/>
+                </a:lnTo>
+                <a:lnTo>
+                  <a:pt x="119005" y="0"/>
                 </a:lnTo>
                 <a:close/>
               </a:path>
@@ -21203,8 +21203,8 @@
         </p:nvSpPr>
         <p:spPr>
           <a:xfrm>
-            <a:off x="9836953" y="2538026"/>
-            <a:ext cx="164393" cy="283121"/>
+            <a:off x="9927429" y="2585866"/>
+            <a:ext cx="133881" cy="230572"/>
           </a:xfrm>
           <a:custGeom>
             <a:avLst/>
@@ -21213,15 +21213,15 @@
             <a:cxnLst/>
             <a:rect l="l" t="t" r="r" b="b"/>
             <a:pathLst>
-              <a:path w="164393" h="283121">
+              <a:path w="133881" h="230572">
                 <a:moveTo>
-                  <a:pt x="0" y="246589"/>
+                  <a:pt x="0" y="200821"/>
                 </a:moveTo>
                 <a:lnTo>
-                  <a:pt x="164393" y="283121"/>
-                </a:lnTo>
-                <a:lnTo>
-                  <a:pt x="164393" y="36532"/>
+                  <a:pt x="133881" y="230572"/>
+                </a:lnTo>
+                <a:lnTo>
+                  <a:pt x="133881" y="29751"/>
                 </a:lnTo>
                 <a:lnTo>
                   <a:pt x="0" y="0"/>
@@ -21249,8 +21249,8 @@
         </p:nvSpPr>
         <p:spPr>
           <a:xfrm>
-            <a:off x="10001346" y="2538026"/>
-            <a:ext cx="164393" cy="283121"/>
+            <a:off x="10061309" y="2585866"/>
+            <a:ext cx="133881" cy="230572"/>
           </a:xfrm>
           <a:custGeom>
             <a:avLst/>
@@ -21259,18 +21259,18 @@
             <a:cxnLst/>
             <a:rect l="l" t="t" r="r" b="b"/>
             <a:pathLst>
-              <a:path w="164393" h="283121">
+              <a:path w="133881" h="230572">
                 <a:moveTo>
-                  <a:pt x="164393" y="246589"/>
+                  <a:pt x="133881" y="200821"/>
                 </a:moveTo>
                 <a:lnTo>
-                  <a:pt x="0" y="283121"/>
-                </a:lnTo>
-                <a:lnTo>
-                  <a:pt x="0" y="36532"/>
-                </a:lnTo>
-                <a:lnTo>
-                  <a:pt x="164393" y="0"/>
+                  <a:pt x="0" y="230572"/>
+                </a:lnTo>
+                <a:lnTo>
+                  <a:pt x="0" y="29751"/>
+                </a:lnTo>
+                <a:lnTo>
+                  <a:pt x="133881" y="0"/>
                 </a:lnTo>
                 <a:close/>
               </a:path>
@@ -21295,8 +21295,8 @@
         </p:nvSpPr>
         <p:spPr>
           <a:xfrm>
-            <a:off x="9923716" y="2985540"/>
-            <a:ext cx="155260" cy="118728"/>
+            <a:off x="9998088" y="2950319"/>
+            <a:ext cx="126443" cy="96692"/>
           </a:xfrm>
           <a:custGeom>
             <a:avLst/>
@@ -21305,27 +21305,27 @@
             <a:cxnLst/>
             <a:rect l="l" t="t" r="r" b="b"/>
             <a:pathLst>
-              <a:path w="155260" h="118728">
+              <a:path w="126443" h="96692">
                 <a:moveTo>
-                  <a:pt x="155260" y="118728"/>
+                  <a:pt x="126443" y="96692"/>
                 </a:moveTo>
                 <a:lnTo>
-                  <a:pt x="145112" y="59364"/>
-                </a:lnTo>
-                <a:lnTo>
-                  <a:pt x="116191" y="15729"/>
-                </a:lnTo>
-                <a:lnTo>
-                  <a:pt x="77630" y="0"/>
-                </a:lnTo>
-                <a:lnTo>
-                  <a:pt x="38561" y="15729"/>
-                </a:lnTo>
-                <a:lnTo>
-                  <a:pt x="10148" y="59364"/>
-                </a:lnTo>
-                <a:lnTo>
-                  <a:pt x="0" y="118728"/>
+                  <a:pt x="118179" y="48346"/>
+                </a:lnTo>
+                <a:lnTo>
+                  <a:pt x="94626" y="12810"/>
+                </a:lnTo>
+                <a:lnTo>
+                  <a:pt x="63221" y="0"/>
+                </a:lnTo>
+                <a:lnTo>
+                  <a:pt x="31404" y="12810"/>
+                </a:lnTo>
+                <a:lnTo>
+                  <a:pt x="8264" y="48346"/>
+                </a:lnTo>
+                <a:lnTo>
+                  <a:pt x="0" y="96692"/>
                 </a:lnTo>
               </a:path>
             </a:pathLst>
@@ -21347,8 +21347,8 @@
         </p:nvSpPr>
         <p:spPr>
           <a:xfrm>
-            <a:off x="9850652" y="3104268"/>
-            <a:ext cx="301387" cy="200925"/>
+            <a:off x="9938586" y="3047011"/>
+            <a:ext cx="245448" cy="163632"/>
           </a:xfrm>
           <a:custGeom>
             <a:avLst/>
@@ -21357,18 +21357,18 @@
             <a:cxnLst/>
             <a:rect l="l" t="t" r="r" b="b"/>
             <a:pathLst>
-              <a:path w="301387" h="200925">
+              <a:path w="245448" h="163632">
                 <a:moveTo>
                   <a:pt x="0" y="0"/>
                 </a:moveTo>
                 <a:lnTo>
-                  <a:pt x="301387" y="0"/>
-                </a:lnTo>
-                <a:lnTo>
-                  <a:pt x="264855" y="200925"/>
-                </a:lnTo>
-                <a:lnTo>
-                  <a:pt x="36532" y="200925"/>
+                  <a:pt x="245448" y="0"/>
+                </a:lnTo>
+                <a:lnTo>
+                  <a:pt x="215697" y="163632"/>
+                </a:lnTo>
+                <a:lnTo>
+                  <a:pt x="29751" y="163632"/>
                 </a:lnTo>
                 <a:close/>
               </a:path>
@@ -21393,8 +21393,8 @@
         </p:nvSpPr>
         <p:spPr>
           <a:xfrm>
-            <a:off x="7936286" y="3423921"/>
-            <a:ext cx="273988" cy="337919"/>
+            <a:off x="8214253" y="3307334"/>
+            <a:ext cx="223134" cy="275199"/>
           </a:xfrm>
           <a:custGeom>
             <a:avLst/>
@@ -21403,21 +21403,21 @@
             <a:cxnLst/>
             <a:rect l="l" t="t" r="r" b="b"/>
             <a:pathLst>
-              <a:path w="273988" h="337919">
+              <a:path w="223134" h="275199">
                 <a:moveTo>
-                  <a:pt x="0" y="337919"/>
+                  <a:pt x="0" y="275199"/>
                 </a:moveTo>
                 <a:lnTo>
-                  <a:pt x="273988" y="337919"/>
-                </a:lnTo>
-                <a:lnTo>
-                  <a:pt x="273988" y="155260"/>
-                </a:lnTo>
-                <a:lnTo>
-                  <a:pt x="136994" y="0"/>
-                </a:lnTo>
-                <a:lnTo>
-                  <a:pt x="0" y="155260"/>
+                  <a:pt x="223134" y="275199"/>
+                </a:lnTo>
+                <a:lnTo>
+                  <a:pt x="223134" y="126443"/>
+                </a:lnTo>
+                <a:lnTo>
+                  <a:pt x="111567" y="0"/>
+                </a:lnTo>
+                <a:lnTo>
+                  <a:pt x="0" y="126443"/>
                 </a:lnTo>
                 <a:close/>
               </a:path>
@@ -21442,8 +21442,8 @@
         </p:nvSpPr>
         <p:spPr>
           <a:xfrm>
-            <a:off x="4785421" y="2349279"/>
-            <a:ext cx="334875" cy="334875"/>
+            <a:off x="5366397" y="2315626"/>
+            <a:ext cx="381808" cy="381808"/>
           </a:xfrm>
           <a:prstGeom prst="ellipse">
             <a:avLst/>
@@ -21467,8 +21467,8 @@
         </p:nvSpPr>
         <p:spPr>
           <a:xfrm>
-            <a:off x="4881824" y="2445682"/>
-            <a:ext cx="142068" cy="142068"/>
+            <a:off x="5476311" y="2425540"/>
+            <a:ext cx="161979" cy="161979"/>
           </a:xfrm>
           <a:prstGeom prst="ellipse">
             <a:avLst/>
@@ -21492,8 +21492,8 @@
         </p:nvSpPr>
         <p:spPr>
           <a:xfrm>
-            <a:off x="7922587" y="2990107"/>
-            <a:ext cx="301387" cy="301387"/>
+            <a:off x="8203096" y="2954038"/>
+            <a:ext cx="245448" cy="245448"/>
           </a:xfrm>
           <a:prstGeom prst="ellipse">
             <a:avLst/>
@@ -21517,8 +21517,8 @@
         </p:nvSpPr>
         <p:spPr>
           <a:xfrm>
-            <a:off x="8009350" y="3076870"/>
-            <a:ext cx="127861" cy="127861"/>
+            <a:off x="8273755" y="3024697"/>
+            <a:ext cx="104129" cy="104129"/>
           </a:xfrm>
           <a:prstGeom prst="ellipse">
             <a:avLst/>
@@ -21542,8 +21542,8 @@
         </p:nvSpPr>
         <p:spPr>
           <a:xfrm flipV="1">
-            <a:off x="2811691" y="2334057"/>
-            <a:ext cx="0" cy="365318"/>
+            <a:off x="3116045" y="2298271"/>
+            <a:ext cx="0" cy="416518"/>
           </a:xfrm>
           <a:prstGeom prst="line">
             <a:avLst/>
@@ -21565,8 +21565,8 @@
         </p:nvSpPr>
         <p:spPr>
           <a:xfrm flipV="1">
-            <a:off x="640080" y="1755637"/>
-            <a:ext cx="0" cy="2029543"/>
+            <a:off x="640080" y="1638785"/>
+            <a:ext cx="0" cy="2313986"/>
           </a:xfrm>
           <a:prstGeom prst="line">
             <a:avLst/>
@@ -21588,8 +21588,8 @@
         </p:nvSpPr>
         <p:spPr>
           <a:xfrm flipV="1">
-            <a:off x="1147466" y="1755637"/>
-            <a:ext cx="0" cy="2029543"/>
+            <a:off x="1218577" y="1638785"/>
+            <a:ext cx="0" cy="2313986"/>
           </a:xfrm>
           <a:prstGeom prst="line">
             <a:avLst/>
@@ -21611,8 +21611,8 @@
         </p:nvSpPr>
         <p:spPr>
           <a:xfrm flipV="1">
-            <a:off x="1654851" y="1755637"/>
-            <a:ext cx="0" cy="2029543"/>
+            <a:off x="1797073" y="1638785"/>
+            <a:ext cx="0" cy="2313986"/>
           </a:xfrm>
           <a:prstGeom prst="line">
             <a:avLst/>
@@ -21634,8 +21634,8 @@
         </p:nvSpPr>
         <p:spPr>
           <a:xfrm flipV="1">
-            <a:off x="2162237" y="1755637"/>
-            <a:ext cx="0" cy="2029543"/>
+            <a:off x="2375570" y="1638785"/>
+            <a:ext cx="0" cy="2313986"/>
           </a:xfrm>
           <a:prstGeom prst="line">
             <a:avLst/>
@@ -21657,8 +21657,8 @@
         </p:nvSpPr>
         <p:spPr>
           <a:xfrm flipV="1">
-            <a:off x="2669623" y="1755637"/>
-            <a:ext cx="0" cy="2029543"/>
+            <a:off x="2954066" y="1638785"/>
+            <a:ext cx="0" cy="2313986"/>
           </a:xfrm>
           <a:prstGeom prst="line">
             <a:avLst/>
@@ -21680,8 +21680,8 @@
         </p:nvSpPr>
         <p:spPr>
           <a:xfrm flipV="1">
-            <a:off x="3177008" y="1755637"/>
-            <a:ext cx="0" cy="2029543"/>
+            <a:off x="3532563" y="1638785"/>
+            <a:ext cx="0" cy="2313986"/>
           </a:xfrm>
           <a:prstGeom prst="line">
             <a:avLst/>
@@ -21703,8 +21703,8 @@
         </p:nvSpPr>
         <p:spPr>
           <a:xfrm flipV="1">
-            <a:off x="3684394" y="1755637"/>
-            <a:ext cx="0" cy="2029543"/>
+            <a:off x="4111059" y="1638785"/>
+            <a:ext cx="0" cy="2313986"/>
           </a:xfrm>
           <a:prstGeom prst="line">
             <a:avLst/>
@@ -21726,8 +21726,8 @@
         </p:nvSpPr>
         <p:spPr>
           <a:xfrm flipV="1">
-            <a:off x="4191780" y="1755637"/>
-            <a:ext cx="0" cy="2029543"/>
+            <a:off x="4689556" y="1638785"/>
+            <a:ext cx="0" cy="2313986"/>
           </a:xfrm>
           <a:prstGeom prst="line">
             <a:avLst/>
@@ -21749,8 +21749,8 @@
         </p:nvSpPr>
         <p:spPr>
           <a:xfrm flipV="1">
-            <a:off x="4699165" y="1755637"/>
-            <a:ext cx="0" cy="2029543"/>
+            <a:off x="5268052" y="1638785"/>
+            <a:ext cx="0" cy="2313986"/>
           </a:xfrm>
           <a:prstGeom prst="line">
             <a:avLst/>
@@ -21772,8 +21772,8 @@
         </p:nvSpPr>
         <p:spPr>
           <a:xfrm flipV="1">
-            <a:off x="5206551" y="1755637"/>
-            <a:ext cx="0" cy="2029543"/>
+            <a:off x="5846549" y="1638785"/>
+            <a:ext cx="0" cy="2313986"/>
           </a:xfrm>
           <a:prstGeom prst="line">
             <a:avLst/>
@@ -21795,8 +21795,8 @@
         </p:nvSpPr>
         <p:spPr>
           <a:xfrm flipV="1">
-            <a:off x="5713937" y="1755637"/>
-            <a:ext cx="0" cy="2029543"/>
+            <a:off x="6425045" y="1638785"/>
+            <a:ext cx="0" cy="2313986"/>
           </a:xfrm>
           <a:prstGeom prst="line">
             <a:avLst/>
@@ -21818,8 +21818,8 @@
         </p:nvSpPr>
         <p:spPr>
           <a:xfrm>
-            <a:off x="640080" y="3785180"/>
-            <a:ext cx="5073857" cy="0"/>
+            <a:off x="640080" y="3952771"/>
+            <a:ext cx="5784965" cy="0"/>
           </a:xfrm>
           <a:prstGeom prst="line">
             <a:avLst/>
@@ -21841,8 +21841,8 @@
         </p:nvSpPr>
         <p:spPr>
           <a:xfrm>
-            <a:off x="640080" y="3277794"/>
-            <a:ext cx="5073857" cy="0"/>
+            <a:off x="640080" y="3374275"/>
+            <a:ext cx="5784965" cy="0"/>
           </a:xfrm>
           <a:prstGeom prst="line">
             <a:avLst/>
@@ -21864,8 +21864,8 @@
         </p:nvSpPr>
         <p:spPr>
           <a:xfrm>
-            <a:off x="640080" y="2770409"/>
-            <a:ext cx="5073857" cy="0"/>
+            <a:off x="640080" y="2795778"/>
+            <a:ext cx="5784965" cy="0"/>
           </a:xfrm>
           <a:prstGeom prst="line">
             <a:avLst/>
@@ -21887,8 +21887,8 @@
         </p:nvSpPr>
         <p:spPr>
           <a:xfrm>
-            <a:off x="640080" y="2263023"/>
-            <a:ext cx="5073857" cy="0"/>
+            <a:off x="640080" y="2217281"/>
+            <a:ext cx="5784965" cy="0"/>
           </a:xfrm>
           <a:prstGeom prst="line">
             <a:avLst/>
@@ -21910,8 +21910,8 @@
         </p:nvSpPr>
         <p:spPr>
           <a:xfrm>
-            <a:off x="640080" y="1755637"/>
-            <a:ext cx="5073857" cy="0"/>
+            <a:off x="640080" y="1638785"/>
+            <a:ext cx="5784965" cy="0"/>
           </a:xfrm>
           <a:prstGeom prst="line">
             <a:avLst/>
@@ -21933,8 +21933,8 @@
         </p:nvSpPr>
         <p:spPr>
           <a:xfrm flipV="1">
-            <a:off x="6677970" y="2339131"/>
-            <a:ext cx="0" cy="862556"/>
+            <a:off x="7210148" y="2444548"/>
+            <a:ext cx="0" cy="702460"/>
           </a:xfrm>
           <a:prstGeom prst="line">
             <a:avLst/>
@@ -21957,8 +21957,8 @@
         </p:nvSpPr>
         <p:spPr>
           <a:xfrm>
-            <a:off x="6246692" y="2770409"/>
-            <a:ext cx="862556" cy="0"/>
+            <a:off x="6858918" y="2795778"/>
+            <a:ext cx="702460" cy="0"/>
           </a:xfrm>
           <a:prstGeom prst="line">
             <a:avLst/>
@@ -21980,8 +21980,8 @@
         </p:nvSpPr>
         <p:spPr>
           <a:xfrm flipV="1">
-            <a:off x="7972818" y="2063113"/>
-            <a:ext cx="0" cy="328786"/>
+            <a:off x="8244004" y="2199100"/>
+            <a:ext cx="0" cy="267761"/>
           </a:xfrm>
           <a:prstGeom prst="line">
             <a:avLst/>
@@ -22003,7 +22003,7 @@
         </p:nvSpPr>
         <p:spPr>
           <a:xfrm>
-            <a:off x="6473754" y="1920307"/>
+            <a:off x="7005932" y="2068103"/>
             <a:ext cx="408432" cy="381000"/>
           </a:xfrm>
           <a:prstGeom prst="rect">
@@ -22042,7 +22042,7 @@
         </p:nvSpPr>
         <p:spPr>
           <a:xfrm>
-            <a:off x="6473754" y="3239510"/>
+            <a:off x="7005932" y="3142453"/>
             <a:ext cx="408432" cy="381000"/>
           </a:xfrm>
           <a:prstGeom prst="rect">
@@ -22081,7 +22081,7 @@
         </p:nvSpPr>
         <p:spPr>
           <a:xfrm>
-            <a:off x="7133355" y="2579909"/>
+            <a:off x="7543107" y="2605278"/>
             <a:ext cx="408432" cy="381000"/>
           </a:xfrm>
           <a:prstGeom prst="rect">
@@ -22120,7 +22120,7 @@
         </p:nvSpPr>
         <p:spPr>
           <a:xfrm>
-            <a:off x="5814152" y="2579909"/>
+            <a:off x="6468757" y="2605278"/>
             <a:ext cx="408432" cy="381000"/>
           </a:xfrm>
           <a:prstGeom prst="rect">
@@ -22159,7 +22159,7 @@
         </p:nvSpPr>
         <p:spPr>
           <a:xfrm>
-            <a:off x="9267238" y="1653930"/>
+            <a:off x="9439154" y="1830506"/>
             <a:ext cx="707136" cy="381000"/>
           </a:xfrm>
           <a:prstGeom prst="rect">
@@ -22198,7 +22198,7 @@
         </p:nvSpPr>
         <p:spPr>
           <a:xfrm>
-            <a:off x="8556898" y="2037006"/>
+            <a:off x="8798675" y="2142481"/>
             <a:ext cx="707136" cy="381000"/>
           </a:xfrm>
           <a:prstGeom prst="rect">
@@ -22237,7 +22237,7 @@
         </p:nvSpPr>
         <p:spPr>
           <a:xfrm>
-            <a:off x="10484964" y="2037006"/>
+            <a:off x="10534165" y="2142481"/>
             <a:ext cx="707136" cy="381000"/>
           </a:xfrm>
           <a:prstGeom prst="rect">
@@ -22276,7 +22276,7 @@
         </p:nvSpPr>
         <p:spPr>
           <a:xfrm>
-            <a:off x="8556898" y="2493653"/>
+            <a:off x="8798675" y="2514371"/>
             <a:ext cx="707136" cy="381000"/>
           </a:xfrm>
           <a:prstGeom prst="rect">
@@ -22315,7 +22315,7 @@
         </p:nvSpPr>
         <p:spPr>
           <a:xfrm>
-            <a:off x="10335612" y="2493653"/>
+            <a:off x="10384813" y="2514371"/>
             <a:ext cx="1005840" cy="381000"/>
           </a:xfrm>
           <a:prstGeom prst="rect">
@@ -22354,7 +22354,7 @@
         </p:nvSpPr>
         <p:spPr>
           <a:xfrm>
-            <a:off x="8258194" y="2950300"/>
+            <a:off x="8499971" y="2886262"/>
             <a:ext cx="1304544" cy="381000"/>
           </a:xfrm>
           <a:prstGeom prst="rect">
@@ -22393,7 +22393,7 @@
         </p:nvSpPr>
         <p:spPr>
           <a:xfrm>
-            <a:off x="10484964" y="2950300"/>
+            <a:off x="10534165" y="2886262"/>
             <a:ext cx="707136" cy="381000"/>
           </a:xfrm>
           <a:prstGeom prst="rect">
@@ -22432,7 +22432,7 @@
         </p:nvSpPr>
         <p:spPr>
           <a:xfrm>
-            <a:off x="8706250" y="3406947"/>
+            <a:off x="8948027" y="3258153"/>
             <a:ext cx="408432" cy="381000"/>
           </a:xfrm>
           <a:prstGeom prst="rect">

--- a/dist/초3/사회·역사/지역과공간/초3_사회·역사_지역과공간_02_그림과기호로나타내기.pptx
+++ b/dist/초3/사회·역사/지역과공간/초3_사회·역사_지역과공간_02_그림과기호로나타내기.pptx
@@ -121,13 +121,13 @@
   <p:extLst>
     <p:ext uri="{521415D9-36F7-43E2-AB2F-B90AF26B5E84}">
       <p14:sectionLst xmlns:p14="http://schemas.microsoft.com/office/powerpoint/2010/main">
-        <p14:section name="도입" id="{52a219ec-b72c-2d6d-0565-70249ff4e9a5}">
+        <p14:section name="도입" id="{f3e57365-bff5-88c2-4e60-53db857c32fe}">
           <p14:sldIdLst>
             <p14:sldId id="256"/>
             <p14:sldId id="257"/>
           </p14:sldIdLst>
         </p14:section>
-        <p14:section name="개념" id="{435f534d-f28b-0c96-d47b-0c77220eee95}">
+        <p14:section name="개념" id="{ab913e8c-764c-fd9f-263a-480a647697f2}">
           <p14:sldIdLst>
             <p14:sldId id="258"/>
             <p14:sldId id="259"/>
@@ -135,7 +135,7 @@
             <p14:sldId id="263"/>
           </p14:sldIdLst>
         </p14:section>
-        <p14:section name="연습" id="{30b6fa40-d8f8-4bd6-cc2f-3796fb24ffa4}">
+        <p14:section name="연습" id="{764bf5f6-7770-e2cd-49b7-73ae1393f29d}">
           <p14:sldIdLst>
             <p14:sldId id="260"/>
             <p14:sldId id="261"/>
@@ -143,25 +143,25 @@
             <p14:sldId id="265"/>
           </p14:sldIdLst>
         </p14:section>
-        <p14:section name="개념" id="{80dfdabb-d75a-8564-6c28-aef32db27476}">
+        <p14:section name="개념" id="{cab2758c-9468-7777-20b2-4143d0e27979}">
           <p14:sldIdLst/>
         </p14:section>
-        <p14:section name="연습" id="{c55d34f3-4a00-cecc-1035-7d627d5d4ef4}">
+        <p14:section name="연습" id="{679af97f-2323-92ee-f23c-3d1e7e102fd3}">
           <p14:sldIdLst/>
         </p14:section>
-        <p14:section name="확인" id="{627d94ac-3f2e-a819-0dc9-e26e2ebb09f7}">
+        <p14:section name="확인" id="{8dbabebf-e896-1cfb-3dc3-acfe86d7895f}">
           <p14:sldIdLst>
             <p14:sldId id="266"/>
             <p14:sldId id="267"/>
             <p14:sldId id="268"/>
           </p14:sldIdLst>
         </p14:section>
-        <p14:section name="정리" id="{368f8fed-7ff3-a352-e457-126456917cb5}">
+        <p14:section name="정리" id="{cad2d3d7-0115-2b19-145d-6f55f2958bfb}">
           <p14:sldIdLst>
             <p14:sldId id="269"/>
           </p14:sldIdLst>
         </p14:section>
-        <p14:section name="보충" id="{b5298ce5-404b-9ab5-fdff-f3a265b13e31}">
+        <p14:section name="보충" id="{5c34cb70-c1c6-632a-d687-583ac202b750}">
           <p14:sldIdLst>
             <p14:sldId id="270"/>
           </p14:sldIdLst>
@@ -6919,7 +6919,7 @@
         </p:nvSpPr>
         <p:spPr>
           <a:xfrm>
-            <a:off x="548640" y="2237232"/>
+            <a:off x="548640" y="2427732"/>
             <a:ext cx="548640" cy="548640"/>
           </a:xfrm>
           <a:prstGeom prst="ellipse">
@@ -6964,7 +6964,7 @@
         </p:nvSpPr>
         <p:spPr>
           <a:xfrm>
-            <a:off x="1325880" y="2237232"/>
+            <a:off x="1325880" y="2427732"/>
             <a:ext cx="5122012" cy="548640"/>
           </a:xfrm>
           <a:prstGeom prst="rect">
@@ -7003,7 +7003,7 @@
         </p:nvSpPr>
         <p:spPr>
           <a:xfrm>
-            <a:off x="548640" y="2996184"/>
+            <a:off x="548640" y="3140964"/>
             <a:ext cx="548640" cy="548640"/>
           </a:xfrm>
           <a:prstGeom prst="ellipse">
@@ -7048,8 +7048,8 @@
         </p:nvSpPr>
         <p:spPr>
           <a:xfrm>
-            <a:off x="1325880" y="2950464"/>
-            <a:ext cx="5122012" cy="929640"/>
+            <a:off x="1325880" y="3140964"/>
+            <a:ext cx="5122012" cy="548640"/>
           </a:xfrm>
           <a:prstGeom prst="rect">
             <a:avLst/>
@@ -7073,7 +7073,7 @@
                 <a:ea typeface="맑은 고딕" pitchFamily="34" charset="-122"/>
                 <a:cs typeface="맑은 고딕" pitchFamily="34" charset="-120"/>
               </a:rPr>
-              <a:t>큰길과 우리 집을 먼저 그려요.</a:t>
+              <a:t>큰길과 우리 집을 그려요.</a:t>
             </a:r>
             <a:endParaRPr lang="ko-KR" sz="3000" dirty="0"/>
           </a:p>
@@ -7087,7 +7087,7 @@
         </p:nvSpPr>
         <p:spPr>
           <a:xfrm>
-            <a:off x="548640" y="4044696"/>
+            <a:off x="548640" y="3854196"/>
             <a:ext cx="548640" cy="548640"/>
           </a:xfrm>
           <a:prstGeom prst="ellipse">
@@ -7132,7 +7132,7 @@
         </p:nvSpPr>
         <p:spPr>
           <a:xfrm>
-            <a:off x="1325880" y="4044696"/>
+            <a:off x="1325880" y="3854196"/>
             <a:ext cx="5122012" cy="548640"/>
           </a:xfrm>
           <a:prstGeom prst="rect">
@@ -7171,7 +7171,7 @@
         </p:nvSpPr>
         <p:spPr>
           <a:xfrm>
-            <a:off x="548640" y="4757928"/>
+            <a:off x="548640" y="4567428"/>
             <a:ext cx="548640" cy="548640"/>
           </a:xfrm>
           <a:prstGeom prst="ellipse">
@@ -7216,7 +7216,7 @@
         </p:nvSpPr>
         <p:spPr>
           <a:xfrm>
-            <a:off x="1325880" y="4757928"/>
+            <a:off x="1325880" y="4567428"/>
             <a:ext cx="5122012" cy="548640"/>
           </a:xfrm>
           <a:prstGeom prst="rect">

--- a/dist/초3/사회·역사/지역과공간/초3_사회·역사_지역과공간_02_그림과기호로나타내기.pptx
+++ b/dist/초3/사회·역사/지역과공간/초3_사회·역사_지역과공간_02_그림과기호로나타내기.pptx
@@ -121,13 +121,13 @@
   <p:extLst>
     <p:ext uri="{521415D9-36F7-43E2-AB2F-B90AF26B5E84}">
       <p14:sectionLst xmlns:p14="http://schemas.microsoft.com/office/powerpoint/2010/main">
-        <p14:section name="도입" id="{f3e57365-bff5-88c2-4e60-53db857c32fe}">
+        <p14:section name="도입" id="{5c18c952-8976-2fc3-cf0e-6a8473d38f09}">
           <p14:sldIdLst>
             <p14:sldId id="256"/>
             <p14:sldId id="257"/>
           </p14:sldIdLst>
         </p14:section>
-        <p14:section name="개념" id="{ab913e8c-764c-fd9f-263a-480a647697f2}">
+        <p14:section name="개념" id="{84774199-e40d-c37f-1561-b537c5f938ab}">
           <p14:sldIdLst>
             <p14:sldId id="258"/>
             <p14:sldId id="259"/>
@@ -135,7 +135,7 @@
             <p14:sldId id="263"/>
           </p14:sldIdLst>
         </p14:section>
-        <p14:section name="연습" id="{764bf5f6-7770-e2cd-49b7-73ae1393f29d}">
+        <p14:section name="연습" id="{2b20b33c-d908-e547-3e3e-dd0f39337710}">
           <p14:sldIdLst>
             <p14:sldId id="260"/>
             <p14:sldId id="261"/>
@@ -143,25 +143,25 @@
             <p14:sldId id="265"/>
           </p14:sldIdLst>
         </p14:section>
-        <p14:section name="개념" id="{cab2758c-9468-7777-20b2-4143d0e27979}">
+        <p14:section name="개념" id="{0a6cdcce-ac93-5dd0-64ce-cddd22b2f073}">
           <p14:sldIdLst/>
         </p14:section>
-        <p14:section name="연습" id="{679af97f-2323-92ee-f23c-3d1e7e102fd3}">
+        <p14:section name="연습" id="{0e0d9a33-02ff-0885-a5f2-95d361297e0f}">
           <p14:sldIdLst/>
         </p14:section>
-        <p14:section name="확인" id="{8dbabebf-e896-1cfb-3dc3-acfe86d7895f}">
+        <p14:section name="확인" id="{7e4e2815-d9aa-1338-02de-6d96af66d6bb}">
           <p14:sldIdLst>
             <p14:sldId id="266"/>
             <p14:sldId id="267"/>
             <p14:sldId id="268"/>
           </p14:sldIdLst>
         </p14:section>
-        <p14:section name="정리" id="{cad2d3d7-0115-2b19-145d-6f55f2958bfb}">
+        <p14:section name="정리" id="{18784ed6-1270-d865-b69c-5de198dc5323}">
           <p14:sldIdLst>
             <p14:sldId id="269"/>
           </p14:sldIdLst>
         </p14:section>
-        <p14:section name="보충" id="{5c34cb70-c1c6-632a-d687-583ac202b750}">
+        <p14:section name="보충" id="{e1a7ed8b-dbac-f86f-0c87-afed806df576}">
           <p14:sldIdLst>
             <p14:sldId id="270"/>
           </p14:sldIdLst>
